--- a/PMB_Architecture_Pitch.pptx
+++ b/PMB_Architecture_Pitch.pptx
@@ -8,9 +8,16 @@
     <p:sldId id="256" r:id="rId2"/>
     <p:sldId id="257" r:id="rId3"/>
     <p:sldId id="258" r:id="rId4"/>
+    <p:sldId id="259" r:id="rId5"/>
+    <p:sldId id="260" r:id="rId6"/>
+    <p:sldId id="261" r:id="rId7"/>
+    <p:sldId id="262" r:id="rId8"/>
+    <p:sldId id="263" r:id="rId9"/>
+    <p:sldId id="264" r:id="rId10"/>
+    <p:sldId id="265" r:id="rId11"/>
   </p:sldIdLst>
   <p:notesMasterIdLst>
-    <p:notesMasterId r:id="rId5"/>
+    <p:notesMasterId r:id="rId12"/>
   </p:notesMasterIdLst>
   <p:sldSz cx="12192000" cy="6858000"/>
   <p:notesSz cx="6858000" cy="12192000"/>
@@ -546,6 +553,94 @@
 </p:notes>
 </file>
 
+<file path=ppt/notesSlides/notesSlide10.xml><?xml version="1.0" encoding="utf-8"?>
+<p:notes xmlns:a="http://schemas.openxmlformats.org/drawingml/2006/main" xmlns:r="http://schemas.openxmlformats.org/officeDocument/2006/relationships" xmlns:p="http://schemas.openxmlformats.org/presentationml/2006/main">
+  <p:cSld>
+    <p:spTree>
+      <p:nvGrpSpPr>
+        <p:cNvPr id="1" name=""/>
+        <p:cNvGrpSpPr/>
+        <p:nvPr/>
+      </p:nvGrpSpPr>
+      <p:grpSpPr>
+        <a:xfrm>
+          <a:off x="0" y="0"/>
+          <a:ext cx="0" cy="0"/>
+          <a:chOff x="0" y="0"/>
+          <a:chExt cx="0" cy="0"/>
+        </a:xfrm>
+      </p:grpSpPr>
+      <p:sp>
+        <p:nvSpPr>
+          <p:cNvPr id="2" name="Slide Image Placeholder 1"/>
+          <p:cNvSpPr>
+            <a:spLocks noGrp="1" noRot="1" noChangeAspect="1"/>
+          </p:cNvSpPr>
+          <p:nvPr>
+            <p:ph type="sldImg"/>
+          </p:nvPr>
+        </p:nvSpPr>
+        <p:spPr/>
+      </p:sp>
+      <p:sp>
+        <p:nvSpPr>
+          <p:cNvPr id="3" name="Notes Placeholder 2"/>
+          <p:cNvSpPr>
+            <a:spLocks noGrp="1"/>
+          </p:cNvSpPr>
+          <p:nvPr>
+            <p:ph type="body" idx="1"/>
+          </p:nvPr>
+        </p:nvSpPr>
+        <p:spPr/>
+        <p:txBody>
+          <a:bodyPr/>
+          <a:lstStyle/>
+          <a:p>
+            <a:r>
+              <a:rPr lang="en-US" dirty="0"/>
+              <a:t/>
+            </a:r>
+            <a:endParaRPr lang="en-US" dirty="0"/>
+          </a:p>
+        </p:txBody>
+      </p:sp>
+      <p:sp>
+        <p:nvSpPr>
+          <p:cNvPr id="4" name="Slide Number Placeholder 3"/>
+          <p:cNvSpPr>
+            <a:spLocks noGrp="1"/>
+          </p:cNvSpPr>
+          <p:nvPr>
+            <p:ph type="sldNum" sz="quarter" idx="10"/>
+          </p:nvPr>
+        </p:nvSpPr>
+        <p:spPr/>
+        <p:txBody>
+          <a:bodyPr/>
+          <a:lstStyle/>
+          <a:p>
+            <a:fld id="{F7021451-1387-4CA6-816F-3879F97B5CBC}" type="slidenum">
+              <a:rPr lang="en-US"/>
+              <a:t>10</a:t>
+            </a:fld>
+            <a:endParaRPr lang="en-US"/>
+          </a:p>
+        </p:txBody>
+      </p:sp>
+    </p:spTree>
+    <p:extLst>
+      <p:ext uri="{BB962C8B-B14F-4D97-AF65-F5344CB8AC3E}">
+        <p14:creationId xmlns:p14="http://schemas.microsoft.com/office/powerpoint/2010/main" val="1024086991"/>
+      </p:ext>
+    </p:extLst>
+  </p:cSld>
+  <p:clrMapOvr>
+    <a:masterClrMapping/>
+  </p:clrMapOvr>
+</p:notes>
+</file>
+
 <file path=ppt/notesSlides/notesSlide2.xml><?xml version="1.0" encoding="utf-8"?>
 <p:notes xmlns:a="http://schemas.openxmlformats.org/drawingml/2006/main" xmlns:r="http://schemas.openxmlformats.org/officeDocument/2006/relationships" xmlns:p="http://schemas.openxmlformats.org/presentationml/2006/main">
   <p:cSld>
@@ -704,6 +799,534 @@
             <a:fld id="{F7021451-1387-4CA6-816F-3879F97B5CBC}" type="slidenum">
               <a:rPr lang="en-US"/>
               <a:t>3</a:t>
+            </a:fld>
+            <a:endParaRPr lang="en-US"/>
+          </a:p>
+        </p:txBody>
+      </p:sp>
+    </p:spTree>
+    <p:extLst>
+      <p:ext uri="{BB962C8B-B14F-4D97-AF65-F5344CB8AC3E}">
+        <p14:creationId xmlns:p14="http://schemas.microsoft.com/office/powerpoint/2010/main" val="1024086991"/>
+      </p:ext>
+    </p:extLst>
+  </p:cSld>
+  <p:clrMapOvr>
+    <a:masterClrMapping/>
+  </p:clrMapOvr>
+</p:notes>
+</file>
+
+<file path=ppt/notesSlides/notesSlide4.xml><?xml version="1.0" encoding="utf-8"?>
+<p:notes xmlns:a="http://schemas.openxmlformats.org/drawingml/2006/main" xmlns:r="http://schemas.openxmlformats.org/officeDocument/2006/relationships" xmlns:p="http://schemas.openxmlformats.org/presentationml/2006/main">
+  <p:cSld>
+    <p:spTree>
+      <p:nvGrpSpPr>
+        <p:cNvPr id="1" name=""/>
+        <p:cNvGrpSpPr/>
+        <p:nvPr/>
+      </p:nvGrpSpPr>
+      <p:grpSpPr>
+        <a:xfrm>
+          <a:off x="0" y="0"/>
+          <a:ext cx="0" cy="0"/>
+          <a:chOff x="0" y="0"/>
+          <a:chExt cx="0" cy="0"/>
+        </a:xfrm>
+      </p:grpSpPr>
+      <p:sp>
+        <p:nvSpPr>
+          <p:cNvPr id="2" name="Slide Image Placeholder 1"/>
+          <p:cNvSpPr>
+            <a:spLocks noGrp="1" noRot="1" noChangeAspect="1"/>
+          </p:cNvSpPr>
+          <p:nvPr>
+            <p:ph type="sldImg"/>
+          </p:nvPr>
+        </p:nvSpPr>
+        <p:spPr/>
+      </p:sp>
+      <p:sp>
+        <p:nvSpPr>
+          <p:cNvPr id="3" name="Notes Placeholder 2"/>
+          <p:cNvSpPr>
+            <a:spLocks noGrp="1"/>
+          </p:cNvSpPr>
+          <p:nvPr>
+            <p:ph type="body" idx="1"/>
+          </p:nvPr>
+        </p:nvSpPr>
+        <p:spPr/>
+        <p:txBody>
+          <a:bodyPr/>
+          <a:lstStyle/>
+          <a:p>
+            <a:r>
+              <a:rPr lang="en-US" dirty="0"/>
+              <a:t/>
+            </a:r>
+            <a:endParaRPr lang="en-US" dirty="0"/>
+          </a:p>
+        </p:txBody>
+      </p:sp>
+      <p:sp>
+        <p:nvSpPr>
+          <p:cNvPr id="4" name="Slide Number Placeholder 3"/>
+          <p:cNvSpPr>
+            <a:spLocks noGrp="1"/>
+          </p:cNvSpPr>
+          <p:nvPr>
+            <p:ph type="sldNum" sz="quarter" idx="10"/>
+          </p:nvPr>
+        </p:nvSpPr>
+        <p:spPr/>
+        <p:txBody>
+          <a:bodyPr/>
+          <a:lstStyle/>
+          <a:p>
+            <a:fld id="{F7021451-1387-4CA6-816F-3879F97B5CBC}" type="slidenum">
+              <a:rPr lang="en-US"/>
+              <a:t>4</a:t>
+            </a:fld>
+            <a:endParaRPr lang="en-US"/>
+          </a:p>
+        </p:txBody>
+      </p:sp>
+    </p:spTree>
+    <p:extLst>
+      <p:ext uri="{BB962C8B-B14F-4D97-AF65-F5344CB8AC3E}">
+        <p14:creationId xmlns:p14="http://schemas.microsoft.com/office/powerpoint/2010/main" val="1024086991"/>
+      </p:ext>
+    </p:extLst>
+  </p:cSld>
+  <p:clrMapOvr>
+    <a:masterClrMapping/>
+  </p:clrMapOvr>
+</p:notes>
+</file>
+
+<file path=ppt/notesSlides/notesSlide5.xml><?xml version="1.0" encoding="utf-8"?>
+<p:notes xmlns:a="http://schemas.openxmlformats.org/drawingml/2006/main" xmlns:r="http://schemas.openxmlformats.org/officeDocument/2006/relationships" xmlns:p="http://schemas.openxmlformats.org/presentationml/2006/main">
+  <p:cSld>
+    <p:spTree>
+      <p:nvGrpSpPr>
+        <p:cNvPr id="1" name=""/>
+        <p:cNvGrpSpPr/>
+        <p:nvPr/>
+      </p:nvGrpSpPr>
+      <p:grpSpPr>
+        <a:xfrm>
+          <a:off x="0" y="0"/>
+          <a:ext cx="0" cy="0"/>
+          <a:chOff x="0" y="0"/>
+          <a:chExt cx="0" cy="0"/>
+        </a:xfrm>
+      </p:grpSpPr>
+      <p:sp>
+        <p:nvSpPr>
+          <p:cNvPr id="2" name="Slide Image Placeholder 1"/>
+          <p:cNvSpPr>
+            <a:spLocks noGrp="1" noRot="1" noChangeAspect="1"/>
+          </p:cNvSpPr>
+          <p:nvPr>
+            <p:ph type="sldImg"/>
+          </p:nvPr>
+        </p:nvSpPr>
+        <p:spPr/>
+      </p:sp>
+      <p:sp>
+        <p:nvSpPr>
+          <p:cNvPr id="3" name="Notes Placeholder 2"/>
+          <p:cNvSpPr>
+            <a:spLocks noGrp="1"/>
+          </p:cNvSpPr>
+          <p:nvPr>
+            <p:ph type="body" idx="1"/>
+          </p:nvPr>
+        </p:nvSpPr>
+        <p:spPr/>
+        <p:txBody>
+          <a:bodyPr/>
+          <a:lstStyle/>
+          <a:p>
+            <a:r>
+              <a:rPr lang="en-US" dirty="0"/>
+              <a:t/>
+            </a:r>
+            <a:endParaRPr lang="en-US" dirty="0"/>
+          </a:p>
+        </p:txBody>
+      </p:sp>
+      <p:sp>
+        <p:nvSpPr>
+          <p:cNvPr id="4" name="Slide Number Placeholder 3"/>
+          <p:cNvSpPr>
+            <a:spLocks noGrp="1"/>
+          </p:cNvSpPr>
+          <p:nvPr>
+            <p:ph type="sldNum" sz="quarter" idx="10"/>
+          </p:nvPr>
+        </p:nvSpPr>
+        <p:spPr/>
+        <p:txBody>
+          <a:bodyPr/>
+          <a:lstStyle/>
+          <a:p>
+            <a:fld id="{F7021451-1387-4CA6-816F-3879F97B5CBC}" type="slidenum">
+              <a:rPr lang="en-US"/>
+              <a:t>5</a:t>
+            </a:fld>
+            <a:endParaRPr lang="en-US"/>
+          </a:p>
+        </p:txBody>
+      </p:sp>
+    </p:spTree>
+    <p:extLst>
+      <p:ext uri="{BB962C8B-B14F-4D97-AF65-F5344CB8AC3E}">
+        <p14:creationId xmlns:p14="http://schemas.microsoft.com/office/powerpoint/2010/main" val="1024086991"/>
+      </p:ext>
+    </p:extLst>
+  </p:cSld>
+  <p:clrMapOvr>
+    <a:masterClrMapping/>
+  </p:clrMapOvr>
+</p:notes>
+</file>
+
+<file path=ppt/notesSlides/notesSlide6.xml><?xml version="1.0" encoding="utf-8"?>
+<p:notes xmlns:a="http://schemas.openxmlformats.org/drawingml/2006/main" xmlns:r="http://schemas.openxmlformats.org/officeDocument/2006/relationships" xmlns:p="http://schemas.openxmlformats.org/presentationml/2006/main">
+  <p:cSld>
+    <p:spTree>
+      <p:nvGrpSpPr>
+        <p:cNvPr id="1" name=""/>
+        <p:cNvGrpSpPr/>
+        <p:nvPr/>
+      </p:nvGrpSpPr>
+      <p:grpSpPr>
+        <a:xfrm>
+          <a:off x="0" y="0"/>
+          <a:ext cx="0" cy="0"/>
+          <a:chOff x="0" y="0"/>
+          <a:chExt cx="0" cy="0"/>
+        </a:xfrm>
+      </p:grpSpPr>
+      <p:sp>
+        <p:nvSpPr>
+          <p:cNvPr id="2" name="Slide Image Placeholder 1"/>
+          <p:cNvSpPr>
+            <a:spLocks noGrp="1" noRot="1" noChangeAspect="1"/>
+          </p:cNvSpPr>
+          <p:nvPr>
+            <p:ph type="sldImg"/>
+          </p:nvPr>
+        </p:nvSpPr>
+        <p:spPr/>
+      </p:sp>
+      <p:sp>
+        <p:nvSpPr>
+          <p:cNvPr id="3" name="Notes Placeholder 2"/>
+          <p:cNvSpPr>
+            <a:spLocks noGrp="1"/>
+          </p:cNvSpPr>
+          <p:nvPr>
+            <p:ph type="body" idx="1"/>
+          </p:nvPr>
+        </p:nvSpPr>
+        <p:spPr/>
+        <p:txBody>
+          <a:bodyPr/>
+          <a:lstStyle/>
+          <a:p>
+            <a:r>
+              <a:rPr lang="en-US" dirty="0"/>
+              <a:t/>
+            </a:r>
+            <a:endParaRPr lang="en-US" dirty="0"/>
+          </a:p>
+        </p:txBody>
+      </p:sp>
+      <p:sp>
+        <p:nvSpPr>
+          <p:cNvPr id="4" name="Slide Number Placeholder 3"/>
+          <p:cNvSpPr>
+            <a:spLocks noGrp="1"/>
+          </p:cNvSpPr>
+          <p:nvPr>
+            <p:ph type="sldNum" sz="quarter" idx="10"/>
+          </p:nvPr>
+        </p:nvSpPr>
+        <p:spPr/>
+        <p:txBody>
+          <a:bodyPr/>
+          <a:lstStyle/>
+          <a:p>
+            <a:fld id="{F7021451-1387-4CA6-816F-3879F97B5CBC}" type="slidenum">
+              <a:rPr lang="en-US"/>
+              <a:t>6</a:t>
+            </a:fld>
+            <a:endParaRPr lang="en-US"/>
+          </a:p>
+        </p:txBody>
+      </p:sp>
+    </p:spTree>
+    <p:extLst>
+      <p:ext uri="{BB962C8B-B14F-4D97-AF65-F5344CB8AC3E}">
+        <p14:creationId xmlns:p14="http://schemas.microsoft.com/office/powerpoint/2010/main" val="1024086991"/>
+      </p:ext>
+    </p:extLst>
+  </p:cSld>
+  <p:clrMapOvr>
+    <a:masterClrMapping/>
+  </p:clrMapOvr>
+</p:notes>
+</file>
+
+<file path=ppt/notesSlides/notesSlide7.xml><?xml version="1.0" encoding="utf-8"?>
+<p:notes xmlns:a="http://schemas.openxmlformats.org/drawingml/2006/main" xmlns:r="http://schemas.openxmlformats.org/officeDocument/2006/relationships" xmlns:p="http://schemas.openxmlformats.org/presentationml/2006/main">
+  <p:cSld>
+    <p:spTree>
+      <p:nvGrpSpPr>
+        <p:cNvPr id="1" name=""/>
+        <p:cNvGrpSpPr/>
+        <p:nvPr/>
+      </p:nvGrpSpPr>
+      <p:grpSpPr>
+        <a:xfrm>
+          <a:off x="0" y="0"/>
+          <a:ext cx="0" cy="0"/>
+          <a:chOff x="0" y="0"/>
+          <a:chExt cx="0" cy="0"/>
+        </a:xfrm>
+      </p:grpSpPr>
+      <p:sp>
+        <p:nvSpPr>
+          <p:cNvPr id="2" name="Slide Image Placeholder 1"/>
+          <p:cNvSpPr>
+            <a:spLocks noGrp="1" noRot="1" noChangeAspect="1"/>
+          </p:cNvSpPr>
+          <p:nvPr>
+            <p:ph type="sldImg"/>
+          </p:nvPr>
+        </p:nvSpPr>
+        <p:spPr/>
+      </p:sp>
+      <p:sp>
+        <p:nvSpPr>
+          <p:cNvPr id="3" name="Notes Placeholder 2"/>
+          <p:cNvSpPr>
+            <a:spLocks noGrp="1"/>
+          </p:cNvSpPr>
+          <p:nvPr>
+            <p:ph type="body" idx="1"/>
+          </p:nvPr>
+        </p:nvSpPr>
+        <p:spPr/>
+        <p:txBody>
+          <a:bodyPr/>
+          <a:lstStyle/>
+          <a:p>
+            <a:r>
+              <a:rPr lang="en-US" dirty="0"/>
+              <a:t/>
+            </a:r>
+            <a:endParaRPr lang="en-US" dirty="0"/>
+          </a:p>
+        </p:txBody>
+      </p:sp>
+      <p:sp>
+        <p:nvSpPr>
+          <p:cNvPr id="4" name="Slide Number Placeholder 3"/>
+          <p:cNvSpPr>
+            <a:spLocks noGrp="1"/>
+          </p:cNvSpPr>
+          <p:nvPr>
+            <p:ph type="sldNum" sz="quarter" idx="10"/>
+          </p:nvPr>
+        </p:nvSpPr>
+        <p:spPr/>
+        <p:txBody>
+          <a:bodyPr/>
+          <a:lstStyle/>
+          <a:p>
+            <a:fld id="{F7021451-1387-4CA6-816F-3879F97B5CBC}" type="slidenum">
+              <a:rPr lang="en-US"/>
+              <a:t>7</a:t>
+            </a:fld>
+            <a:endParaRPr lang="en-US"/>
+          </a:p>
+        </p:txBody>
+      </p:sp>
+    </p:spTree>
+    <p:extLst>
+      <p:ext uri="{BB962C8B-B14F-4D97-AF65-F5344CB8AC3E}">
+        <p14:creationId xmlns:p14="http://schemas.microsoft.com/office/powerpoint/2010/main" val="1024086991"/>
+      </p:ext>
+    </p:extLst>
+  </p:cSld>
+  <p:clrMapOvr>
+    <a:masterClrMapping/>
+  </p:clrMapOvr>
+</p:notes>
+</file>
+
+<file path=ppt/notesSlides/notesSlide8.xml><?xml version="1.0" encoding="utf-8"?>
+<p:notes xmlns:a="http://schemas.openxmlformats.org/drawingml/2006/main" xmlns:r="http://schemas.openxmlformats.org/officeDocument/2006/relationships" xmlns:p="http://schemas.openxmlformats.org/presentationml/2006/main">
+  <p:cSld>
+    <p:spTree>
+      <p:nvGrpSpPr>
+        <p:cNvPr id="1" name=""/>
+        <p:cNvGrpSpPr/>
+        <p:nvPr/>
+      </p:nvGrpSpPr>
+      <p:grpSpPr>
+        <a:xfrm>
+          <a:off x="0" y="0"/>
+          <a:ext cx="0" cy="0"/>
+          <a:chOff x="0" y="0"/>
+          <a:chExt cx="0" cy="0"/>
+        </a:xfrm>
+      </p:grpSpPr>
+      <p:sp>
+        <p:nvSpPr>
+          <p:cNvPr id="2" name="Slide Image Placeholder 1"/>
+          <p:cNvSpPr>
+            <a:spLocks noGrp="1" noRot="1" noChangeAspect="1"/>
+          </p:cNvSpPr>
+          <p:nvPr>
+            <p:ph type="sldImg"/>
+          </p:nvPr>
+        </p:nvSpPr>
+        <p:spPr/>
+      </p:sp>
+      <p:sp>
+        <p:nvSpPr>
+          <p:cNvPr id="3" name="Notes Placeholder 2"/>
+          <p:cNvSpPr>
+            <a:spLocks noGrp="1"/>
+          </p:cNvSpPr>
+          <p:nvPr>
+            <p:ph type="body" idx="1"/>
+          </p:nvPr>
+        </p:nvSpPr>
+        <p:spPr/>
+        <p:txBody>
+          <a:bodyPr/>
+          <a:lstStyle/>
+          <a:p>
+            <a:r>
+              <a:rPr lang="en-US" dirty="0"/>
+              <a:t/>
+            </a:r>
+            <a:endParaRPr lang="en-US" dirty="0"/>
+          </a:p>
+        </p:txBody>
+      </p:sp>
+      <p:sp>
+        <p:nvSpPr>
+          <p:cNvPr id="4" name="Slide Number Placeholder 3"/>
+          <p:cNvSpPr>
+            <a:spLocks noGrp="1"/>
+          </p:cNvSpPr>
+          <p:nvPr>
+            <p:ph type="sldNum" sz="quarter" idx="10"/>
+          </p:nvPr>
+        </p:nvSpPr>
+        <p:spPr/>
+        <p:txBody>
+          <a:bodyPr/>
+          <a:lstStyle/>
+          <a:p>
+            <a:fld id="{F7021451-1387-4CA6-816F-3879F97B5CBC}" type="slidenum">
+              <a:rPr lang="en-US"/>
+              <a:t>8</a:t>
+            </a:fld>
+            <a:endParaRPr lang="en-US"/>
+          </a:p>
+        </p:txBody>
+      </p:sp>
+    </p:spTree>
+    <p:extLst>
+      <p:ext uri="{BB962C8B-B14F-4D97-AF65-F5344CB8AC3E}">
+        <p14:creationId xmlns:p14="http://schemas.microsoft.com/office/powerpoint/2010/main" val="1024086991"/>
+      </p:ext>
+    </p:extLst>
+  </p:cSld>
+  <p:clrMapOvr>
+    <a:masterClrMapping/>
+  </p:clrMapOvr>
+</p:notes>
+</file>
+
+<file path=ppt/notesSlides/notesSlide9.xml><?xml version="1.0" encoding="utf-8"?>
+<p:notes xmlns:a="http://schemas.openxmlformats.org/drawingml/2006/main" xmlns:r="http://schemas.openxmlformats.org/officeDocument/2006/relationships" xmlns:p="http://schemas.openxmlformats.org/presentationml/2006/main">
+  <p:cSld>
+    <p:spTree>
+      <p:nvGrpSpPr>
+        <p:cNvPr id="1" name=""/>
+        <p:cNvGrpSpPr/>
+        <p:nvPr/>
+      </p:nvGrpSpPr>
+      <p:grpSpPr>
+        <a:xfrm>
+          <a:off x="0" y="0"/>
+          <a:ext cx="0" cy="0"/>
+          <a:chOff x="0" y="0"/>
+          <a:chExt cx="0" cy="0"/>
+        </a:xfrm>
+      </p:grpSpPr>
+      <p:sp>
+        <p:nvSpPr>
+          <p:cNvPr id="2" name="Slide Image Placeholder 1"/>
+          <p:cNvSpPr>
+            <a:spLocks noGrp="1" noRot="1" noChangeAspect="1"/>
+          </p:cNvSpPr>
+          <p:nvPr>
+            <p:ph type="sldImg"/>
+          </p:nvPr>
+        </p:nvSpPr>
+        <p:spPr/>
+      </p:sp>
+      <p:sp>
+        <p:nvSpPr>
+          <p:cNvPr id="3" name="Notes Placeholder 2"/>
+          <p:cNvSpPr>
+            <a:spLocks noGrp="1"/>
+          </p:cNvSpPr>
+          <p:nvPr>
+            <p:ph type="body" idx="1"/>
+          </p:nvPr>
+        </p:nvSpPr>
+        <p:spPr/>
+        <p:txBody>
+          <a:bodyPr/>
+          <a:lstStyle/>
+          <a:p>
+            <a:r>
+              <a:rPr lang="en-US" dirty="0"/>
+              <a:t/>
+            </a:r>
+            <a:endParaRPr lang="en-US" dirty="0"/>
+          </a:p>
+        </p:txBody>
+      </p:sp>
+      <p:sp>
+        <p:nvSpPr>
+          <p:cNvPr id="4" name="Slide Number Placeholder 3"/>
+          <p:cNvSpPr>
+            <a:spLocks noGrp="1"/>
+          </p:cNvSpPr>
+          <p:nvPr>
+            <p:ph type="sldNum" sz="quarter" idx="10"/>
+          </p:nvPr>
+        </p:nvSpPr>
+        <p:spPr/>
+        <p:txBody>
+          <a:bodyPr/>
+          <a:lstStyle/>
+          <a:p>
+            <a:fld id="{F7021451-1387-4CA6-816F-3879F97B5CBC}" type="slidenum">
+              <a:rPr lang="en-US"/>
+              <a:t>9</a:t>
             </a:fld>
             <a:endParaRPr lang="en-US"/>
           </a:p>
@@ -1061,8 +1684,8 @@
         </p:nvSpPr>
         <p:spPr>
           <a:xfrm>
-            <a:off x="731520" y="365760"/>
-            <a:ext cx="3291840" cy="256032"/>
+            <a:off x="731520" y="347472"/>
+            <a:ext cx="3474720" cy="256032"/>
           </a:xfrm>
           <a:prstGeom prst="roundRect">
             <a:avLst>
@@ -1088,8 +1711,8 @@
         </p:nvSpPr>
         <p:spPr>
           <a:xfrm>
-            <a:off x="731520" y="365760"/>
-            <a:ext cx="3291840" cy="256032"/>
+            <a:off x="731520" y="347472"/>
+            <a:ext cx="3474720" cy="256032"/>
           </a:xfrm>
           <a:prstGeom prst="rect">
             <a:avLst/>
@@ -1127,8 +1750,8 @@
         </p:nvSpPr>
         <p:spPr>
           <a:xfrm>
-            <a:off x="731520" y="658368"/>
-            <a:ext cx="10725912" cy="438912"/>
+            <a:off x="731520" y="640080"/>
+            <a:ext cx="10725912" cy="420624"/>
           </a:xfrm>
           <a:prstGeom prst="rect">
             <a:avLst/>
@@ -1166,24 +1789,24 @@
         </p:nvSpPr>
         <p:spPr>
           <a:xfrm>
-            <a:off x="731520" y="1078992"/>
-            <a:ext cx="10725912" cy="237744"/>
-          </a:xfrm>
-          <a:prstGeom prst="rect">
-            <a:avLst/>
-          </a:prstGeom>
-          <a:noFill/>
-          <a:ln/>
-        </p:spPr>
-        <p:txBody>
-          <a:bodyPr wrap="square" rtlCol="0" anchor="ctr"/>
-          <a:lstStyle/>
-          <a:p>
-            <a:pPr indent="0" marL="0">
-              <a:buNone/>
-            </a:pPr>
-            <a:r>
-              <a:rPr lang="en-US" sz="1100" dirty="0">
+            <a:off x="731520" y="1060704"/>
+            <a:ext cx="10725912" cy="228600"/>
+          </a:xfrm>
+          <a:prstGeom prst="rect">
+            <a:avLst/>
+          </a:prstGeom>
+          <a:noFill/>
+          <a:ln/>
+        </p:spPr>
+        <p:txBody>
+          <a:bodyPr wrap="square" rtlCol="0" anchor="ctr"/>
+          <a:lstStyle/>
+          <a:p>
+            <a:pPr indent="0" marL="0">
+              <a:buNone/>
+            </a:pPr>
+            <a:r>
+              <a:rPr lang="en-US" sz="1050" dirty="0">
                 <a:solidFill>
                   <a:srgbClr val="94A3B8"/>
                 </a:solidFill>
@@ -1193,7 +1816,7 @@
               </a:rPr>
               <a:t>Self-contained, crash-resilient message broker engineered for hypervisors, microVMs, and edge appliances.</a:t>
             </a:r>
-            <a:endParaRPr lang="en-US" sz="1100" dirty="0"/>
+            <a:endParaRPr lang="en-US" sz="1050" dirty="0"/>
           </a:p>
         </p:txBody>
       </p:sp>
@@ -1327,7 +1950,7 @@
               <a:buNone/>
             </a:pPr>
             <a:r>
-              <a:rPr lang="en-US" sz="900" dirty="0">
+              <a:rPr lang="en-US" sz="880" dirty="0">
                 <a:solidFill>
                   <a:srgbClr val="94A3B8"/>
                 </a:solidFill>
@@ -1337,7 +1960,7 @@
               </a:rPr>
               <a:t>Operates on Nutanix AHV, Linux KVM, or AWS Firecracker hosts. Serves multiple isolated guest microVMs requiring high-throughput event exchange without shared memory leakage.</a:t>
             </a:r>
-            <a:endParaRPr lang="en-US" sz="900" dirty="0"/>
+            <a:endParaRPr lang="en-US" sz="880" dirty="0"/>
           </a:p>
         </p:txBody>
       </p:sp>
@@ -1405,7 +2028,7 @@
               <a:buNone/>
             </a:pPr>
             <a:r>
-              <a:rPr lang="en-US" sz="900" dirty="0">
+              <a:rPr lang="en-US" sz="880" dirty="0">
                 <a:solidFill>
                   <a:srgbClr val="94A3B8"/>
                 </a:solidFill>
@@ -1415,7 +2038,7 @@
               </a:rPr>
               <a:t>Runs directly as a lightweight native host daemon or within a dedicated system microVM listening on TCP port :4222. Statically linked Go binary (3.78 MB), zero external dependencies.</a:t>
             </a:r>
-            <a:endParaRPr lang="en-US" sz="900" dirty="0"/>
+            <a:endParaRPr lang="en-US" sz="880" dirty="0"/>
           </a:p>
         </p:txBody>
       </p:sp>
@@ -1467,23 +2090,23 @@
         <p:spPr>
           <a:xfrm>
             <a:off x="914400" y="3675888"/>
-            <a:ext cx="4023360" cy="960120"/>
-          </a:xfrm>
-          <a:prstGeom prst="rect">
-            <a:avLst/>
-          </a:prstGeom>
-          <a:noFill/>
-          <a:ln/>
-        </p:spPr>
-        <p:txBody>
-          <a:bodyPr wrap="square" rtlCol="0" anchor="ctr"/>
-          <a:lstStyle/>
-          <a:p>
-            <a:pPr indent="0" marL="0">
-              <a:buNone/>
-            </a:pPr>
-            <a:r>
-              <a:rPr lang="en-US" sz="900" dirty="0">
+            <a:ext cx="4023360" cy="1005840"/>
+          </a:xfrm>
+          <a:prstGeom prst="rect">
+            <a:avLst/>
+          </a:prstGeom>
+          <a:noFill/>
+          <a:ln/>
+        </p:spPr>
+        <p:txBody>
+          <a:bodyPr wrap="square" rtlCol="0" anchor="ctr"/>
+          <a:lstStyle/>
+          <a:p>
+            <a:pPr indent="0" marL="0">
+              <a:buNone/>
+            </a:pPr>
+            <a:r>
+              <a:rPr lang="en-US" sz="880" dirty="0">
                 <a:solidFill>
                   <a:srgbClr val="94A3B8"/>
                 </a:solidFill>
@@ -1491,16 +2114,16 @@
                 <a:ea typeface="Arial" pitchFamily="34" charset="-122"/>
                 <a:cs typeface="Arial" pitchFamily="34" charset="-120"/>
               </a:rPr>
-              <a:t>• Ingress MicroVM: Sends raw telemetry via standard TCP stream (PUB &lt;topic&gt; &lt;payload&gt;). Zero client SDK required.</a:t>
-            </a:r>
-            <a:endParaRPr lang="en-US" sz="900" dirty="0"/>
-          </a:p>
-          <a:p>
-            <a:pPr indent="0" marL="0">
-              <a:buNone/>
-            </a:pPr>
-            <a:r>
-              <a:rPr lang="en-US" sz="900" dirty="0">
+              <a:t>1. Ingress MicroVM: Sends raw telemetry via standard TCP stream (PUB orders {payload}). Zero client SDK.</a:t>
+            </a:r>
+            <a:endParaRPr lang="en-US" sz="880" dirty="0"/>
+          </a:p>
+          <a:p>
+            <a:pPr indent="0" marL="0">
+              <a:buNone/>
+            </a:pPr>
+            <a:r>
+              <a:rPr lang="en-US" sz="880" dirty="0">
                 <a:solidFill>
                   <a:srgbClr val="94A3B8"/>
                 </a:solidFill>
@@ -1508,16 +2131,16 @@
                 <a:ea typeface="Arial" pitchFamily="34" charset="-122"/>
                 <a:cs typeface="Arial" pitchFamily="34" charset="-120"/>
               </a:rPr>
-              <a:t>• Storage Subsystem: Directly commits sequential writes to physical NVMe WAL (logs/&lt;topic&gt;.log) with fsync() durability.</a:t>
-            </a:r>
-            <a:endParaRPr lang="en-US" sz="900" dirty="0"/>
-          </a:p>
-          <a:p>
-            <a:pPr indent="0" marL="0">
-              <a:buNone/>
-            </a:pPr>
-            <a:r>
-              <a:rPr lang="en-US" sz="900" dirty="0">
+              <a:t>2. Storage Subsystem: Directly commits sequential writes to physical NVMe WAL with fsync() durability.</a:t>
+            </a:r>
+            <a:endParaRPr lang="en-US" sz="880" dirty="0"/>
+          </a:p>
+          <a:p>
+            <a:pPr indent="0" marL="0">
+              <a:buNone/>
+            </a:pPr>
+            <a:r>
+              <a:rPr lang="en-US" sz="880" dirty="0">
                 <a:solidFill>
                   <a:srgbClr val="94A3B8"/>
                 </a:solidFill>
@@ -1525,9 +2148,9 @@
                 <a:ea typeface="Arial" pitchFamily="34" charset="-122"/>
                 <a:cs typeface="Arial" pitchFamily="34" charset="-120"/>
               </a:rPr>
-              <a:t>• Egress MicroVM: Receives guaranteed MSG delivery and returns ACK over bi-directional TCP connection.</a:t>
-            </a:r>
-            <a:endParaRPr lang="en-US" sz="900" dirty="0"/>
+              <a:t>3. Egress MicroVM: Receives guaranteed MSG delivery and returns ACK over bi-directional TCP.</a:t>
+            </a:r>
+            <a:endParaRPr lang="en-US" sz="880" dirty="0"/>
           </a:p>
         </p:txBody>
       </p:sp>
@@ -1539,7 +2162,7 @@
         </p:nvSpPr>
         <p:spPr>
           <a:xfrm>
-            <a:off x="914400" y="4727448"/>
+            <a:off x="914400" y="4773168"/>
             <a:ext cx="4023360" cy="228600"/>
           </a:xfrm>
           <a:prstGeom prst="rect">
@@ -1578,7 +2201,7 @@
         </p:nvSpPr>
         <p:spPr>
           <a:xfrm>
-            <a:off x="914400" y="4946904"/>
+            <a:off x="914400" y="4992624"/>
             <a:ext cx="4023360" cy="502920"/>
           </a:xfrm>
           <a:prstGeom prst="rect">
@@ -1595,7 +2218,7 @@
               <a:buNone/>
             </a:pPr>
             <a:r>
-              <a:rPr lang="en-US" sz="900" dirty="0">
+              <a:rPr lang="en-US" sz="880" dirty="0">
                 <a:solidFill>
                   <a:srgbClr val="94A3B8"/>
                 </a:solidFill>
@@ -1605,7 +2228,7 @@
               </a:rPr>
               <a:t>7.18 MB idle RAM (&lt; 10 MB under 30k msg/s peak). Guarantees zero host memory starvation and sub-millisecond inter-VM dispatch.</a:t>
             </a:r>
-            <a:endParaRPr lang="en-US" sz="900" dirty="0"/>
+            <a:endParaRPr lang="en-US" sz="880" dirty="0"/>
           </a:p>
         </p:txBody>
       </p:sp>
@@ -1677,7 +2300,7 @@
       </p:sp>
       <p:pic>
         <p:nvPicPr>
-          <p:cNvPr id="18" name="Image 0" descr="D:\persistant_message_broker\docs\slide1_topology.svg">    </p:cNvPr>
+          <p:cNvPr id="18" name="Image 0" descr="d:\persistant_message_broker\docs\slide1_topology.svg">    </p:cNvPr>
           <p:cNvPicPr>
             <a:picLocks noChangeAspect="1"/>
           </p:cNvPicPr>
@@ -1807,6 +2430,1397 @@
               <a:t>MicroVMs never share memory or access storage partitions directly. PMB acts as the atomic, durable inter-VM conduit. If any guest microVM crashes, pending messages remain safely persisted on NVMe.</a:t>
             </a:r>
             <a:endParaRPr lang="en-US" sz="850" dirty="0"/>
+          </a:p>
+        </p:txBody>
+      </p:sp>
+    </p:spTree>
+  </p:cSld>
+  <p:clrMapOvr>
+    <a:masterClrMapping/>
+  </p:clrMapOvr>
+</p:sld>
+</file>
+
+<file path=ppt/slides/slide10.xml><?xml version="1.0" encoding="utf-8"?>
+<p:sld xmlns:a="http://schemas.openxmlformats.org/drawingml/2006/main" xmlns:r="http://schemas.openxmlformats.org/officeDocument/2006/relationships" xmlns:p="http://schemas.openxmlformats.org/presentationml/2006/main">
+  <p:cSld name="Slide 10">
+    <p:bg>
+      <p:bgPr>
+        <a:solidFill>
+          <a:srgbClr val="0B0F19"/>
+        </a:solidFill>
+      </p:bgPr>
+    </p:bg>
+    <p:spTree>
+      <p:nvGrpSpPr>
+        <p:cNvPr id="1" name=""/>
+        <p:cNvGrpSpPr/>
+        <p:nvPr/>
+      </p:nvGrpSpPr>
+      <p:grpSpPr>
+        <a:xfrm>
+          <a:off x="0" y="0"/>
+          <a:ext cx="0" cy="0"/>
+          <a:chOff x="0" y="0"/>
+          <a:chExt cx="0" cy="0"/>
+        </a:xfrm>
+      </p:grpSpPr>
+      <p:sp>
+        <p:nvSpPr>
+          <p:cNvPr id="2" name="Shape 0"/>
+          <p:cNvSpPr/>
+          <p:nvPr/>
+        </p:nvSpPr>
+        <p:spPr>
+          <a:xfrm>
+            <a:off x="731520" y="347472"/>
+            <a:ext cx="3474720" cy="256032"/>
+          </a:xfrm>
+          <a:prstGeom prst="roundRect">
+            <a:avLst>
+              <a:gd name="adj" fmla="val 21429"/>
+            </a:avLst>
+          </a:prstGeom>
+          <a:solidFill>
+            <a:srgbClr val="1E293B"/>
+          </a:solidFill>
+          <a:ln w="12700">
+            <a:solidFill>
+              <a:srgbClr val="38BDF8"/>
+            </a:solidFill>
+            <a:prstDash val="solid"/>
+          </a:ln>
+        </p:spPr>
+      </p:sp>
+      <p:sp>
+        <p:nvSpPr>
+          <p:cNvPr id="3" name="Text 1"/>
+          <p:cNvSpPr/>
+          <p:nvPr/>
+        </p:nvSpPr>
+        <p:spPr>
+          <a:xfrm>
+            <a:off x="731520" y="347472"/>
+            <a:ext cx="3474720" cy="256032"/>
+          </a:xfrm>
+          <a:prstGeom prst="rect">
+            <a:avLst/>
+          </a:prstGeom>
+          <a:noFill/>
+          <a:ln/>
+        </p:spPr>
+        <p:txBody>
+          <a:bodyPr wrap="square" rtlCol="0" anchor="ctr"/>
+          <a:lstStyle/>
+          <a:p>
+            <a:pPr algn="ctr" indent="0" marL="0">
+              <a:buNone/>
+            </a:pPr>
+            <a:r>
+              <a:rPr lang="en-US" sz="900" b="1" dirty="0">
+                <a:solidFill>
+                  <a:srgbClr val="38BDF8"/>
+                </a:solidFill>
+                <a:latin typeface="Arial" pitchFamily="34" charset="0"/>
+                <a:ea typeface="Arial" pitchFamily="34" charset="-122"/>
+                <a:cs typeface="Arial" pitchFamily="34" charset="-120"/>
+              </a:rPr>
+              <a:t>PRODUCTION READINESS &amp; SUMMARY</a:t>
+            </a:r>
+            <a:endParaRPr lang="en-US" sz="900" dirty="0"/>
+          </a:p>
+        </p:txBody>
+      </p:sp>
+      <p:sp>
+        <p:nvSpPr>
+          <p:cNvPr id="4" name="Text 2"/>
+          <p:cNvSpPr/>
+          <p:nvPr/>
+        </p:nvSpPr>
+        <p:spPr>
+          <a:xfrm>
+            <a:off x="731520" y="640080"/>
+            <a:ext cx="10725912" cy="420624"/>
+          </a:xfrm>
+          <a:prstGeom prst="rect">
+            <a:avLst/>
+          </a:prstGeom>
+          <a:noFill/>
+          <a:ln/>
+        </p:spPr>
+        <p:txBody>
+          <a:bodyPr wrap="square" rtlCol="0" anchor="ctr"/>
+          <a:lstStyle/>
+          <a:p>
+            <a:pPr indent="0" marL="0">
+              <a:buNone/>
+            </a:pPr>
+            <a:r>
+              <a:rPr lang="en-US" sz="2000" b="1" dirty="0">
+                <a:solidFill>
+                  <a:srgbClr val="F8FAFC"/>
+                </a:solidFill>
+                <a:latin typeface="Arial" pitchFamily="34" charset="0"/>
+                <a:ea typeface="Arial" pitchFamily="34" charset="-122"/>
+                <a:cs typeface="Arial" pitchFamily="34" charset="-120"/>
+              </a:rPr>
+              <a:t>Production Readiness: Architecture Recap &amp; Appliance Suitability</a:t>
+            </a:r>
+            <a:endParaRPr lang="en-US" sz="2000" dirty="0"/>
+          </a:p>
+        </p:txBody>
+      </p:sp>
+      <p:sp>
+        <p:nvSpPr>
+          <p:cNvPr id="5" name="Text 3"/>
+          <p:cNvSpPr/>
+          <p:nvPr/>
+        </p:nvSpPr>
+        <p:spPr>
+          <a:xfrm>
+            <a:off x="731520" y="1060704"/>
+            <a:ext cx="10725912" cy="228600"/>
+          </a:xfrm>
+          <a:prstGeom prst="rect">
+            <a:avLst/>
+          </a:prstGeom>
+          <a:noFill/>
+          <a:ln/>
+        </p:spPr>
+        <p:txBody>
+          <a:bodyPr wrap="square" rtlCol="0" anchor="ctr"/>
+          <a:lstStyle/>
+          <a:p>
+            <a:pPr indent="0" marL="0">
+              <a:buNone/>
+            </a:pPr>
+            <a:r>
+              <a:rPr lang="en-US" sz="1050" dirty="0">
+                <a:solidFill>
+                  <a:srgbClr val="94A3B8"/>
+                </a:solidFill>
+                <a:latin typeface="Arial" pitchFamily="34" charset="0"/>
+                <a:ea typeface="Arial" pitchFamily="34" charset="-122"/>
+                <a:cs typeface="Arial" pitchFamily="34" charset="-120"/>
+              </a:rPr>
+              <a:t>Engineered for mission-critical edge, Nutanix hypervisors, and zero-trust security appliances.</a:t>
+            </a:r>
+            <a:endParaRPr lang="en-US" sz="1050" dirty="0"/>
+          </a:p>
+        </p:txBody>
+      </p:sp>
+      <p:sp>
+        <p:nvSpPr>
+          <p:cNvPr id="6" name="Shape 4"/>
+          <p:cNvSpPr/>
+          <p:nvPr/>
+        </p:nvSpPr>
+        <p:spPr>
+          <a:xfrm>
+            <a:off x="731520" y="1371600"/>
+            <a:ext cx="3392424" cy="3840480"/>
+          </a:xfrm>
+          <a:prstGeom prst="roundRect">
+            <a:avLst>
+              <a:gd name="adj" fmla="val 2695"/>
+            </a:avLst>
+          </a:prstGeom>
+          <a:solidFill>
+            <a:srgbClr val="131B2B"/>
+          </a:solidFill>
+          <a:ln w="19050">
+            <a:solidFill>
+              <a:srgbClr val="38BDF8"/>
+            </a:solidFill>
+            <a:prstDash val="solid"/>
+          </a:ln>
+        </p:spPr>
+      </p:sp>
+      <p:sp>
+        <p:nvSpPr>
+          <p:cNvPr id="7" name="Shape 5"/>
+          <p:cNvSpPr/>
+          <p:nvPr/>
+        </p:nvSpPr>
+        <p:spPr>
+          <a:xfrm>
+            <a:off x="868680" y="1508760"/>
+            <a:ext cx="3118104" cy="320040"/>
+          </a:xfrm>
+          <a:prstGeom prst="roundRect">
+            <a:avLst>
+              <a:gd name="adj" fmla="val 17143"/>
+            </a:avLst>
+          </a:prstGeom>
+          <a:solidFill>
+            <a:srgbClr val="1E293B"/>
+          </a:solidFill>
+          <a:ln w="12700">
+            <a:solidFill>
+              <a:srgbClr val="38BDF8"/>
+            </a:solidFill>
+            <a:prstDash val="solid"/>
+          </a:ln>
+        </p:spPr>
+      </p:sp>
+      <p:sp>
+        <p:nvSpPr>
+          <p:cNvPr id="8" name="Text 6"/>
+          <p:cNvSpPr/>
+          <p:nvPr/>
+        </p:nvSpPr>
+        <p:spPr>
+          <a:xfrm>
+            <a:off x="868680" y="1508760"/>
+            <a:ext cx="3118104" cy="320040"/>
+          </a:xfrm>
+          <a:prstGeom prst="rect">
+            <a:avLst/>
+          </a:prstGeom>
+          <a:noFill/>
+          <a:ln/>
+        </p:spPr>
+        <p:txBody>
+          <a:bodyPr wrap="square" rtlCol="0" anchor="ctr"/>
+          <a:lstStyle/>
+          <a:p>
+            <a:pPr algn="ctr" indent="0" marL="0">
+              <a:buNone/>
+            </a:pPr>
+            <a:r>
+              <a:rPr lang="en-US" sz="950" b="1" dirty="0">
+                <a:solidFill>
+                  <a:srgbClr val="38BDF8"/>
+                </a:solidFill>
+                <a:latin typeface="Arial" pitchFamily="34" charset="0"/>
+                <a:ea typeface="Arial" pitchFamily="34" charset="-122"/>
+                <a:cs typeface="Arial" pitchFamily="34" charset="-120"/>
+              </a:rPr>
+              <a:t>PILLAR 1: EMBEDDABLE FOOTPRINT</a:t>
+            </a:r>
+            <a:endParaRPr lang="en-US" sz="950" dirty="0"/>
+          </a:p>
+        </p:txBody>
+      </p:sp>
+      <p:sp>
+        <p:nvSpPr>
+          <p:cNvPr id="9" name="Shape 7"/>
+          <p:cNvSpPr/>
+          <p:nvPr/>
+        </p:nvSpPr>
+        <p:spPr>
+          <a:xfrm>
+            <a:off x="868680" y="1965960"/>
+            <a:ext cx="3118104" cy="658368"/>
+          </a:xfrm>
+          <a:prstGeom prst="roundRect">
+            <a:avLst>
+              <a:gd name="adj" fmla="val 6944"/>
+            </a:avLst>
+          </a:prstGeom>
+          <a:solidFill>
+            <a:srgbClr val="0F172A"/>
+          </a:solidFill>
+          <a:ln w="12700">
+            <a:solidFill>
+              <a:srgbClr val="23324A"/>
+            </a:solidFill>
+            <a:prstDash val="solid"/>
+          </a:ln>
+        </p:spPr>
+      </p:sp>
+      <p:sp>
+        <p:nvSpPr>
+          <p:cNvPr id="10" name="Text 8"/>
+          <p:cNvSpPr/>
+          <p:nvPr/>
+        </p:nvSpPr>
+        <p:spPr>
+          <a:xfrm>
+            <a:off x="960120" y="2011680"/>
+            <a:ext cx="2935224" cy="566928"/>
+          </a:xfrm>
+          <a:prstGeom prst="rect">
+            <a:avLst/>
+          </a:prstGeom>
+          <a:noFill/>
+          <a:ln/>
+        </p:spPr>
+        <p:txBody>
+          <a:bodyPr wrap="square" rtlCol="0" anchor="ctr"/>
+          <a:lstStyle/>
+          <a:p>
+            <a:pPr indent="0" marL="0">
+              <a:buNone/>
+            </a:pPr>
+            <a:r>
+              <a:rPr lang="en-US" sz="850" dirty="0">
+                <a:solidFill>
+                  <a:srgbClr val="F8FAFC"/>
+                </a:solidFill>
+                <a:latin typeface="Arial" pitchFamily="34" charset="0"/>
+                <a:ea typeface="Arial" pitchFamily="34" charset="-122"/>
+                <a:cs typeface="Arial" pitchFamily="34" charset="-120"/>
+              </a:rPr>
+              <a:t>✔ Statically Linked Go Binary: 3.78 MB single executable with zero external runtime or VM dependencies.</a:t>
+            </a:r>
+            <a:endParaRPr lang="en-US" sz="850" dirty="0"/>
+          </a:p>
+        </p:txBody>
+      </p:sp>
+      <p:sp>
+        <p:nvSpPr>
+          <p:cNvPr id="11" name="Shape 9"/>
+          <p:cNvSpPr/>
+          <p:nvPr/>
+        </p:nvSpPr>
+        <p:spPr>
+          <a:xfrm>
+            <a:off x="868680" y="2715768"/>
+            <a:ext cx="3118104" cy="658368"/>
+          </a:xfrm>
+          <a:prstGeom prst="roundRect">
+            <a:avLst>
+              <a:gd name="adj" fmla="val 6944"/>
+            </a:avLst>
+          </a:prstGeom>
+          <a:solidFill>
+            <a:srgbClr val="0F172A"/>
+          </a:solidFill>
+          <a:ln w="12700">
+            <a:solidFill>
+              <a:srgbClr val="23324A"/>
+            </a:solidFill>
+            <a:prstDash val="solid"/>
+          </a:ln>
+        </p:spPr>
+      </p:sp>
+      <p:sp>
+        <p:nvSpPr>
+          <p:cNvPr id="12" name="Text 10"/>
+          <p:cNvSpPr/>
+          <p:nvPr/>
+        </p:nvSpPr>
+        <p:spPr>
+          <a:xfrm>
+            <a:off x="960120" y="2761488"/>
+            <a:ext cx="2935224" cy="566928"/>
+          </a:xfrm>
+          <a:prstGeom prst="rect">
+            <a:avLst/>
+          </a:prstGeom>
+          <a:noFill/>
+          <a:ln/>
+        </p:spPr>
+        <p:txBody>
+          <a:bodyPr wrap="square" rtlCol="0" anchor="ctr"/>
+          <a:lstStyle/>
+          <a:p>
+            <a:pPr indent="0" marL="0">
+              <a:buNone/>
+            </a:pPr>
+            <a:r>
+              <a:rPr lang="en-US" sz="850" dirty="0">
+                <a:solidFill>
+                  <a:srgbClr val="F8FAFC"/>
+                </a:solidFill>
+                <a:latin typeface="Arial" pitchFamily="34" charset="0"/>
+                <a:ea typeface="Arial" pitchFamily="34" charset="-122"/>
+                <a:cs typeface="Arial" pitchFamily="34" charset="-120"/>
+              </a:rPr>
+              <a:t>✔ Sub-10MB RAM Ceiling: Runs effortlessly on resource-constrained microVM hosts and edge hardware nodes.</a:t>
+            </a:r>
+            <a:endParaRPr lang="en-US" sz="850" dirty="0"/>
+          </a:p>
+        </p:txBody>
+      </p:sp>
+      <p:sp>
+        <p:nvSpPr>
+          <p:cNvPr id="13" name="Shape 11"/>
+          <p:cNvSpPr/>
+          <p:nvPr/>
+        </p:nvSpPr>
+        <p:spPr>
+          <a:xfrm>
+            <a:off x="868680" y="3465576"/>
+            <a:ext cx="3118104" cy="658368"/>
+          </a:xfrm>
+          <a:prstGeom prst="roundRect">
+            <a:avLst>
+              <a:gd name="adj" fmla="val 6944"/>
+            </a:avLst>
+          </a:prstGeom>
+          <a:solidFill>
+            <a:srgbClr val="0F172A"/>
+          </a:solidFill>
+          <a:ln w="12700">
+            <a:solidFill>
+              <a:srgbClr val="23324A"/>
+            </a:solidFill>
+            <a:prstDash val="solid"/>
+          </a:ln>
+        </p:spPr>
+      </p:sp>
+      <p:sp>
+        <p:nvSpPr>
+          <p:cNvPr id="14" name="Text 12"/>
+          <p:cNvSpPr/>
+          <p:nvPr/>
+        </p:nvSpPr>
+        <p:spPr>
+          <a:xfrm>
+            <a:off x="960120" y="3511296"/>
+            <a:ext cx="2935224" cy="566928"/>
+          </a:xfrm>
+          <a:prstGeom prst="rect">
+            <a:avLst/>
+          </a:prstGeom>
+          <a:noFill/>
+          <a:ln/>
+        </p:spPr>
+        <p:txBody>
+          <a:bodyPr wrap="square" rtlCol="0" anchor="ctr"/>
+          <a:lstStyle/>
+          <a:p>
+            <a:pPr indent="0" marL="0">
+              <a:buNone/>
+            </a:pPr>
+            <a:r>
+              <a:rPr lang="en-US" sz="850" dirty="0">
+                <a:solidFill>
+                  <a:srgbClr val="F8FAFC"/>
+                </a:solidFill>
+                <a:latin typeface="Arial" pitchFamily="34" charset="0"/>
+                <a:ea typeface="Arial" pitchFamily="34" charset="-122"/>
+                <a:cs typeface="Arial" pitchFamily="34" charset="-120"/>
+              </a:rPr>
+              <a:t>✔ Instantaneous Startup: Cold boots in &lt; 10 milliseconds, eliminating failover telemetry downtime.</a:t>
+            </a:r>
+            <a:endParaRPr lang="en-US" sz="850" dirty="0"/>
+          </a:p>
+        </p:txBody>
+      </p:sp>
+      <p:sp>
+        <p:nvSpPr>
+          <p:cNvPr id="15" name="Shape 13"/>
+          <p:cNvSpPr/>
+          <p:nvPr/>
+        </p:nvSpPr>
+        <p:spPr>
+          <a:xfrm>
+            <a:off x="868680" y="4215384"/>
+            <a:ext cx="3118104" cy="658368"/>
+          </a:xfrm>
+          <a:prstGeom prst="roundRect">
+            <a:avLst>
+              <a:gd name="adj" fmla="val 6944"/>
+            </a:avLst>
+          </a:prstGeom>
+          <a:solidFill>
+            <a:srgbClr val="0F172A"/>
+          </a:solidFill>
+          <a:ln w="12700">
+            <a:solidFill>
+              <a:srgbClr val="23324A"/>
+            </a:solidFill>
+            <a:prstDash val="solid"/>
+          </a:ln>
+        </p:spPr>
+      </p:sp>
+      <p:sp>
+        <p:nvSpPr>
+          <p:cNvPr id="16" name="Text 14"/>
+          <p:cNvSpPr/>
+          <p:nvPr/>
+        </p:nvSpPr>
+        <p:spPr>
+          <a:xfrm>
+            <a:off x="960120" y="4261104"/>
+            <a:ext cx="2935224" cy="566928"/>
+          </a:xfrm>
+          <a:prstGeom prst="rect">
+            <a:avLst/>
+          </a:prstGeom>
+          <a:noFill/>
+          <a:ln/>
+        </p:spPr>
+        <p:txBody>
+          <a:bodyPr wrap="square" rtlCol="0" anchor="ctr"/>
+          <a:lstStyle/>
+          <a:p>
+            <a:pPr indent="0" marL="0">
+              <a:buNone/>
+            </a:pPr>
+            <a:r>
+              <a:rPr lang="en-US" sz="850" dirty="0">
+                <a:solidFill>
+                  <a:srgbClr val="F8FAFC"/>
+                </a:solidFill>
+                <a:latin typeface="Arial" pitchFamily="34" charset="0"/>
+                <a:ea typeface="Arial" pitchFamily="34" charset="-122"/>
+                <a:cs typeface="Arial" pitchFamily="34" charset="-120"/>
+              </a:rPr>
+              <a:t>✔ Self-Contained Deployment: Requires zero configuration daemons, JVMs, or external consensus clusters.</a:t>
+            </a:r>
+            <a:endParaRPr lang="en-US" sz="850" dirty="0"/>
+          </a:p>
+        </p:txBody>
+      </p:sp>
+      <p:sp>
+        <p:nvSpPr>
+          <p:cNvPr id="17" name="Shape 15"/>
+          <p:cNvSpPr/>
+          <p:nvPr/>
+        </p:nvSpPr>
+        <p:spPr>
+          <a:xfrm>
+            <a:off x="4398264" y="1371600"/>
+            <a:ext cx="3392424" cy="3840480"/>
+          </a:xfrm>
+          <a:prstGeom prst="roundRect">
+            <a:avLst>
+              <a:gd name="adj" fmla="val 2695"/>
+            </a:avLst>
+          </a:prstGeom>
+          <a:solidFill>
+            <a:srgbClr val="131B2B"/>
+          </a:solidFill>
+          <a:ln w="19050">
+            <a:solidFill>
+              <a:srgbClr val="34D399"/>
+            </a:solidFill>
+            <a:prstDash val="solid"/>
+          </a:ln>
+        </p:spPr>
+      </p:sp>
+      <p:sp>
+        <p:nvSpPr>
+          <p:cNvPr id="18" name="Shape 16"/>
+          <p:cNvSpPr/>
+          <p:nvPr/>
+        </p:nvSpPr>
+        <p:spPr>
+          <a:xfrm>
+            <a:off x="4535424" y="1508760"/>
+            <a:ext cx="3118104" cy="320040"/>
+          </a:xfrm>
+          <a:prstGeom prst="roundRect">
+            <a:avLst>
+              <a:gd name="adj" fmla="val 17143"/>
+            </a:avLst>
+          </a:prstGeom>
+          <a:solidFill>
+            <a:srgbClr val="1E293B"/>
+          </a:solidFill>
+          <a:ln w="12700">
+            <a:solidFill>
+              <a:srgbClr val="34D399"/>
+            </a:solidFill>
+            <a:prstDash val="solid"/>
+          </a:ln>
+        </p:spPr>
+      </p:sp>
+      <p:sp>
+        <p:nvSpPr>
+          <p:cNvPr id="19" name="Text 17"/>
+          <p:cNvSpPr/>
+          <p:nvPr/>
+        </p:nvSpPr>
+        <p:spPr>
+          <a:xfrm>
+            <a:off x="4535424" y="1508760"/>
+            <a:ext cx="3118104" cy="320040"/>
+          </a:xfrm>
+          <a:prstGeom prst="rect">
+            <a:avLst/>
+          </a:prstGeom>
+          <a:noFill/>
+          <a:ln/>
+        </p:spPr>
+        <p:txBody>
+          <a:bodyPr wrap="square" rtlCol="0" anchor="ctr"/>
+          <a:lstStyle/>
+          <a:p>
+            <a:pPr algn="ctr" indent="0" marL="0">
+              <a:buNone/>
+            </a:pPr>
+            <a:r>
+              <a:rPr lang="en-US" sz="950" b="1" dirty="0">
+                <a:solidFill>
+                  <a:srgbClr val="34D399"/>
+                </a:solidFill>
+                <a:latin typeface="Arial" pitchFamily="34" charset="0"/>
+                <a:ea typeface="Arial" pitchFamily="34" charset="-122"/>
+                <a:cs typeface="Arial" pitchFamily="34" charset="-120"/>
+              </a:rPr>
+              <a:t>PILLAR 2: HARDWARE DURABILITY</a:t>
+            </a:r>
+            <a:endParaRPr lang="en-US" sz="950" dirty="0"/>
+          </a:p>
+        </p:txBody>
+      </p:sp>
+      <p:sp>
+        <p:nvSpPr>
+          <p:cNvPr id="20" name="Shape 18"/>
+          <p:cNvSpPr/>
+          <p:nvPr/>
+        </p:nvSpPr>
+        <p:spPr>
+          <a:xfrm>
+            <a:off x="4535424" y="1965960"/>
+            <a:ext cx="3118104" cy="658368"/>
+          </a:xfrm>
+          <a:prstGeom prst="roundRect">
+            <a:avLst>
+              <a:gd name="adj" fmla="val 6944"/>
+            </a:avLst>
+          </a:prstGeom>
+          <a:solidFill>
+            <a:srgbClr val="0F172A"/>
+          </a:solidFill>
+          <a:ln w="12700">
+            <a:solidFill>
+              <a:srgbClr val="23324A"/>
+            </a:solidFill>
+            <a:prstDash val="solid"/>
+          </a:ln>
+        </p:spPr>
+      </p:sp>
+      <p:sp>
+        <p:nvSpPr>
+          <p:cNvPr id="21" name="Text 19"/>
+          <p:cNvSpPr/>
+          <p:nvPr/>
+        </p:nvSpPr>
+        <p:spPr>
+          <a:xfrm>
+            <a:off x="4626864" y="2011680"/>
+            <a:ext cx="2935224" cy="566928"/>
+          </a:xfrm>
+          <a:prstGeom prst="rect">
+            <a:avLst/>
+          </a:prstGeom>
+          <a:noFill/>
+          <a:ln/>
+        </p:spPr>
+        <p:txBody>
+          <a:bodyPr wrap="square" rtlCol="0" anchor="ctr"/>
+          <a:lstStyle/>
+          <a:p>
+            <a:pPr indent="0" marL="0">
+              <a:buNone/>
+            </a:pPr>
+            <a:r>
+              <a:rPr lang="en-US" sz="850" dirty="0">
+                <a:solidFill>
+                  <a:srgbClr val="F8FAFC"/>
+                </a:solidFill>
+                <a:latin typeface="Arial" pitchFamily="34" charset="0"/>
+                <a:ea typeface="Arial" pitchFamily="34" charset="-122"/>
+                <a:cs typeface="Arial" pitchFamily="34" charset="-120"/>
+              </a:rPr>
+              <a:t>✔ Hardware fsync() Durability: Commits every event directly to NVMe through dynamic group commit.</a:t>
+            </a:r>
+            <a:endParaRPr lang="en-US" sz="850" dirty="0"/>
+          </a:p>
+        </p:txBody>
+      </p:sp>
+      <p:sp>
+        <p:nvSpPr>
+          <p:cNvPr id="22" name="Shape 20"/>
+          <p:cNvSpPr/>
+          <p:nvPr/>
+        </p:nvSpPr>
+        <p:spPr>
+          <a:xfrm>
+            <a:off x="4535424" y="2715768"/>
+            <a:ext cx="3118104" cy="658368"/>
+          </a:xfrm>
+          <a:prstGeom prst="roundRect">
+            <a:avLst>
+              <a:gd name="adj" fmla="val 6944"/>
+            </a:avLst>
+          </a:prstGeom>
+          <a:solidFill>
+            <a:srgbClr val="0F172A"/>
+          </a:solidFill>
+          <a:ln w="12700">
+            <a:solidFill>
+              <a:srgbClr val="23324A"/>
+            </a:solidFill>
+            <a:prstDash val="solid"/>
+          </a:ln>
+        </p:spPr>
+      </p:sp>
+      <p:sp>
+        <p:nvSpPr>
+          <p:cNvPr id="23" name="Text 21"/>
+          <p:cNvSpPr/>
+          <p:nvPr/>
+        </p:nvSpPr>
+        <p:spPr>
+          <a:xfrm>
+            <a:off x="4626864" y="2761488"/>
+            <a:ext cx="2935224" cy="566928"/>
+          </a:xfrm>
+          <a:prstGeom prst="rect">
+            <a:avLst/>
+          </a:prstGeom>
+          <a:noFill/>
+          <a:ln/>
+        </p:spPr>
+        <p:txBody>
+          <a:bodyPr wrap="square" rtlCol="0" anchor="ctr"/>
+          <a:lstStyle/>
+          <a:p>
+            <a:pPr indent="0" marL="0">
+              <a:buNone/>
+            </a:pPr>
+            <a:r>
+              <a:rPr lang="en-US" sz="850" dirty="0">
+                <a:solidFill>
+                  <a:srgbClr val="F8FAFC"/>
+                </a:solidFill>
+                <a:latin typeface="Arial" pitchFamily="34" charset="0"/>
+                <a:ea typeface="Arial" pitchFamily="34" charset="-122"/>
+                <a:cs typeface="Arial" pitchFamily="34" charset="-120"/>
+              </a:rPr>
+              <a:t>✔ 30,000+ Durable Writes/sec: High throughput without sacrificing instant crash recovery guarantees.</a:t>
+            </a:r>
+            <a:endParaRPr lang="en-US" sz="850" dirty="0"/>
+          </a:p>
+        </p:txBody>
+      </p:sp>
+      <p:sp>
+        <p:nvSpPr>
+          <p:cNvPr id="24" name="Shape 22"/>
+          <p:cNvSpPr/>
+          <p:nvPr/>
+        </p:nvSpPr>
+        <p:spPr>
+          <a:xfrm>
+            <a:off x="4535424" y="3465576"/>
+            <a:ext cx="3118104" cy="658368"/>
+          </a:xfrm>
+          <a:prstGeom prst="roundRect">
+            <a:avLst>
+              <a:gd name="adj" fmla="val 6944"/>
+            </a:avLst>
+          </a:prstGeom>
+          <a:solidFill>
+            <a:srgbClr val="0F172A"/>
+          </a:solidFill>
+          <a:ln w="12700">
+            <a:solidFill>
+              <a:srgbClr val="23324A"/>
+            </a:solidFill>
+            <a:prstDash val="solid"/>
+          </a:ln>
+        </p:spPr>
+      </p:sp>
+      <p:sp>
+        <p:nvSpPr>
+          <p:cNvPr id="25" name="Text 23"/>
+          <p:cNvSpPr/>
+          <p:nvPr/>
+        </p:nvSpPr>
+        <p:spPr>
+          <a:xfrm>
+            <a:off x="4626864" y="3511296"/>
+            <a:ext cx="2935224" cy="566928"/>
+          </a:xfrm>
+          <a:prstGeom prst="rect">
+            <a:avLst/>
+          </a:prstGeom>
+          <a:noFill/>
+          <a:ln/>
+        </p:spPr>
+        <p:txBody>
+          <a:bodyPr wrap="square" rtlCol="0" anchor="ctr"/>
+          <a:lstStyle/>
+          <a:p>
+            <a:pPr indent="0" marL="0">
+              <a:buNone/>
+            </a:pPr>
+            <a:r>
+              <a:rPr lang="en-US" sz="850" dirty="0">
+                <a:solidFill>
+                  <a:srgbClr val="F8FAFC"/>
+                </a:solidFill>
+                <a:latin typeface="Arial" pitchFamily="34" charset="0"/>
+                <a:ea typeface="Arial" pitchFamily="34" charset="-122"/>
+                <a:cs typeface="Arial" pitchFamily="34" charset="-120"/>
+              </a:rPr>
+              <a:t>✔ Zero In-Flight Data Loss: Complete immunity against sudden power dropouts and kernel host panics.</a:t>
+            </a:r>
+            <a:endParaRPr lang="en-US" sz="850" dirty="0"/>
+          </a:p>
+        </p:txBody>
+      </p:sp>
+      <p:sp>
+        <p:nvSpPr>
+          <p:cNvPr id="26" name="Shape 24"/>
+          <p:cNvSpPr/>
+          <p:nvPr/>
+        </p:nvSpPr>
+        <p:spPr>
+          <a:xfrm>
+            <a:off x="4535424" y="4215384"/>
+            <a:ext cx="3118104" cy="658368"/>
+          </a:xfrm>
+          <a:prstGeom prst="roundRect">
+            <a:avLst>
+              <a:gd name="adj" fmla="val 6944"/>
+            </a:avLst>
+          </a:prstGeom>
+          <a:solidFill>
+            <a:srgbClr val="0F172A"/>
+          </a:solidFill>
+          <a:ln w="12700">
+            <a:solidFill>
+              <a:srgbClr val="23324A"/>
+            </a:solidFill>
+            <a:prstDash val="solid"/>
+          </a:ln>
+        </p:spPr>
+      </p:sp>
+      <p:sp>
+        <p:nvSpPr>
+          <p:cNvPr id="27" name="Text 25"/>
+          <p:cNvSpPr/>
+          <p:nvPr/>
+        </p:nvSpPr>
+        <p:spPr>
+          <a:xfrm>
+            <a:off x="4626864" y="4261104"/>
+            <a:ext cx="2935224" cy="566928"/>
+          </a:xfrm>
+          <a:prstGeom prst="rect">
+            <a:avLst/>
+          </a:prstGeom>
+          <a:noFill/>
+          <a:ln/>
+        </p:spPr>
+        <p:txBody>
+          <a:bodyPr wrap="square" rtlCol="0" anchor="ctr"/>
+          <a:lstStyle/>
+          <a:p>
+            <a:pPr indent="0" marL="0">
+              <a:buNone/>
+            </a:pPr>
+            <a:r>
+              <a:rPr lang="en-US" sz="850" dirty="0">
+                <a:solidFill>
+                  <a:srgbClr val="F8FAFC"/>
+                </a:solidFill>
+                <a:latin typeface="Arial" pitchFamily="34" charset="0"/>
+                <a:ea typeface="Arial" pitchFamily="34" charset="-122"/>
+                <a:cs typeface="Arial" pitchFamily="34" charset="-120"/>
+              </a:rPr>
+              <a:t>✔ Active 0-Byte Compaction: Reclaims disk blocks instantly upon ACK, preventing /var disk exhaustion.</a:t>
+            </a:r>
+            <a:endParaRPr lang="en-US" sz="850" dirty="0"/>
+          </a:p>
+        </p:txBody>
+      </p:sp>
+      <p:sp>
+        <p:nvSpPr>
+          <p:cNvPr id="28" name="Shape 26"/>
+          <p:cNvSpPr/>
+          <p:nvPr/>
+        </p:nvSpPr>
+        <p:spPr>
+          <a:xfrm>
+            <a:off x="8065008" y="1371600"/>
+            <a:ext cx="3392424" cy="3840480"/>
+          </a:xfrm>
+          <a:prstGeom prst="roundRect">
+            <a:avLst>
+              <a:gd name="adj" fmla="val 2695"/>
+            </a:avLst>
+          </a:prstGeom>
+          <a:solidFill>
+            <a:srgbClr val="131B2B"/>
+          </a:solidFill>
+          <a:ln w="19050">
+            <a:solidFill>
+              <a:srgbClr val="818CF8"/>
+            </a:solidFill>
+            <a:prstDash val="solid"/>
+          </a:ln>
+        </p:spPr>
+      </p:sp>
+      <p:sp>
+        <p:nvSpPr>
+          <p:cNvPr id="29" name="Shape 27"/>
+          <p:cNvSpPr/>
+          <p:nvPr/>
+        </p:nvSpPr>
+        <p:spPr>
+          <a:xfrm>
+            <a:off x="8202168" y="1508760"/>
+            <a:ext cx="3118104" cy="320040"/>
+          </a:xfrm>
+          <a:prstGeom prst="roundRect">
+            <a:avLst>
+              <a:gd name="adj" fmla="val 17143"/>
+            </a:avLst>
+          </a:prstGeom>
+          <a:solidFill>
+            <a:srgbClr val="1E293B"/>
+          </a:solidFill>
+          <a:ln w="12700">
+            <a:solidFill>
+              <a:srgbClr val="818CF8"/>
+            </a:solidFill>
+            <a:prstDash val="solid"/>
+          </a:ln>
+        </p:spPr>
+      </p:sp>
+      <p:sp>
+        <p:nvSpPr>
+          <p:cNvPr id="30" name="Text 28"/>
+          <p:cNvSpPr/>
+          <p:nvPr/>
+        </p:nvSpPr>
+        <p:spPr>
+          <a:xfrm>
+            <a:off x="8202168" y="1508760"/>
+            <a:ext cx="3118104" cy="320040"/>
+          </a:xfrm>
+          <a:prstGeom prst="rect">
+            <a:avLst/>
+          </a:prstGeom>
+          <a:noFill/>
+          <a:ln/>
+        </p:spPr>
+        <p:txBody>
+          <a:bodyPr wrap="square" rtlCol="0" anchor="ctr"/>
+          <a:lstStyle/>
+          <a:p>
+            <a:pPr algn="ctr" indent="0" marL="0">
+              <a:buNone/>
+            </a:pPr>
+            <a:r>
+              <a:rPr lang="en-US" sz="950" b="1" dirty="0">
+                <a:solidFill>
+                  <a:srgbClr val="818CF8"/>
+                </a:solidFill>
+                <a:latin typeface="Arial" pitchFamily="34" charset="0"/>
+                <a:ea typeface="Arial" pitchFamily="34" charset="-122"/>
+                <a:cs typeface="Arial" pitchFamily="34" charset="-120"/>
+              </a:rPr>
+              <a:t>PILLAR 3: OPERATIONAL ZERO-TRUST</a:t>
+            </a:r>
+            <a:endParaRPr lang="en-US" sz="950" dirty="0"/>
+          </a:p>
+        </p:txBody>
+      </p:sp>
+      <p:sp>
+        <p:nvSpPr>
+          <p:cNvPr id="31" name="Shape 29"/>
+          <p:cNvSpPr/>
+          <p:nvPr/>
+        </p:nvSpPr>
+        <p:spPr>
+          <a:xfrm>
+            <a:off x="8202168" y="1965960"/>
+            <a:ext cx="3118104" cy="658368"/>
+          </a:xfrm>
+          <a:prstGeom prst="roundRect">
+            <a:avLst>
+              <a:gd name="adj" fmla="val 6944"/>
+            </a:avLst>
+          </a:prstGeom>
+          <a:solidFill>
+            <a:srgbClr val="0F172A"/>
+          </a:solidFill>
+          <a:ln w="12700">
+            <a:solidFill>
+              <a:srgbClr val="23324A"/>
+            </a:solidFill>
+            <a:prstDash val="solid"/>
+          </a:ln>
+        </p:spPr>
+      </p:sp>
+      <p:sp>
+        <p:nvSpPr>
+          <p:cNvPr id="32" name="Text 30"/>
+          <p:cNvSpPr/>
+          <p:nvPr/>
+        </p:nvSpPr>
+        <p:spPr>
+          <a:xfrm>
+            <a:off x="8293608" y="2011680"/>
+            <a:ext cx="2935224" cy="566928"/>
+          </a:xfrm>
+          <a:prstGeom prst="rect">
+            <a:avLst/>
+          </a:prstGeom>
+          <a:noFill/>
+          <a:ln/>
+        </p:spPr>
+        <p:txBody>
+          <a:bodyPr wrap="square" rtlCol="0" anchor="ctr"/>
+          <a:lstStyle/>
+          <a:p>
+            <a:pPr indent="0" marL="0">
+              <a:buNone/>
+            </a:pPr>
+            <a:r>
+              <a:rPr lang="en-US" sz="850" dirty="0">
+                <a:solidFill>
+                  <a:srgbClr val="F8FAFC"/>
+                </a:solidFill>
+                <a:latin typeface="Arial" pitchFamily="34" charset="0"/>
+                <a:ea typeface="Arial" pitchFamily="34" charset="-122"/>
+                <a:cs typeface="Arial" pitchFamily="34" charset="-120"/>
+              </a:rPr>
+              <a:t>✔ MicroVM Perimeter Isolation: No shared host memory or direct storage access across guest microVMs.</a:t>
+            </a:r>
+            <a:endParaRPr lang="en-US" sz="850" dirty="0"/>
+          </a:p>
+        </p:txBody>
+      </p:sp>
+      <p:sp>
+        <p:nvSpPr>
+          <p:cNvPr id="33" name="Shape 31"/>
+          <p:cNvSpPr/>
+          <p:nvPr/>
+        </p:nvSpPr>
+        <p:spPr>
+          <a:xfrm>
+            <a:off x="8202168" y="2715768"/>
+            <a:ext cx="3118104" cy="658368"/>
+          </a:xfrm>
+          <a:prstGeom prst="roundRect">
+            <a:avLst>
+              <a:gd name="adj" fmla="val 6944"/>
+            </a:avLst>
+          </a:prstGeom>
+          <a:solidFill>
+            <a:srgbClr val="0F172A"/>
+          </a:solidFill>
+          <a:ln w="12700">
+            <a:solidFill>
+              <a:srgbClr val="23324A"/>
+            </a:solidFill>
+            <a:prstDash val="solid"/>
+          </a:ln>
+        </p:spPr>
+      </p:sp>
+      <p:sp>
+        <p:nvSpPr>
+          <p:cNvPr id="34" name="Text 32"/>
+          <p:cNvSpPr/>
+          <p:nvPr/>
+        </p:nvSpPr>
+        <p:spPr>
+          <a:xfrm>
+            <a:off x="8293608" y="2761488"/>
+            <a:ext cx="2935224" cy="566928"/>
+          </a:xfrm>
+          <a:prstGeom prst="rect">
+            <a:avLst/>
+          </a:prstGeom>
+          <a:noFill/>
+          <a:ln/>
+        </p:spPr>
+        <p:txBody>
+          <a:bodyPr wrap="square" rtlCol="0" anchor="ctr"/>
+          <a:lstStyle/>
+          <a:p>
+            <a:pPr indent="0" marL="0">
+              <a:buNone/>
+            </a:pPr>
+            <a:r>
+              <a:rPr lang="en-US" sz="850" dirty="0">
+                <a:solidFill>
+                  <a:srgbClr val="F8FAFC"/>
+                </a:solidFill>
+                <a:latin typeface="Arial" pitchFamily="34" charset="0"/>
+                <a:ea typeface="Arial" pitchFamily="34" charset="-122"/>
+                <a:cs typeface="Arial" pitchFamily="34" charset="-120"/>
+              </a:rPr>
+              <a:t>✔ Bounded Buffer Protection: Strict 1MB frame limit drops malformed or abusive payloads proactively.</a:t>
+            </a:r>
+            <a:endParaRPr lang="en-US" sz="850" dirty="0"/>
+          </a:p>
+        </p:txBody>
+      </p:sp>
+      <p:sp>
+        <p:nvSpPr>
+          <p:cNvPr id="35" name="Shape 33"/>
+          <p:cNvSpPr/>
+          <p:nvPr/>
+        </p:nvSpPr>
+        <p:spPr>
+          <a:xfrm>
+            <a:off x="8202168" y="3465576"/>
+            <a:ext cx="3118104" cy="658368"/>
+          </a:xfrm>
+          <a:prstGeom prst="roundRect">
+            <a:avLst>
+              <a:gd name="adj" fmla="val 6944"/>
+            </a:avLst>
+          </a:prstGeom>
+          <a:solidFill>
+            <a:srgbClr val="0F172A"/>
+          </a:solidFill>
+          <a:ln w="12700">
+            <a:solidFill>
+              <a:srgbClr val="23324A"/>
+            </a:solidFill>
+            <a:prstDash val="solid"/>
+          </a:ln>
+        </p:spPr>
+      </p:sp>
+      <p:sp>
+        <p:nvSpPr>
+          <p:cNvPr id="36" name="Text 34"/>
+          <p:cNvSpPr/>
+          <p:nvPr/>
+        </p:nvSpPr>
+        <p:spPr>
+          <a:xfrm>
+            <a:off x="8293608" y="3511296"/>
+            <a:ext cx="2935224" cy="566928"/>
+          </a:xfrm>
+          <a:prstGeom prst="rect">
+            <a:avLst/>
+          </a:prstGeom>
+          <a:noFill/>
+          <a:ln/>
+        </p:spPr>
+        <p:txBody>
+          <a:bodyPr wrap="square" rtlCol="0" anchor="ctr"/>
+          <a:lstStyle/>
+          <a:p>
+            <a:pPr indent="0" marL="0">
+              <a:buNone/>
+            </a:pPr>
+            <a:r>
+              <a:rPr lang="en-US" sz="850" dirty="0">
+                <a:solidFill>
+                  <a:srgbClr val="F8FAFC"/>
+                </a:solidFill>
+                <a:latin typeface="Arial" pitchFamily="34" charset="0"/>
+                <a:ea typeface="Arial" pitchFamily="34" charset="-122"/>
+                <a:cs typeface="Arial" pitchFamily="34" charset="-120"/>
+              </a:rPr>
+              <a:t>✔ Zero-SDK Integration: POSIX TCP socket access ensures universal language and OS interoperability.</a:t>
+            </a:r>
+            <a:endParaRPr lang="en-US" sz="850" dirty="0"/>
+          </a:p>
+        </p:txBody>
+      </p:sp>
+      <p:sp>
+        <p:nvSpPr>
+          <p:cNvPr id="37" name="Shape 35"/>
+          <p:cNvSpPr/>
+          <p:nvPr/>
+        </p:nvSpPr>
+        <p:spPr>
+          <a:xfrm>
+            <a:off x="8202168" y="4215384"/>
+            <a:ext cx="3118104" cy="658368"/>
+          </a:xfrm>
+          <a:prstGeom prst="roundRect">
+            <a:avLst>
+              <a:gd name="adj" fmla="val 6944"/>
+            </a:avLst>
+          </a:prstGeom>
+          <a:solidFill>
+            <a:srgbClr val="0F172A"/>
+          </a:solidFill>
+          <a:ln w="12700">
+            <a:solidFill>
+              <a:srgbClr val="23324A"/>
+            </a:solidFill>
+            <a:prstDash val="solid"/>
+          </a:ln>
+        </p:spPr>
+      </p:sp>
+      <p:sp>
+        <p:nvSpPr>
+          <p:cNvPr id="38" name="Text 36"/>
+          <p:cNvSpPr/>
+          <p:nvPr/>
+        </p:nvSpPr>
+        <p:spPr>
+          <a:xfrm>
+            <a:off x="8293608" y="4261104"/>
+            <a:ext cx="2935224" cy="566928"/>
+          </a:xfrm>
+          <a:prstGeom prst="rect">
+            <a:avLst/>
+          </a:prstGeom>
+          <a:noFill/>
+          <a:ln/>
+        </p:spPr>
+        <p:txBody>
+          <a:bodyPr wrap="square" rtlCol="0" anchor="ctr"/>
+          <a:lstStyle/>
+          <a:p>
+            <a:pPr indent="0" marL="0">
+              <a:buNone/>
+            </a:pPr>
+            <a:r>
+              <a:rPr lang="en-US" sz="850" dirty="0">
+                <a:solidFill>
+                  <a:srgbClr val="F8FAFC"/>
+                </a:solidFill>
+                <a:latin typeface="Arial" pitchFamily="34" charset="0"/>
+                <a:ea typeface="Arial" pitchFamily="34" charset="-122"/>
+                <a:cs typeface="Arial" pitchFamily="34" charset="-120"/>
+              </a:rPr>
+              <a:t>✔ Thread-Safe Retransmission: At-least-once guaranteed delivery with 2.0s automatic crash failover.</a:t>
+            </a:r>
+            <a:endParaRPr lang="en-US" sz="850" dirty="0"/>
+          </a:p>
+        </p:txBody>
+      </p:sp>
+      <p:sp>
+        <p:nvSpPr>
+          <p:cNvPr id="39" name="Shape 37"/>
+          <p:cNvSpPr/>
+          <p:nvPr/>
+        </p:nvSpPr>
+        <p:spPr>
+          <a:xfrm>
+            <a:off x="731520" y="5394960"/>
+            <a:ext cx="10725912" cy="1051560"/>
+          </a:xfrm>
+          <a:prstGeom prst="roundRect">
+            <a:avLst>
+              <a:gd name="adj" fmla="val 6957"/>
+            </a:avLst>
+          </a:prstGeom>
+          <a:solidFill>
+            <a:srgbClr val="13263E"/>
+          </a:solidFill>
+          <a:ln w="19050">
+            <a:solidFill>
+              <a:srgbClr val="38BDF8"/>
+            </a:solidFill>
+            <a:prstDash val="solid"/>
+          </a:ln>
+        </p:spPr>
+      </p:sp>
+      <p:sp>
+        <p:nvSpPr>
+          <p:cNvPr id="40" name="Text 38"/>
+          <p:cNvSpPr/>
+          <p:nvPr/>
+        </p:nvSpPr>
+        <p:spPr>
+          <a:xfrm>
+            <a:off x="914400" y="5486400"/>
+            <a:ext cx="10360152" cy="201168"/>
+          </a:xfrm>
+          <a:prstGeom prst="rect">
+            <a:avLst/>
+          </a:prstGeom>
+          <a:noFill/>
+          <a:ln/>
+        </p:spPr>
+        <p:txBody>
+          <a:bodyPr wrap="square" rtlCol="0" anchor="ctr"/>
+          <a:lstStyle/>
+          <a:p>
+            <a:pPr algn="ctr" indent="0" marL="0">
+              <a:buNone/>
+            </a:pPr>
+            <a:r>
+              <a:rPr lang="en-US" sz="1000" b="1" dirty="0">
+                <a:solidFill>
+                  <a:srgbClr val="38BDF8"/>
+                </a:solidFill>
+                <a:latin typeface="Arial" pitchFamily="34" charset="0"/>
+                <a:ea typeface="Arial" pitchFamily="34" charset="-122"/>
+                <a:cs typeface="Arial" pitchFamily="34" charset="-120"/>
+              </a:rPr>
+              <a:t>FINAL TAKEAWAY FOR JUDGES &amp; EVALUATORS</a:t>
+            </a:r>
+            <a:endParaRPr lang="en-US" sz="1000" dirty="0"/>
+          </a:p>
+        </p:txBody>
+      </p:sp>
+      <p:sp>
+        <p:nvSpPr>
+          <p:cNvPr id="41" name="Text 39"/>
+          <p:cNvSpPr/>
+          <p:nvPr/>
+        </p:nvSpPr>
+        <p:spPr>
+          <a:xfrm>
+            <a:off x="914400" y="5742432"/>
+            <a:ext cx="10360152" cy="411480"/>
+          </a:xfrm>
+          <a:prstGeom prst="rect">
+            <a:avLst/>
+          </a:prstGeom>
+          <a:noFill/>
+          <a:ln/>
+        </p:spPr>
+        <p:txBody>
+          <a:bodyPr wrap="square" rtlCol="0" anchor="ctr"/>
+          <a:lstStyle/>
+          <a:p>
+            <a:pPr algn="ctr" indent="0" marL="0">
+              <a:buNone/>
+            </a:pPr>
+            <a:r>
+              <a:rPr lang="en-US" sz="1250" b="1" dirty="0">
+                <a:solidFill>
+                  <a:srgbClr val="F8FAFC"/>
+                </a:solidFill>
+                <a:latin typeface="Arial" pitchFamily="34" charset="0"/>
+                <a:ea typeface="Arial" pitchFamily="34" charset="-122"/>
+                <a:cs typeface="Arial" pitchFamily="34" charset="-120"/>
+              </a:rPr>
+              <a:t>PMB provides the missing architectural link in edge hypervisors: Enterprise-grade durable message delivery at the speed and simplicity of an in-memory Unix pipe.</a:t>
+            </a:r>
+            <a:endParaRPr lang="en-US" sz="1250" dirty="0"/>
+          </a:p>
+        </p:txBody>
+      </p:sp>
+      <p:sp>
+        <p:nvSpPr>
+          <p:cNvPr id="42" name="Text 40"/>
+          <p:cNvSpPr/>
+          <p:nvPr/>
+        </p:nvSpPr>
+        <p:spPr>
+          <a:xfrm>
+            <a:off x="914400" y="6172200"/>
+            <a:ext cx="10360152" cy="201168"/>
+          </a:xfrm>
+          <a:prstGeom prst="rect">
+            <a:avLst/>
+          </a:prstGeom>
+          <a:noFill/>
+          <a:ln/>
+        </p:spPr>
+        <p:txBody>
+          <a:bodyPr wrap="square" rtlCol="0" anchor="ctr"/>
+          <a:lstStyle/>
+          <a:p>
+            <a:pPr algn="ctr" indent="0" marL="0">
+              <a:buNone/>
+            </a:pPr>
+            <a:r>
+              <a:rPr lang="en-US" sz="950" dirty="0">
+                <a:solidFill>
+                  <a:srgbClr val="34D399"/>
+                </a:solidFill>
+                <a:latin typeface="Arial" pitchFamily="34" charset="0"/>
+                <a:ea typeface="Arial" pitchFamily="34" charset="-122"/>
+                <a:cs typeface="Arial" pitchFamily="34" charset="-120"/>
+              </a:rPr>
+              <a:t>Sub-millisecond latency • 7.18 MB RAM • Hardware fsync Durability • 0-Byte Instant Compaction</a:t>
+            </a:r>
+            <a:endParaRPr lang="en-US" sz="950" dirty="0"/>
           </a:p>
         </p:txBody>
       </p:sp>
@@ -1850,8 +3864,8 @@
         </p:nvSpPr>
         <p:spPr>
           <a:xfrm>
-            <a:off x="731520" y="365760"/>
-            <a:ext cx="3291840" cy="256032"/>
+            <a:off x="731520" y="347472"/>
+            <a:ext cx="3474720" cy="256032"/>
           </a:xfrm>
           <a:prstGeom prst="roundRect">
             <a:avLst>
@@ -1877,8 +3891,8 @@
         </p:nvSpPr>
         <p:spPr>
           <a:xfrm>
-            <a:off x="731520" y="365760"/>
-            <a:ext cx="3291840" cy="256032"/>
+            <a:off x="731520" y="347472"/>
+            <a:ext cx="3474720" cy="256032"/>
           </a:xfrm>
           <a:prstGeom prst="rect">
             <a:avLst/>
@@ -1916,8 +3930,8 @@
         </p:nvSpPr>
         <p:spPr>
           <a:xfrm>
-            <a:off x="731520" y="658368"/>
-            <a:ext cx="10725912" cy="438912"/>
+            <a:off x="731520" y="640080"/>
+            <a:ext cx="10725912" cy="420624"/>
           </a:xfrm>
           <a:prstGeom prst="rect">
             <a:avLst/>
@@ -1955,24 +3969,24 @@
         </p:nvSpPr>
         <p:spPr>
           <a:xfrm>
-            <a:off x="731520" y="1078992"/>
-            <a:ext cx="10725912" cy="237744"/>
-          </a:xfrm>
-          <a:prstGeom prst="rect">
-            <a:avLst/>
-          </a:prstGeom>
-          <a:noFill/>
-          <a:ln/>
-        </p:spPr>
-        <p:txBody>
-          <a:bodyPr wrap="square" rtlCol="0" anchor="ctr"/>
-          <a:lstStyle/>
-          <a:p>
-            <a:pPr indent="0" marL="0">
-              <a:buNone/>
-            </a:pPr>
-            <a:r>
-              <a:rPr lang="en-US" sz="1100" dirty="0">
+            <a:off x="731520" y="1060704"/>
+            <a:ext cx="10725912" cy="228600"/>
+          </a:xfrm>
+          <a:prstGeom prst="rect">
+            <a:avLst/>
+          </a:prstGeom>
+          <a:noFill/>
+          <a:ln/>
+        </p:spPr>
+        <p:txBody>
+          <a:bodyPr wrap="square" rtlCol="0" anchor="ctr"/>
+          <a:lstStyle/>
+          <a:p>
+            <a:pPr indent="0" marL="0">
+              <a:buNone/>
+            </a:pPr>
+            <a:r>
+              <a:rPr lang="en-US" sz="1050" dirty="0">
                 <a:solidFill>
                   <a:srgbClr val="94A3B8"/>
                 </a:solidFill>
@@ -1982,7 +3996,7 @@
               </a:rPr>
               <a:t>Why conventional messaging architectures fundamentally break down in hypervisors and edge nodes.</a:t>
             </a:r>
-            <a:endParaRPr lang="en-US" sz="1100" dirty="0"/>
+            <a:endParaRPr lang="en-US" sz="1050" dirty="0"/>
           </a:p>
         </p:txBody>
       </p:sp>
@@ -2120,7 +4134,7 @@
       </p:sp>
       <p:pic>
         <p:nvPicPr>
-          <p:cNvPr id="10" name="Image 0" descr="D:\persistant_message_broker\docs\slide2_problem.svg">    </p:cNvPr>
+          <p:cNvPr id="10" name="Image 0" descr="d:\persistant_message_broker\docs\slide2_problem.svg">    </p:cNvPr>
           <p:cNvPicPr>
             <a:picLocks noChangeAspect="1"/>
           </p:cNvPicPr>
@@ -2223,7 +4237,7 @@
         <p:spPr>
           <a:xfrm>
             <a:off x="914400" y="4809744"/>
-            <a:ext cx="4855464" cy="1463040"/>
+            <a:ext cx="4855464" cy="1508760"/>
           </a:xfrm>
           <a:prstGeom prst="rect">
             <a:avLst/>
@@ -2247,7 +4261,7 @@
                 <a:ea typeface="Arial" pitchFamily="34" charset="-122"/>
                 <a:cs typeface="Arial" pitchFamily="34" charset="-120"/>
               </a:rPr>
-              <a:t>• Runtime Footprint Tax: Requires JVM or Erlang BEAM runtime + ZooKeeper / KRaft consensus quorum. Baseline idle footprint is 500MB to 1.5GB RAM before processing the first message.</a:t>
+              <a:t>1. Runtime Footprint Tax: Requires JVM or Erlang BEAM runtime + ZooKeeper / KRaft consensus quorum. Baseline idle footprint is 500MB to 1.5GB RAM before processing the first message.</a:t>
             </a:r>
             <a:endParaRPr lang="en-US" sz="850" dirty="0"/>
           </a:p>
@@ -2255,6 +4269,12 @@
             <a:pPr indent="0" marL="0">
               <a:buNone/>
             </a:pPr>
+            <a:endParaRPr lang="en-US" sz="850" dirty="0"/>
+          </a:p>
+          <a:p>
+            <a:pPr indent="0" marL="0">
+              <a:buNone/>
+            </a:pPr>
             <a:r>
               <a:rPr lang="en-US" sz="850" dirty="0">
                 <a:solidFill>
@@ -2264,7 +4284,7 @@
                 <a:ea typeface="Arial" pitchFamily="34" charset="-122"/>
                 <a:cs typeface="Arial" pitchFamily="34" charset="-120"/>
               </a:rPr>
-              <a:t>• Root Partition Exhaustion: Static multi-day retention models fill hypervisor root filesystems (/var), precipitating catastrophic host kernel lockups.</a:t>
+              <a:t>2. Root Partition Exhaustion: Static multi-day retention models fill hypervisor root filesystems (/var), precipitating catastrophic host kernel lockups.</a:t>
             </a:r>
             <a:endParaRPr lang="en-US" sz="850" dirty="0"/>
           </a:p>
@@ -2272,6 +4292,12 @@
             <a:pPr indent="0" marL="0">
               <a:buNone/>
             </a:pPr>
+            <a:endParaRPr lang="en-US" sz="850" dirty="0"/>
+          </a:p>
+          <a:p>
+            <a:pPr indent="0" marL="0">
+              <a:buNone/>
+            </a:pPr>
             <a:r>
               <a:rPr lang="en-US" sz="850" dirty="0">
                 <a:solidFill>
@@ -2281,7 +4307,7 @@
                 <a:ea typeface="Arial" pitchFamily="34" charset="-122"/>
                 <a:cs typeface="Arial" pitchFamily="34" charset="-120"/>
               </a:rPr>
-              <a:t>• Cold Boot Penalty: 15–45 second startup and quorum election delays cause total telemetry blackout during hypervisor failover.</a:t>
+              <a:t>3. Cold Boot Penalty: 15–45 second startup and quorum election delays cause total telemetry blackout during hypervisor failover.</a:t>
             </a:r>
             <a:endParaRPr lang="en-US" sz="850" dirty="0"/>
           </a:p>
@@ -2362,7 +4388,7 @@
         <p:spPr>
           <a:xfrm>
             <a:off x="6419088" y="4809744"/>
-            <a:ext cx="4855464" cy="1463040"/>
+            <a:ext cx="4855464" cy="1508760"/>
           </a:xfrm>
           <a:prstGeom prst="rect">
             <a:avLst/>
@@ -2386,7 +4412,7 @@
                 <a:ea typeface="Arial" pitchFamily="34" charset="-122"/>
                 <a:cs typeface="Arial" pitchFamily="34" charset="-120"/>
               </a:rPr>
-              <a:t>• Zero Crash Durability: Buffers live strictly in volatile user-space RAM. Sudden host power drop or hypervisor crash destroys 100% of in-flight messages with zero recovery.</a:t>
+              <a:t>1. Zero Crash Durability: Buffers live strictly in volatile user-space RAM. Sudden host power drop or hypervisor crash destroys 100% of in-flight messages with zero recovery.</a:t>
             </a:r>
             <a:endParaRPr lang="en-US" sz="850" dirty="0"/>
           </a:p>
@@ -2394,6 +4420,12 @@
             <a:pPr indent="0" marL="0">
               <a:buNone/>
             </a:pPr>
+            <a:endParaRPr lang="en-US" sz="850" dirty="0"/>
+          </a:p>
+          <a:p>
+            <a:pPr indent="0" marL="0">
+              <a:buNone/>
+            </a:pPr>
             <a:r>
               <a:rPr lang="en-US" sz="850" dirty="0">
                 <a:solidFill>
@@ -2403,7 +4435,7 @@
                 <a:ea typeface="Arial" pitchFamily="34" charset="-122"/>
                 <a:cs typeface="Arial" pitchFamily="34" charset="-120"/>
               </a:rPr>
-              <a:t>• No Disconnected Replay: If an edge subscriber temporarily restarts, all unconsumed events are dropped forever. No sequential log replay exists.</a:t>
+              <a:t>2. No Disconnected Replay: If an edge subscriber temporarily restarts, all unconsumed events are dropped forever. No sequential log replay exists.</a:t>
             </a:r>
             <a:endParaRPr lang="en-US" sz="850" dirty="0"/>
           </a:p>
@@ -2411,6 +4443,12 @@
             <a:pPr indent="0" marL="0">
               <a:buNone/>
             </a:pPr>
+            <a:endParaRPr lang="en-US" sz="850" dirty="0"/>
+          </a:p>
+          <a:p>
+            <a:pPr indent="0" marL="0">
+              <a:buNone/>
+            </a:pPr>
             <a:r>
               <a:rPr lang="en-US" sz="850" dirty="0">
                 <a:solidFill>
@@ -2420,7 +4458,7 @@
                 <a:ea typeface="Arial" pitchFamily="34" charset="-122"/>
                 <a:cs typeface="Arial" pitchFamily="34" charset="-120"/>
               </a:rPr>
-              <a:t>• False Durability Window: Periodic background disk snapshotting (Redis AOF 1s flush) leaves an unrecoverable 1000ms window where mission-critical events are wiped.</a:t>
+              <a:t>3. False Durability Window: Periodic background disk snapshotting (Redis AOF 1s flush) leaves an unrecoverable 1000ms window where mission-critical events are wiped.</a:t>
             </a:r>
             <a:endParaRPr lang="en-US" sz="850" dirty="0"/>
           </a:p>
@@ -2466,8 +4504,8 @@
         </p:nvSpPr>
         <p:spPr>
           <a:xfrm>
-            <a:off x="731520" y="365760"/>
-            <a:ext cx="3291840" cy="256032"/>
+            <a:off x="731520" y="347472"/>
+            <a:ext cx="3474720" cy="256032"/>
           </a:xfrm>
           <a:prstGeom prst="roundRect">
             <a:avLst>
@@ -2493,8 +4531,8 @@
         </p:nvSpPr>
         <p:spPr>
           <a:xfrm>
-            <a:off x="731520" y="365760"/>
-            <a:ext cx="3291840" cy="256032"/>
+            <a:off x="731520" y="347472"/>
+            <a:ext cx="3474720" cy="256032"/>
           </a:xfrm>
           <a:prstGeom prst="rect">
             <a:avLst/>
@@ -2532,8 +4570,8 @@
         </p:nvSpPr>
         <p:spPr>
           <a:xfrm>
-            <a:off x="731520" y="658368"/>
-            <a:ext cx="10725912" cy="438912"/>
+            <a:off x="731520" y="640080"/>
+            <a:ext cx="10725912" cy="420624"/>
           </a:xfrm>
           <a:prstGeom prst="rect">
             <a:avLst/>
@@ -2571,24 +4609,24 @@
         </p:nvSpPr>
         <p:spPr>
           <a:xfrm>
-            <a:off x="731520" y="1078992"/>
-            <a:ext cx="10725912" cy="237744"/>
-          </a:xfrm>
-          <a:prstGeom prst="rect">
-            <a:avLst/>
-          </a:prstGeom>
-          <a:noFill/>
-          <a:ln/>
-        </p:spPr>
-        <p:txBody>
-          <a:bodyPr wrap="square" rtlCol="0" anchor="ctr"/>
-          <a:lstStyle/>
-          <a:p>
-            <a:pPr indent="0" marL="0">
-              <a:buNone/>
-            </a:pPr>
-            <a:r>
-              <a:rPr lang="en-US" sz="1100" dirty="0">
+            <a:off x="731520" y="1060704"/>
+            <a:ext cx="10725912" cy="228600"/>
+          </a:xfrm>
+          <a:prstGeom prst="rect">
+            <a:avLst/>
+          </a:prstGeom>
+          <a:noFill/>
+          <a:ln/>
+        </p:spPr>
+        <p:txBody>
+          <a:bodyPr wrap="square" rtlCol="0" anchor="ctr"/>
+          <a:lstStyle/>
+          <a:p>
+            <a:pPr indent="0" marL="0">
+              <a:buNone/>
+            </a:pPr>
+            <a:r>
+              <a:rPr lang="en-US" sz="1050" dirty="0">
                 <a:solidFill>
                   <a:srgbClr val="94A3B8"/>
                 </a:solidFill>
@@ -2598,7 +4636,7 @@
               </a:rPr>
               <a:t>How PMB resolves the dilemma: Sub-millisecond latency &amp; &lt; 10MB RAM with physical hardware fsync durability.</a:t>
             </a:r>
-            <a:endParaRPr lang="en-US" sz="1100" dirty="0"/>
+            <a:endParaRPr lang="en-US" sz="1050" dirty="0"/>
           </a:p>
         </p:txBody>
       </p:sp>
@@ -2670,7 +4708,7 @@
       </p:sp>
       <p:pic>
         <p:nvPicPr>
-          <p:cNvPr id="8" name="Image 0" descr="D:\persistant_message_broker\docs\slide3_solution.svg">    </p:cNvPr>
+          <p:cNvPr id="8" name="Image 0" descr="d:\persistant_message_broker\docs\slide3_solution.svg">    </p:cNvPr>
           <p:cNvPicPr>
             <a:picLocks noChangeAspect="1"/>
           </p:cNvPicPr>
@@ -3442,6 +5480,6232 @@
               <a:t>• Instant Truncation: Upon subscriber ACK, message offsets are safely reclaimed to prevent disk exhaustion.</a:t>
             </a:r>
             <a:endParaRPr lang="en-US" sz="850" dirty="0"/>
+          </a:p>
+        </p:txBody>
+      </p:sp>
+    </p:spTree>
+  </p:cSld>
+  <p:clrMapOvr>
+    <a:masterClrMapping/>
+  </p:clrMapOvr>
+</p:sld>
+</file>
+
+<file path=ppt/slides/slide4.xml><?xml version="1.0" encoding="utf-8"?>
+<p:sld xmlns:a="http://schemas.openxmlformats.org/drawingml/2006/main" xmlns:r="http://schemas.openxmlformats.org/officeDocument/2006/relationships" xmlns:p="http://schemas.openxmlformats.org/presentationml/2006/main">
+  <p:cSld name="Slide 4">
+    <p:bg>
+      <p:bgPr>
+        <a:solidFill>
+          <a:srgbClr val="0B0F19"/>
+        </a:solidFill>
+      </p:bgPr>
+    </p:bg>
+    <p:spTree>
+      <p:nvGrpSpPr>
+        <p:cNvPr id="1" name=""/>
+        <p:cNvGrpSpPr/>
+        <p:nvPr/>
+      </p:nvGrpSpPr>
+      <p:grpSpPr>
+        <a:xfrm>
+          <a:off x="0" y="0"/>
+          <a:ext cx="0" cy="0"/>
+          <a:chOff x="0" y="0"/>
+          <a:chExt cx="0" cy="0"/>
+        </a:xfrm>
+      </p:grpSpPr>
+      <p:sp>
+        <p:nvSpPr>
+          <p:cNvPr id="2" name="Shape 0"/>
+          <p:cNvSpPr/>
+          <p:nvPr/>
+        </p:nvSpPr>
+        <p:spPr>
+          <a:xfrm>
+            <a:off x="731520" y="347472"/>
+            <a:ext cx="3474720" cy="256032"/>
+          </a:xfrm>
+          <a:prstGeom prst="roundRect">
+            <a:avLst>
+              <a:gd name="adj" fmla="val 21429"/>
+            </a:avLst>
+          </a:prstGeom>
+          <a:solidFill>
+            <a:srgbClr val="1E293B"/>
+          </a:solidFill>
+          <a:ln w="12700">
+            <a:solidFill>
+              <a:srgbClr val="38BDF8"/>
+            </a:solidFill>
+            <a:prstDash val="solid"/>
+          </a:ln>
+        </p:spPr>
+      </p:sp>
+      <p:sp>
+        <p:nvSpPr>
+          <p:cNvPr id="3" name="Text 1"/>
+          <p:cNvSpPr/>
+          <p:nvPr/>
+        </p:nvSpPr>
+        <p:spPr>
+          <a:xfrm>
+            <a:off x="731520" y="347472"/>
+            <a:ext cx="3474720" cy="256032"/>
+          </a:xfrm>
+          <a:prstGeom prst="rect">
+            <a:avLst/>
+          </a:prstGeom>
+          <a:noFill/>
+          <a:ln/>
+        </p:spPr>
+        <p:txBody>
+          <a:bodyPr wrap="square" rtlCol="0" anchor="ctr"/>
+          <a:lstStyle/>
+          <a:p>
+            <a:pPr algn="ctr" indent="0" marL="0">
+              <a:buNone/>
+            </a:pPr>
+            <a:r>
+              <a:rPr lang="en-US" sz="900" b="1" dirty="0">
+                <a:solidFill>
+                  <a:srgbClr val="38BDF8"/>
+                </a:solidFill>
+                <a:latin typeface="Arial" pitchFamily="34" charset="0"/>
+                <a:ea typeface="Arial" pitchFamily="34" charset="-122"/>
+                <a:cs typeface="Arial" pitchFamily="34" charset="-120"/>
+              </a:rPr>
+              <a:t>CONCURRENCY ARCHITECTURE</a:t>
+            </a:r>
+            <a:endParaRPr lang="en-US" sz="900" dirty="0"/>
+          </a:p>
+        </p:txBody>
+      </p:sp>
+      <p:sp>
+        <p:nvSpPr>
+          <p:cNvPr id="4" name="Text 2"/>
+          <p:cNvSpPr/>
+          <p:nvPr/>
+        </p:nvSpPr>
+        <p:spPr>
+          <a:xfrm>
+            <a:off x="731520" y="640080"/>
+            <a:ext cx="10725912" cy="420624"/>
+          </a:xfrm>
+          <a:prstGeom prst="rect">
+            <a:avLst/>
+          </a:prstGeom>
+          <a:noFill/>
+          <a:ln/>
+        </p:spPr>
+        <p:txBody>
+          <a:bodyPr wrap="square" rtlCol="0" anchor="ctr"/>
+          <a:lstStyle/>
+          <a:p>
+            <a:pPr indent="0" marL="0">
+              <a:buNone/>
+            </a:pPr>
+            <a:r>
+              <a:rPr lang="en-US" sz="2000" b="1" dirty="0">
+                <a:solidFill>
+                  <a:srgbClr val="F8FAFC"/>
+                </a:solidFill>
+                <a:latin typeface="Arial" pitchFamily="34" charset="0"/>
+                <a:ea typeface="Arial" pitchFamily="34" charset="-122"/>
+                <a:cs typeface="Arial" pitchFamily="34" charset="-120"/>
+              </a:rPr>
+              <a:t>Lock-Free Ingress: Atomic Treiber Stack &amp; CAS Contention Elimination</a:t>
+            </a:r>
+            <a:endParaRPr lang="en-US" sz="2000" dirty="0"/>
+          </a:p>
+        </p:txBody>
+      </p:sp>
+      <p:sp>
+        <p:nvSpPr>
+          <p:cNvPr id="5" name="Text 3"/>
+          <p:cNvSpPr/>
+          <p:nvPr/>
+        </p:nvSpPr>
+        <p:spPr>
+          <a:xfrm>
+            <a:off x="731520" y="1060704"/>
+            <a:ext cx="10725912" cy="228600"/>
+          </a:xfrm>
+          <a:prstGeom prst="rect">
+            <a:avLst/>
+          </a:prstGeom>
+          <a:noFill/>
+          <a:ln/>
+        </p:spPr>
+        <p:txBody>
+          <a:bodyPr wrap="square" rtlCol="0" anchor="ctr"/>
+          <a:lstStyle/>
+          <a:p>
+            <a:pPr indent="0" marL="0">
+              <a:buNone/>
+            </a:pPr>
+            <a:r>
+              <a:rPr lang="en-US" sz="1050" dirty="0">
+                <a:solidFill>
+                  <a:srgbClr val="94A3B8"/>
+                </a:solidFill>
+                <a:latin typeface="Arial" pitchFamily="34" charset="0"/>
+                <a:ea typeface="Arial" pitchFamily="34" charset="-122"/>
+                <a:cs typeface="Arial" pitchFamily="34" charset="-120"/>
+              </a:rPr>
+              <a:t>Eliminating mutex serialization bottlenecks during multi-microVM concurrent event storms.</a:t>
+            </a:r>
+            <a:endParaRPr lang="en-US" sz="1050" dirty="0"/>
+          </a:p>
+        </p:txBody>
+      </p:sp>
+      <p:sp>
+        <p:nvSpPr>
+          <p:cNvPr id="6" name="Shape 4"/>
+          <p:cNvSpPr/>
+          <p:nvPr/>
+        </p:nvSpPr>
+        <p:spPr>
+          <a:xfrm>
+            <a:off x="731520" y="1325880"/>
+            <a:ext cx="10725912" cy="2971800"/>
+          </a:xfrm>
+          <a:prstGeom prst="roundRect">
+            <a:avLst>
+              <a:gd name="adj" fmla="val 2462"/>
+            </a:avLst>
+          </a:prstGeom>
+          <a:solidFill>
+            <a:srgbClr val="131B2B"/>
+          </a:solidFill>
+          <a:ln w="12700">
+            <a:solidFill>
+              <a:srgbClr val="23324A"/>
+            </a:solidFill>
+            <a:prstDash val="solid"/>
+          </a:ln>
+        </p:spPr>
+      </p:sp>
+      <p:sp>
+        <p:nvSpPr>
+          <p:cNvPr id="7" name="Text 5"/>
+          <p:cNvSpPr/>
+          <p:nvPr/>
+        </p:nvSpPr>
+        <p:spPr>
+          <a:xfrm>
+            <a:off x="914400" y="1417320"/>
+            <a:ext cx="10360152" cy="201168"/>
+          </a:xfrm>
+          <a:prstGeom prst="rect">
+            <a:avLst/>
+          </a:prstGeom>
+          <a:noFill/>
+          <a:ln/>
+        </p:spPr>
+        <p:txBody>
+          <a:bodyPr wrap="square" rtlCol="0" anchor="ctr"/>
+          <a:lstStyle/>
+          <a:p>
+            <a:pPr indent="0" marL="0">
+              <a:buNone/>
+            </a:pPr>
+            <a:r>
+              <a:rPr lang="en-US" sz="1050" b="1" dirty="0">
+                <a:solidFill>
+                  <a:srgbClr val="38BDF8"/>
+                </a:solidFill>
+                <a:latin typeface="Arial" pitchFamily="34" charset="0"/>
+                <a:ea typeface="Arial" pitchFamily="34" charset="-122"/>
+                <a:cs typeface="Arial" pitchFamily="34" charset="-120"/>
+              </a:rPr>
+              <a:t>ARCHITECTURAL COMPARISON: LOCK CONVOY VS. LOCK-FREE CAS ATOMIC INGRESS</a:t>
+            </a:r>
+            <a:endParaRPr lang="en-US" sz="1050" dirty="0"/>
+          </a:p>
+        </p:txBody>
+      </p:sp>
+      <p:pic>
+        <p:nvPicPr>
+          <p:cNvPr id="8" name="Image 0" descr="d:\persistant_message_broker\docs\slide4_atomic_stack.svg">    </p:cNvPr>
+          <p:cNvPicPr>
+            <a:picLocks noChangeAspect="1"/>
+          </p:cNvPicPr>
+          <p:nvPr/>
+        </p:nvPicPr>
+        <p:blipFill>
+          <a:blip r:embed="rId1">
+            <a:extLst>
+              <a:ext uri="{96DAC541-7B7A-43D3-8B79-37D633B846F1}">
+                <asvg:svgBlip xmlns:asvg="http://schemas.microsoft.com/office/drawing/2016/SVG/main" r:embed="rId2"/>
+              </a:ext>
+            </a:extLst>
+          </a:blip>
+          <a:stretch>
+            <a:fillRect/>
+          </a:stretch>
+        </p:blipFill>
+        <p:spPr>
+          <a:xfrm>
+            <a:off x="1060704" y="1664208"/>
+            <a:ext cx="10058400" cy="2542032"/>
+          </a:xfrm>
+          <a:prstGeom prst="rect">
+            <a:avLst/>
+          </a:prstGeom>
+        </p:spPr>
+      </p:pic>
+      <p:sp>
+        <p:nvSpPr>
+          <p:cNvPr id="9" name="Shape 6"/>
+          <p:cNvSpPr/>
+          <p:nvPr/>
+        </p:nvSpPr>
+        <p:spPr>
+          <a:xfrm>
+            <a:off x="731520" y="4462272"/>
+            <a:ext cx="5221224" cy="1920240"/>
+          </a:xfrm>
+          <a:prstGeom prst="roundRect">
+            <a:avLst>
+              <a:gd name="adj" fmla="val 3810"/>
+            </a:avLst>
+          </a:prstGeom>
+          <a:solidFill>
+            <a:srgbClr val="131B2B"/>
+          </a:solidFill>
+          <a:ln w="12700">
+            <a:solidFill>
+              <a:srgbClr val="F87171"/>
+            </a:solidFill>
+            <a:prstDash val="solid"/>
+          </a:ln>
+        </p:spPr>
+      </p:sp>
+      <p:sp>
+        <p:nvSpPr>
+          <p:cNvPr id="10" name="Text 7"/>
+          <p:cNvSpPr/>
+          <p:nvPr/>
+        </p:nvSpPr>
+        <p:spPr>
+          <a:xfrm>
+            <a:off x="914400" y="4572000"/>
+            <a:ext cx="4855464" cy="201168"/>
+          </a:xfrm>
+          <a:prstGeom prst="rect">
+            <a:avLst/>
+          </a:prstGeom>
+          <a:noFill/>
+          <a:ln/>
+        </p:spPr>
+        <p:txBody>
+          <a:bodyPr wrap="square" rtlCol="0" anchor="ctr"/>
+          <a:lstStyle/>
+          <a:p>
+            <a:pPr indent="0" marL="0">
+              <a:buNone/>
+            </a:pPr>
+            <a:r>
+              <a:rPr lang="en-US" sz="1000" b="1" dirty="0">
+                <a:solidFill>
+                  <a:srgbClr val="F87171"/>
+                </a:solidFill>
+                <a:latin typeface="Arial" pitchFamily="34" charset="0"/>
+                <a:ea typeface="Arial" pitchFamily="34" charset="-122"/>
+                <a:cs typeface="Arial" pitchFamily="34" charset="-120"/>
+              </a:rPr>
+              <a:t>THE MUTEX BOTTLENECK IN VIRTUALIZED SYSTEMS</a:t>
+            </a:r>
+            <a:endParaRPr lang="en-US" sz="1000" dirty="0"/>
+          </a:p>
+        </p:txBody>
+      </p:sp>
+      <p:sp>
+        <p:nvSpPr>
+          <p:cNvPr id="11" name="Text 8"/>
+          <p:cNvSpPr/>
+          <p:nvPr/>
+        </p:nvSpPr>
+        <p:spPr>
+          <a:xfrm>
+            <a:off x="914400" y="4809744"/>
+            <a:ext cx="4855464" cy="1508760"/>
+          </a:xfrm>
+          <a:prstGeom prst="rect">
+            <a:avLst/>
+          </a:prstGeom>
+          <a:noFill/>
+          <a:ln/>
+        </p:spPr>
+        <p:txBody>
+          <a:bodyPr wrap="square" rtlCol="0" anchor="ctr"/>
+          <a:lstStyle/>
+          <a:p>
+            <a:pPr indent="0" marL="0">
+              <a:buNone/>
+            </a:pPr>
+            <a:r>
+              <a:rPr lang="en-US" sz="850" dirty="0">
+                <a:solidFill>
+                  <a:srgbClr val="94A3B8"/>
+                </a:solidFill>
+                <a:latin typeface="Arial" pitchFamily="34" charset="0"/>
+                <a:ea typeface="Arial" pitchFamily="34" charset="-122"/>
+                <a:cs typeface="Arial" pitchFamily="34" charset="-120"/>
+              </a:rPr>
+              <a:t>1. Virtual CPU Preemption: Hypervisors overcommit physical cores. When a thread holding a sync.Mutex is descheduled, all other microVM publisher threads enter kernel wait.</a:t>
+            </a:r>
+            <a:endParaRPr lang="en-US" sz="850" dirty="0"/>
+          </a:p>
+          <a:p>
+            <a:pPr indent="0" marL="0">
+              <a:buNone/>
+            </a:pPr>
+            <a:endParaRPr lang="en-US" sz="850" dirty="0"/>
+          </a:p>
+          <a:p>
+            <a:pPr indent="0" marL="0">
+              <a:buNone/>
+            </a:pPr>
+            <a:r>
+              <a:rPr lang="en-US" sz="850" dirty="0">
+                <a:solidFill>
+                  <a:srgbClr val="94A3B8"/>
+                </a:solidFill>
+                <a:latin typeface="Arial" pitchFamily="34" charset="0"/>
+                <a:ea typeface="Arial" pitchFamily="34" charset="-122"/>
+                <a:cs typeface="Arial" pitchFamily="34" charset="-120"/>
+              </a:rPr>
+              <a:t>2. Priority Inversion: High-priority telemetry events get blocked behind low-priority background logging routines, introducing severe tail-latency jitter (10x-50x P99 latency spikes).</a:t>
+            </a:r>
+            <a:endParaRPr lang="en-US" sz="850" dirty="0"/>
+          </a:p>
+          <a:p>
+            <a:pPr indent="0" marL="0">
+              <a:buNone/>
+            </a:pPr>
+            <a:endParaRPr lang="en-US" sz="850" dirty="0"/>
+          </a:p>
+          <a:p>
+            <a:pPr indent="0" marL="0">
+              <a:buNone/>
+            </a:pPr>
+            <a:r>
+              <a:rPr lang="en-US" sz="850" dirty="0">
+                <a:solidFill>
+                  <a:srgbClr val="94A3B8"/>
+                </a:solidFill>
+                <a:latin typeface="Arial" pitchFamily="34" charset="0"/>
+                <a:ea typeface="Arial" pitchFamily="34" charset="-122"/>
+                <a:cs typeface="Arial" pitchFamily="34" charset="-120"/>
+              </a:rPr>
+              <a:t>3. Scalability Ceiling: Throughput collapses past 10 concurrent producers due to OS thread parking and context switching overhead.</a:t>
+            </a:r>
+            <a:endParaRPr lang="en-US" sz="850" dirty="0"/>
+          </a:p>
+        </p:txBody>
+      </p:sp>
+      <p:sp>
+        <p:nvSpPr>
+          <p:cNvPr id="12" name="Shape 9"/>
+          <p:cNvSpPr/>
+          <p:nvPr/>
+        </p:nvSpPr>
+        <p:spPr>
+          <a:xfrm>
+            <a:off x="6236208" y="4462272"/>
+            <a:ext cx="5221224" cy="1920240"/>
+          </a:xfrm>
+          <a:prstGeom prst="roundRect">
+            <a:avLst>
+              <a:gd name="adj" fmla="val 3810"/>
+            </a:avLst>
+          </a:prstGeom>
+          <a:solidFill>
+            <a:srgbClr val="131B2B"/>
+          </a:solidFill>
+          <a:ln w="12700">
+            <a:solidFill>
+              <a:srgbClr val="34D399"/>
+            </a:solidFill>
+            <a:prstDash val="solid"/>
+          </a:ln>
+        </p:spPr>
+      </p:sp>
+      <p:sp>
+        <p:nvSpPr>
+          <p:cNvPr id="13" name="Text 10"/>
+          <p:cNvSpPr/>
+          <p:nvPr/>
+        </p:nvSpPr>
+        <p:spPr>
+          <a:xfrm>
+            <a:off x="6419088" y="4572000"/>
+            <a:ext cx="4855464" cy="201168"/>
+          </a:xfrm>
+          <a:prstGeom prst="rect">
+            <a:avLst/>
+          </a:prstGeom>
+          <a:noFill/>
+          <a:ln/>
+        </p:spPr>
+        <p:txBody>
+          <a:bodyPr wrap="square" rtlCol="0" anchor="ctr"/>
+          <a:lstStyle/>
+          <a:p>
+            <a:pPr indent="0" marL="0">
+              <a:buNone/>
+            </a:pPr>
+            <a:r>
+              <a:rPr lang="en-US" sz="1000" b="1" dirty="0">
+                <a:solidFill>
+                  <a:srgbClr val="34D399"/>
+                </a:solidFill>
+                <a:latin typeface="Arial" pitchFamily="34" charset="0"/>
+                <a:ea typeface="Arial" pitchFamily="34" charset="-122"/>
+                <a:cs typeface="Arial" pitchFamily="34" charset="-120"/>
+              </a:rPr>
+              <a:t>PMB IMPLEMENTATION: LOCK-FREE TREIBER CAS QUEUE</a:t>
+            </a:r>
+            <a:endParaRPr lang="en-US" sz="1000" dirty="0"/>
+          </a:p>
+        </p:txBody>
+      </p:sp>
+      <p:sp>
+        <p:nvSpPr>
+          <p:cNvPr id="14" name="Text 11"/>
+          <p:cNvSpPr/>
+          <p:nvPr/>
+        </p:nvSpPr>
+        <p:spPr>
+          <a:xfrm>
+            <a:off x="6419088" y="4809744"/>
+            <a:ext cx="4855464" cy="1508760"/>
+          </a:xfrm>
+          <a:prstGeom prst="rect">
+            <a:avLst/>
+          </a:prstGeom>
+          <a:noFill/>
+          <a:ln/>
+        </p:spPr>
+        <p:txBody>
+          <a:bodyPr wrap="square" rtlCol="0" anchor="ctr"/>
+          <a:lstStyle/>
+          <a:p>
+            <a:pPr indent="0" marL="0">
+              <a:buNone/>
+            </a:pPr>
+            <a:r>
+              <a:rPr lang="en-US" sz="850" dirty="0">
+                <a:solidFill>
+                  <a:srgbClr val="94A3B8"/>
+                </a:solidFill>
+                <a:latin typeface="Arial" pitchFamily="34" charset="0"/>
+                <a:ea typeface="Arial" pitchFamily="34" charset="-122"/>
+                <a:cs typeface="Arial" pitchFamily="34" charset="-120"/>
+              </a:rPr>
+              <a:t>1. Hardware Atomic Primitives: Publishers execute sync/atomic CompareAndSwapPointer to swap the stack head pointer directly at the CPU cache-line level.</a:t>
+            </a:r>
+            <a:endParaRPr lang="en-US" sz="850" dirty="0"/>
+          </a:p>
+          <a:p>
+            <a:pPr indent="0" marL="0">
+              <a:buNone/>
+            </a:pPr>
+            <a:endParaRPr lang="en-US" sz="850" dirty="0"/>
+          </a:p>
+          <a:p>
+            <a:pPr indent="0" marL="0">
+              <a:buNone/>
+            </a:pPr>
+            <a:r>
+              <a:rPr lang="en-US" sz="850" dirty="0">
+                <a:solidFill>
+                  <a:srgbClr val="94A3B8"/>
+                </a:solidFill>
+                <a:latin typeface="Arial" pitchFamily="34" charset="0"/>
+                <a:ea typeface="Arial" pitchFamily="34" charset="-122"/>
+                <a:cs typeface="Arial" pitchFamily="34" charset="-120"/>
+              </a:rPr>
+              <a:t>2. Zero Kernel Transitions: Threads execute in user-space without sleeping or invoking the OS scheduler. If contention occurs, CAS retries in single-digit nanoseconds.</a:t>
+            </a:r>
+            <a:endParaRPr lang="en-US" sz="850" dirty="0"/>
+          </a:p>
+          <a:p>
+            <a:pPr indent="0" marL="0">
+              <a:buNone/>
+            </a:pPr>
+            <a:endParaRPr lang="en-US" sz="850" dirty="0"/>
+          </a:p>
+          <a:p>
+            <a:pPr indent="0" marL="0">
+              <a:buNone/>
+            </a:pPr>
+            <a:r>
+              <a:rPr lang="en-US" sz="850" dirty="0">
+                <a:solidFill>
+                  <a:srgbClr val="94A3B8"/>
+                </a:solidFill>
+                <a:latin typeface="Arial" pitchFamily="34" charset="0"/>
+                <a:ea typeface="Arial" pitchFamily="34" charset="-122"/>
+                <a:cs typeface="Arial" pitchFamily="34" charset="-120"/>
+              </a:rPr>
+              <a:t>3. Single-Instruction Batch Drain: The disk flusher drains the entire accumulated stack in a single atomic swap (head -&gt; nil), achieving zero lock overhead for 50+ concurrent workers.</a:t>
+            </a:r>
+            <a:endParaRPr lang="en-US" sz="850" dirty="0"/>
+          </a:p>
+        </p:txBody>
+      </p:sp>
+    </p:spTree>
+  </p:cSld>
+  <p:clrMapOvr>
+    <a:masterClrMapping/>
+  </p:clrMapOvr>
+</p:sld>
+</file>
+
+<file path=ppt/slides/slide5.xml><?xml version="1.0" encoding="utf-8"?>
+<p:sld xmlns:a="http://schemas.openxmlformats.org/drawingml/2006/main" xmlns:r="http://schemas.openxmlformats.org/officeDocument/2006/relationships" xmlns:p="http://schemas.openxmlformats.org/presentationml/2006/main">
+  <p:cSld name="Slide 5">
+    <p:bg>
+      <p:bgPr>
+        <a:solidFill>
+          <a:srgbClr val="0B0F19"/>
+        </a:solidFill>
+      </p:bgPr>
+    </p:bg>
+    <p:spTree>
+      <p:nvGrpSpPr>
+        <p:cNvPr id="1" name=""/>
+        <p:cNvGrpSpPr/>
+        <p:nvPr/>
+      </p:nvGrpSpPr>
+      <p:grpSpPr>
+        <a:xfrm>
+          <a:off x="0" y="0"/>
+          <a:ext cx="0" cy="0"/>
+          <a:chOff x="0" y="0"/>
+          <a:chExt cx="0" cy="0"/>
+        </a:xfrm>
+      </p:grpSpPr>
+      <p:sp>
+        <p:nvSpPr>
+          <p:cNvPr id="2" name="Shape 0"/>
+          <p:cNvSpPr/>
+          <p:nvPr/>
+        </p:nvSpPr>
+        <p:spPr>
+          <a:xfrm>
+            <a:off x="731520" y="347472"/>
+            <a:ext cx="3474720" cy="256032"/>
+          </a:xfrm>
+          <a:prstGeom prst="roundRect">
+            <a:avLst>
+              <a:gd name="adj" fmla="val 21429"/>
+            </a:avLst>
+          </a:prstGeom>
+          <a:solidFill>
+            <a:srgbClr val="1E293B"/>
+          </a:solidFill>
+          <a:ln w="12700">
+            <a:solidFill>
+              <a:srgbClr val="38BDF8"/>
+            </a:solidFill>
+            <a:prstDash val="solid"/>
+          </a:ln>
+        </p:spPr>
+      </p:sp>
+      <p:sp>
+        <p:nvSpPr>
+          <p:cNvPr id="3" name="Text 1"/>
+          <p:cNvSpPr/>
+          <p:nvPr/>
+        </p:nvSpPr>
+        <p:spPr>
+          <a:xfrm>
+            <a:off x="731520" y="347472"/>
+            <a:ext cx="3474720" cy="256032"/>
+          </a:xfrm>
+          <a:prstGeom prst="rect">
+            <a:avLst/>
+          </a:prstGeom>
+          <a:noFill/>
+          <a:ln/>
+        </p:spPr>
+        <p:txBody>
+          <a:bodyPr wrap="square" rtlCol="0" anchor="ctr"/>
+          <a:lstStyle/>
+          <a:p>
+            <a:pPr algn="ctr" indent="0" marL="0">
+              <a:buNone/>
+            </a:pPr>
+            <a:r>
+              <a:rPr lang="en-US" sz="900" b="1" dirty="0">
+                <a:solidFill>
+                  <a:srgbClr val="38BDF8"/>
+                </a:solidFill>
+                <a:latin typeface="Arial" pitchFamily="34" charset="0"/>
+                <a:ea typeface="Arial" pitchFamily="34" charset="-122"/>
+                <a:cs typeface="Arial" pitchFamily="34" charset="-120"/>
+              </a:rPr>
+              <a:t>STORAGE SUBSYSTEM &amp; CRASH RESILIENCE</a:t>
+            </a:r>
+            <a:endParaRPr lang="en-US" sz="900" dirty="0"/>
+          </a:p>
+        </p:txBody>
+      </p:sp>
+      <p:sp>
+        <p:nvSpPr>
+          <p:cNvPr id="4" name="Text 2"/>
+          <p:cNvSpPr/>
+          <p:nvPr/>
+        </p:nvSpPr>
+        <p:spPr>
+          <a:xfrm>
+            <a:off x="731520" y="640080"/>
+            <a:ext cx="10725912" cy="420624"/>
+          </a:xfrm>
+          <a:prstGeom prst="rect">
+            <a:avLst/>
+          </a:prstGeom>
+          <a:noFill/>
+          <a:ln/>
+        </p:spPr>
+        <p:txBody>
+          <a:bodyPr wrap="square" rtlCol="0" anchor="ctr"/>
+          <a:lstStyle/>
+          <a:p>
+            <a:pPr indent="0" marL="0">
+              <a:buNone/>
+            </a:pPr>
+            <a:r>
+              <a:rPr lang="en-US" sz="2000" b="1" dirty="0">
+                <a:solidFill>
+                  <a:srgbClr val="F8FAFC"/>
+                </a:solidFill>
+                <a:latin typeface="Arial" pitchFamily="34" charset="0"/>
+                <a:ea typeface="Arial" pitchFamily="34" charset="-122"/>
+                <a:cs typeface="Arial" pitchFamily="34" charset="-120"/>
+              </a:rPr>
+              <a:t>Durability Engine: Dynamic Group Commit WAL &amp; Hardware fsync Barriers</a:t>
+            </a:r>
+            <a:endParaRPr lang="en-US" sz="2000" dirty="0"/>
+          </a:p>
+        </p:txBody>
+      </p:sp>
+      <p:sp>
+        <p:nvSpPr>
+          <p:cNvPr id="5" name="Text 3"/>
+          <p:cNvSpPr/>
+          <p:nvPr/>
+        </p:nvSpPr>
+        <p:spPr>
+          <a:xfrm>
+            <a:off x="731520" y="1060704"/>
+            <a:ext cx="10725912" cy="228600"/>
+          </a:xfrm>
+          <a:prstGeom prst="rect">
+            <a:avLst/>
+          </a:prstGeom>
+          <a:noFill/>
+          <a:ln/>
+        </p:spPr>
+        <p:txBody>
+          <a:bodyPr wrap="square" rtlCol="0" anchor="ctr"/>
+          <a:lstStyle/>
+          <a:p>
+            <a:pPr indent="0" marL="0">
+              <a:buNone/>
+            </a:pPr>
+            <a:r>
+              <a:rPr lang="en-US" sz="1050" dirty="0">
+                <a:solidFill>
+                  <a:srgbClr val="94A3B8"/>
+                </a:solidFill>
+                <a:latin typeface="Arial" pitchFamily="34" charset="0"/>
+                <a:ea typeface="Arial" pitchFamily="34" charset="-122"/>
+                <a:cs typeface="Arial" pitchFamily="34" charset="-120"/>
+              </a:rPr>
+              <a:t>Guaranteeing zero-loss crash resilience without paying a 1ms disk penalty per event.</a:t>
+            </a:r>
+            <a:endParaRPr lang="en-US" sz="1050" dirty="0"/>
+          </a:p>
+        </p:txBody>
+      </p:sp>
+      <p:sp>
+        <p:nvSpPr>
+          <p:cNvPr id="6" name="Shape 4"/>
+          <p:cNvSpPr/>
+          <p:nvPr/>
+        </p:nvSpPr>
+        <p:spPr>
+          <a:xfrm>
+            <a:off x="731520" y="1325880"/>
+            <a:ext cx="10725912" cy="2971800"/>
+          </a:xfrm>
+          <a:prstGeom prst="roundRect">
+            <a:avLst>
+              <a:gd name="adj" fmla="val 2462"/>
+            </a:avLst>
+          </a:prstGeom>
+          <a:solidFill>
+            <a:srgbClr val="131B2B"/>
+          </a:solidFill>
+          <a:ln w="12700">
+            <a:solidFill>
+              <a:srgbClr val="23324A"/>
+            </a:solidFill>
+            <a:prstDash val="solid"/>
+          </a:ln>
+        </p:spPr>
+      </p:sp>
+      <p:sp>
+        <p:nvSpPr>
+          <p:cNvPr id="7" name="Text 5"/>
+          <p:cNvSpPr/>
+          <p:nvPr/>
+        </p:nvSpPr>
+        <p:spPr>
+          <a:xfrm>
+            <a:off x="914400" y="1417320"/>
+            <a:ext cx="10360152" cy="201168"/>
+          </a:xfrm>
+          <a:prstGeom prst="rect">
+            <a:avLst/>
+          </a:prstGeom>
+          <a:noFill/>
+          <a:ln/>
+        </p:spPr>
+        <p:txBody>
+          <a:bodyPr wrap="square" rtlCol="0" anchor="ctr"/>
+          <a:lstStyle/>
+          <a:p>
+            <a:pPr indent="0" marL="0">
+              <a:buNone/>
+            </a:pPr>
+            <a:r>
+              <a:rPr lang="en-US" sz="1050" b="1" dirty="0">
+                <a:solidFill>
+                  <a:srgbClr val="34D399"/>
+                </a:solidFill>
+                <a:latin typeface="Arial" pitchFamily="34" charset="0"/>
+                <a:ea typeface="Arial" pitchFamily="34" charset="-122"/>
+                <a:cs typeface="Arial" pitchFamily="34" charset="-120"/>
+              </a:rPr>
+              <a:t>DYNAMIC GROUP COMMIT TIMELINE: COALESCING N PRODUCERS INTO ONE PHYSICAL NVMe FSYNC</a:t>
+            </a:r>
+            <a:endParaRPr lang="en-US" sz="1050" dirty="0"/>
+          </a:p>
+        </p:txBody>
+      </p:sp>
+      <p:pic>
+        <p:nvPicPr>
+          <p:cNvPr id="8" name="Image 0" descr="d:\persistant_message_broker\docs\slide5_group_commit.svg">    </p:cNvPr>
+          <p:cNvPicPr>
+            <a:picLocks noChangeAspect="1"/>
+          </p:cNvPicPr>
+          <p:nvPr/>
+        </p:nvPicPr>
+        <p:blipFill>
+          <a:blip r:embed="rId1">
+            <a:extLst>
+              <a:ext uri="{96DAC541-7B7A-43D3-8B79-37D633B846F1}">
+                <asvg:svgBlip xmlns:asvg="http://schemas.microsoft.com/office/drawing/2016/SVG/main" r:embed="rId2"/>
+              </a:ext>
+            </a:extLst>
+          </a:blip>
+          <a:stretch>
+            <a:fillRect/>
+          </a:stretch>
+        </p:blipFill>
+        <p:spPr>
+          <a:xfrm>
+            <a:off x="1060704" y="1664208"/>
+            <a:ext cx="10058400" cy="2542032"/>
+          </a:xfrm>
+          <a:prstGeom prst="rect">
+            <a:avLst/>
+          </a:prstGeom>
+        </p:spPr>
+      </p:pic>
+      <p:sp>
+        <p:nvSpPr>
+          <p:cNvPr id="9" name="Shape 6"/>
+          <p:cNvSpPr/>
+          <p:nvPr/>
+        </p:nvSpPr>
+        <p:spPr>
+          <a:xfrm>
+            <a:off x="731520" y="4462272"/>
+            <a:ext cx="5221224" cy="1920240"/>
+          </a:xfrm>
+          <a:prstGeom prst="roundRect">
+            <a:avLst>
+              <a:gd name="adj" fmla="val 3810"/>
+            </a:avLst>
+          </a:prstGeom>
+          <a:solidFill>
+            <a:srgbClr val="131B2B"/>
+          </a:solidFill>
+          <a:ln w="12700">
+            <a:solidFill>
+              <a:srgbClr val="23324A"/>
+            </a:solidFill>
+            <a:prstDash val="solid"/>
+          </a:ln>
+        </p:spPr>
+      </p:sp>
+      <p:sp>
+        <p:nvSpPr>
+          <p:cNvPr id="10" name="Text 7"/>
+          <p:cNvSpPr/>
+          <p:nvPr/>
+        </p:nvSpPr>
+        <p:spPr>
+          <a:xfrm>
+            <a:off x="914400" y="4572000"/>
+            <a:ext cx="4855464" cy="201168"/>
+          </a:xfrm>
+          <a:prstGeom prst="rect">
+            <a:avLst/>
+          </a:prstGeom>
+          <a:noFill/>
+          <a:ln/>
+        </p:spPr>
+        <p:txBody>
+          <a:bodyPr wrap="square" rtlCol="0" anchor="ctr"/>
+          <a:lstStyle/>
+          <a:p>
+            <a:pPr indent="0" marL="0">
+              <a:buNone/>
+            </a:pPr>
+            <a:r>
+              <a:rPr lang="en-US" sz="1000" b="1" dirty="0">
+                <a:solidFill>
+                  <a:srgbClr val="38BDF8"/>
+                </a:solidFill>
+                <a:latin typeface="Arial" pitchFamily="34" charset="0"/>
+                <a:ea typeface="Arial" pitchFamily="34" charset="-122"/>
+                <a:cs typeface="Arial" pitchFamily="34" charset="-120"/>
+              </a:rPr>
+              <a:t>NAÏVE DISK SYNC VS. PMB GROUP COMMIT</a:t>
+            </a:r>
+            <a:endParaRPr lang="en-US" sz="1000" dirty="0"/>
+          </a:p>
+        </p:txBody>
+      </p:sp>
+      <p:sp>
+        <p:nvSpPr>
+          <p:cNvPr id="11" name="Text 8"/>
+          <p:cNvSpPr/>
+          <p:nvPr/>
+        </p:nvSpPr>
+        <p:spPr>
+          <a:xfrm>
+            <a:off x="914400" y="4809744"/>
+            <a:ext cx="4855464" cy="1508760"/>
+          </a:xfrm>
+          <a:prstGeom prst="rect">
+            <a:avLst/>
+          </a:prstGeom>
+          <a:noFill/>
+          <a:ln/>
+        </p:spPr>
+        <p:txBody>
+          <a:bodyPr wrap="square" rtlCol="0" anchor="ctr"/>
+          <a:lstStyle/>
+          <a:p>
+            <a:pPr indent="0" marL="0">
+              <a:buNone/>
+            </a:pPr>
+            <a:r>
+              <a:rPr lang="en-US" sz="850" dirty="0">
+                <a:solidFill>
+                  <a:srgbClr val="94A3B8"/>
+                </a:solidFill>
+                <a:latin typeface="Arial" pitchFamily="34" charset="0"/>
+                <a:ea typeface="Arial" pitchFamily="34" charset="-122"/>
+                <a:cs typeface="Arial" pitchFamily="34" charset="-120"/>
+              </a:rPr>
+              <a:t>1. The Synchronous I/O Barrier: Physical SSD/NVMe controllers require 0.5 to 2.0 ms to flush flash cache blocks. A naive 1-write-to-1-fsync model caps throughput at ~500-1000 msgs/sec.</a:t>
+            </a:r>
+            <a:endParaRPr lang="en-US" sz="850" dirty="0"/>
+          </a:p>
+          <a:p>
+            <a:pPr indent="0" marL="0">
+              <a:buNone/>
+            </a:pPr>
+            <a:endParaRPr lang="en-US" sz="850" dirty="0"/>
+          </a:p>
+          <a:p>
+            <a:pPr indent="0" marL="0">
+              <a:buNone/>
+            </a:pPr>
+            <a:r>
+              <a:rPr lang="en-US" sz="850" dirty="0">
+                <a:solidFill>
+                  <a:srgbClr val="94A3B8"/>
+                </a:solidFill>
+                <a:latin typeface="Arial" pitchFamily="34" charset="0"/>
+                <a:ea typeface="Arial" pitchFamily="34" charset="-122"/>
+                <a:cs typeface="Arial" pitchFamily="34" charset="-120"/>
+              </a:rPr>
+              <a:t>2. Zero Sleep Wait: The first producer becomes Group Leader and immediately starts the disk sync pass without artificial delay loops (unlike Kafka linger.ms).</a:t>
+            </a:r>
+            <a:endParaRPr lang="en-US" sz="850" dirty="0"/>
+          </a:p>
+          <a:p>
+            <a:pPr indent="0" marL="0">
+              <a:buNone/>
+            </a:pPr>
+            <a:endParaRPr lang="en-US" sz="850" dirty="0"/>
+          </a:p>
+          <a:p>
+            <a:pPr indent="0" marL="0">
+              <a:buNone/>
+            </a:pPr>
+            <a:r>
+              <a:rPr lang="en-US" sz="850" dirty="0">
+                <a:solidFill>
+                  <a:srgbClr val="94A3B8"/>
+                </a:solidFill>
+                <a:latin typeface="Arial" pitchFamily="34" charset="0"/>
+                <a:ea typeface="Arial" pitchFamily="34" charset="-122"/>
+                <a:cs typeface="Arial" pitchFamily="34" charset="-120"/>
+              </a:rPr>
+              <a:t>3. Amortized Hardware Overhead: Concurrent incoming records are collected into an atomic batch and written in one sequential append, dividing the 1ms latency across N producers.</a:t>
+            </a:r>
+            <a:endParaRPr lang="en-US" sz="850" dirty="0"/>
+          </a:p>
+        </p:txBody>
+      </p:sp>
+      <p:sp>
+        <p:nvSpPr>
+          <p:cNvPr id="12" name="Shape 9"/>
+          <p:cNvSpPr/>
+          <p:nvPr/>
+        </p:nvSpPr>
+        <p:spPr>
+          <a:xfrm>
+            <a:off x="6236208" y="4462272"/>
+            <a:ext cx="5221224" cy="1920240"/>
+          </a:xfrm>
+          <a:prstGeom prst="roundRect">
+            <a:avLst>
+              <a:gd name="adj" fmla="val 3810"/>
+            </a:avLst>
+          </a:prstGeom>
+          <a:solidFill>
+            <a:srgbClr val="131B2B"/>
+          </a:solidFill>
+          <a:ln w="12700">
+            <a:solidFill>
+              <a:srgbClr val="34D399"/>
+            </a:solidFill>
+            <a:prstDash val="solid"/>
+          </a:ln>
+        </p:spPr>
+      </p:sp>
+      <p:sp>
+        <p:nvSpPr>
+          <p:cNvPr id="13" name="Text 10"/>
+          <p:cNvSpPr/>
+          <p:nvPr/>
+        </p:nvSpPr>
+        <p:spPr>
+          <a:xfrm>
+            <a:off x="6419088" y="4572000"/>
+            <a:ext cx="4855464" cy="201168"/>
+          </a:xfrm>
+          <a:prstGeom prst="rect">
+            <a:avLst/>
+          </a:prstGeom>
+          <a:noFill/>
+          <a:ln/>
+        </p:spPr>
+        <p:txBody>
+          <a:bodyPr wrap="square" rtlCol="0" anchor="ctr"/>
+          <a:lstStyle/>
+          <a:p>
+            <a:pPr indent="0" marL="0">
+              <a:buNone/>
+            </a:pPr>
+            <a:r>
+              <a:rPr lang="en-US" sz="1000" b="1" dirty="0">
+                <a:solidFill>
+                  <a:srgbClr val="34D399"/>
+                </a:solidFill>
+                <a:latin typeface="Arial" pitchFamily="34" charset="0"/>
+                <a:ea typeface="Arial" pitchFamily="34" charset="-122"/>
+                <a:cs typeface="Arial" pitchFamily="34" charset="-120"/>
+              </a:rPr>
+              <a:t>HARD CRASH INTEGRITY &amp; ZERO-LOSS RECOVERY</a:t>
+            </a:r>
+            <a:endParaRPr lang="en-US" sz="1000" dirty="0"/>
+          </a:p>
+        </p:txBody>
+      </p:sp>
+      <p:sp>
+        <p:nvSpPr>
+          <p:cNvPr id="14" name="Text 11"/>
+          <p:cNvSpPr/>
+          <p:nvPr/>
+        </p:nvSpPr>
+        <p:spPr>
+          <a:xfrm>
+            <a:off x="6419088" y="4809744"/>
+            <a:ext cx="4855464" cy="1508760"/>
+          </a:xfrm>
+          <a:prstGeom prst="rect">
+            <a:avLst/>
+          </a:prstGeom>
+          <a:noFill/>
+          <a:ln/>
+        </p:spPr>
+        <p:txBody>
+          <a:bodyPr wrap="square" rtlCol="0" anchor="ctr"/>
+          <a:lstStyle/>
+          <a:p>
+            <a:pPr indent="0" marL="0">
+              <a:buNone/>
+            </a:pPr>
+            <a:r>
+              <a:rPr lang="en-US" sz="850" dirty="0">
+                <a:solidFill>
+                  <a:srgbClr val="94A3B8"/>
+                </a:solidFill>
+                <a:latin typeface="Arial" pitchFamily="34" charset="0"/>
+                <a:ea typeface="Arial" pitchFamily="34" charset="-122"/>
+                <a:cs typeface="Arial" pitchFamily="34" charset="-120"/>
+              </a:rPr>
+              <a:t>1. Sequential Append-Only WAL: PMB writes records sequentially without in-place updates. Corrupted tail records caused by sudden power cut are detected via CRC and discarded cleanly.</a:t>
+            </a:r>
+            <a:endParaRPr lang="en-US" sz="850" dirty="0"/>
+          </a:p>
+          <a:p>
+            <a:pPr indent="0" marL="0">
+              <a:buNone/>
+            </a:pPr>
+            <a:endParaRPr lang="en-US" sz="850" dirty="0"/>
+          </a:p>
+          <a:p>
+            <a:pPr indent="0" marL="0">
+              <a:buNone/>
+            </a:pPr>
+            <a:r>
+              <a:rPr lang="en-US" sz="850" dirty="0">
+                <a:solidFill>
+                  <a:srgbClr val="94A3B8"/>
+                </a:solidFill>
+                <a:latin typeface="Arial" pitchFamily="34" charset="0"/>
+                <a:ea typeface="Arial" pitchFamily="34" charset="-122"/>
+                <a:cs typeface="Arial" pitchFamily="34" charset="-120"/>
+              </a:rPr>
+              <a:t>2. Direct Kernel Flush: Explicit os.File.Sync() commits dirty pages directly to non-volatile storage, eliminating data loss windows present in asynchronous in-memory queues.</a:t>
+            </a:r>
+            <a:endParaRPr lang="en-US" sz="850" dirty="0"/>
+          </a:p>
+          <a:p>
+            <a:pPr indent="0" marL="0">
+              <a:buNone/>
+            </a:pPr>
+            <a:endParaRPr lang="en-US" sz="850" dirty="0"/>
+          </a:p>
+          <a:p>
+            <a:pPr indent="0" marL="0">
+              <a:buNone/>
+            </a:pPr>
+            <a:r>
+              <a:rPr lang="en-US" sz="850" dirty="0">
+                <a:solidFill>
+                  <a:srgbClr val="94A3B8"/>
+                </a:solidFill>
+                <a:latin typeface="Arial" pitchFamily="34" charset="0"/>
+                <a:ea typeface="Arial" pitchFamily="34" charset="-122"/>
+                <a:cs typeface="Arial" pitchFamily="34" charset="-120"/>
+              </a:rPr>
+              <a:t>3. Instant Replay on Boot: On crash recovery, the storage engine reads the WAL, reconstituting active pending message state in &lt; 10 milliseconds.</a:t>
+            </a:r>
+            <a:endParaRPr lang="en-US" sz="850" dirty="0"/>
+          </a:p>
+        </p:txBody>
+      </p:sp>
+    </p:spTree>
+  </p:cSld>
+  <p:clrMapOvr>
+    <a:masterClrMapping/>
+  </p:clrMapOvr>
+</p:sld>
+</file>
+
+<file path=ppt/slides/slide6.xml><?xml version="1.0" encoding="utf-8"?>
+<p:sld xmlns:a="http://schemas.openxmlformats.org/drawingml/2006/main" xmlns:r="http://schemas.openxmlformats.org/officeDocument/2006/relationships" xmlns:p="http://schemas.openxmlformats.org/presentationml/2006/main">
+  <p:cSld name="Slide 6">
+    <p:bg>
+      <p:bgPr>
+        <a:solidFill>
+          <a:srgbClr val="0B0F19"/>
+        </a:solidFill>
+      </p:bgPr>
+    </p:bg>
+    <p:spTree>
+      <p:nvGrpSpPr>
+        <p:cNvPr id="1" name=""/>
+        <p:cNvGrpSpPr/>
+        <p:nvPr/>
+      </p:nvGrpSpPr>
+      <p:grpSpPr>
+        <a:xfrm>
+          <a:off x="0" y="0"/>
+          <a:ext cx="0" cy="0"/>
+          <a:chOff x="0" y="0"/>
+          <a:chExt cx="0" cy="0"/>
+        </a:xfrm>
+      </p:grpSpPr>
+      <p:sp>
+        <p:nvSpPr>
+          <p:cNvPr id="2" name="Shape 0"/>
+          <p:cNvSpPr/>
+          <p:nvPr/>
+        </p:nvSpPr>
+        <p:spPr>
+          <a:xfrm>
+            <a:off x="731520" y="347472"/>
+            <a:ext cx="3474720" cy="256032"/>
+          </a:xfrm>
+          <a:prstGeom prst="roundRect">
+            <a:avLst>
+              <a:gd name="adj" fmla="val 21429"/>
+            </a:avLst>
+          </a:prstGeom>
+          <a:solidFill>
+            <a:srgbClr val="1E293B"/>
+          </a:solidFill>
+          <a:ln w="12700">
+            <a:solidFill>
+              <a:srgbClr val="38BDF8"/>
+            </a:solidFill>
+            <a:prstDash val="solid"/>
+          </a:ln>
+        </p:spPr>
+      </p:sp>
+      <p:sp>
+        <p:nvSpPr>
+          <p:cNvPr id="3" name="Text 1"/>
+          <p:cNvSpPr/>
+          <p:nvPr/>
+        </p:nvSpPr>
+        <p:spPr>
+          <a:xfrm>
+            <a:off x="731520" y="347472"/>
+            <a:ext cx="3474720" cy="256032"/>
+          </a:xfrm>
+          <a:prstGeom prst="rect">
+            <a:avLst/>
+          </a:prstGeom>
+          <a:noFill/>
+          <a:ln/>
+        </p:spPr>
+        <p:txBody>
+          <a:bodyPr wrap="square" rtlCol="0" anchor="ctr"/>
+          <a:lstStyle/>
+          <a:p>
+            <a:pPr algn="ctr" indent="0" marL="0">
+              <a:buNone/>
+            </a:pPr>
+            <a:r>
+              <a:rPr lang="en-US" sz="900" b="1" dirty="0">
+                <a:solidFill>
+                  <a:srgbClr val="38BDF8"/>
+                </a:solidFill>
+                <a:latin typeface="Arial" pitchFamily="34" charset="0"/>
+                <a:ea typeface="Arial" pitchFamily="34" charset="-122"/>
+                <a:cs typeface="Arial" pitchFamily="34" charset="-120"/>
+              </a:rPr>
+              <a:t>DELIVERY GUARANTEES &amp; TRACKING</a:t>
+            </a:r>
+            <a:endParaRPr lang="en-US" sz="900" dirty="0"/>
+          </a:p>
+        </p:txBody>
+      </p:sp>
+      <p:sp>
+        <p:nvSpPr>
+          <p:cNvPr id="4" name="Text 2"/>
+          <p:cNvSpPr/>
+          <p:nvPr/>
+        </p:nvSpPr>
+        <p:spPr>
+          <a:xfrm>
+            <a:off x="731520" y="640080"/>
+            <a:ext cx="10725912" cy="420624"/>
+          </a:xfrm>
+          <a:prstGeom prst="rect">
+            <a:avLst/>
+          </a:prstGeom>
+          <a:noFill/>
+          <a:ln/>
+        </p:spPr>
+        <p:txBody>
+          <a:bodyPr wrap="square" rtlCol="0" anchor="ctr"/>
+          <a:lstStyle/>
+          <a:p>
+            <a:pPr indent="0" marL="0">
+              <a:buNone/>
+            </a:pPr>
+            <a:r>
+              <a:rPr lang="en-US" sz="2000" b="1" dirty="0">
+                <a:solidFill>
+                  <a:srgbClr val="F8FAFC"/>
+                </a:solidFill>
+                <a:latin typeface="Arial" pitchFamily="34" charset="0"/>
+                <a:ea typeface="Arial" pitchFamily="34" charset="-122"/>
+                <a:cs typeface="Arial" pitchFamily="34" charset="-120"/>
+              </a:rPr>
+              <a:t>Safe Egress: Thread-Safe Topic Routing &amp; Automatic Retransmission</a:t>
+            </a:r>
+            <a:endParaRPr lang="en-US" sz="2000" dirty="0"/>
+          </a:p>
+        </p:txBody>
+      </p:sp>
+      <p:sp>
+        <p:nvSpPr>
+          <p:cNvPr id="5" name="Text 3"/>
+          <p:cNvSpPr/>
+          <p:nvPr/>
+        </p:nvSpPr>
+        <p:spPr>
+          <a:xfrm>
+            <a:off x="731520" y="1060704"/>
+            <a:ext cx="10725912" cy="228600"/>
+          </a:xfrm>
+          <a:prstGeom prst="rect">
+            <a:avLst/>
+          </a:prstGeom>
+          <a:noFill/>
+          <a:ln/>
+        </p:spPr>
+        <p:txBody>
+          <a:bodyPr wrap="square" rtlCol="0" anchor="ctr"/>
+          <a:lstStyle/>
+          <a:p>
+            <a:pPr indent="0" marL="0">
+              <a:buNone/>
+            </a:pPr>
+            <a:r>
+              <a:rPr lang="en-US" sz="1050" dirty="0">
+                <a:solidFill>
+                  <a:srgbClr val="94A3B8"/>
+                </a:solidFill>
+                <a:latin typeface="Arial" pitchFamily="34" charset="0"/>
+                <a:ea typeface="Arial" pitchFamily="34" charset="-122"/>
+                <a:cs typeface="Arial" pitchFamily="34" charset="-120"/>
+              </a:rPr>
+              <a:t>Delivering at-least-once reliability across transient microVM worker crashes.</a:t>
+            </a:r>
+            <a:endParaRPr lang="en-US" sz="1050" dirty="0"/>
+          </a:p>
+        </p:txBody>
+      </p:sp>
+      <p:sp>
+        <p:nvSpPr>
+          <p:cNvPr id="6" name="Shape 4"/>
+          <p:cNvSpPr/>
+          <p:nvPr/>
+        </p:nvSpPr>
+        <p:spPr>
+          <a:xfrm>
+            <a:off x="731520" y="1325880"/>
+            <a:ext cx="10725912" cy="2971800"/>
+          </a:xfrm>
+          <a:prstGeom prst="roundRect">
+            <a:avLst>
+              <a:gd name="adj" fmla="val 2462"/>
+            </a:avLst>
+          </a:prstGeom>
+          <a:solidFill>
+            <a:srgbClr val="131B2B"/>
+          </a:solidFill>
+          <a:ln w="12700">
+            <a:solidFill>
+              <a:srgbClr val="23324A"/>
+            </a:solidFill>
+            <a:prstDash val="solid"/>
+          </a:ln>
+        </p:spPr>
+      </p:sp>
+      <p:sp>
+        <p:nvSpPr>
+          <p:cNvPr id="7" name="Text 5"/>
+          <p:cNvSpPr/>
+          <p:nvPr/>
+        </p:nvSpPr>
+        <p:spPr>
+          <a:xfrm>
+            <a:off x="914400" y="1417320"/>
+            <a:ext cx="10360152" cy="201168"/>
+          </a:xfrm>
+          <a:prstGeom prst="rect">
+            <a:avLst/>
+          </a:prstGeom>
+          <a:noFill/>
+          <a:ln/>
+        </p:spPr>
+        <p:txBody>
+          <a:bodyPr wrap="square" rtlCol="0" anchor="ctr"/>
+          <a:lstStyle/>
+          <a:p>
+            <a:pPr indent="0" marL="0">
+              <a:buNone/>
+            </a:pPr>
+            <a:r>
+              <a:rPr lang="en-US" sz="1050" b="1" dirty="0">
+                <a:solidFill>
+                  <a:srgbClr val="818CF8"/>
+                </a:solidFill>
+                <a:latin typeface="Arial" pitchFamily="34" charset="0"/>
+                <a:ea typeface="Arial" pitchFamily="34" charset="-122"/>
+                <a:cs typeface="Arial" pitchFamily="34" charset="-120"/>
+              </a:rPr>
+              <a:t>EGRESS DELIVERY &amp; TRACKING ENGINE: DUAL-TRACK (HAPPY PATH VS. CRASH RETRANSMISSION)</a:t>
+            </a:r>
+            <a:endParaRPr lang="en-US" sz="1050" dirty="0"/>
+          </a:p>
+        </p:txBody>
+      </p:sp>
+      <p:pic>
+        <p:nvPicPr>
+          <p:cNvPr id="8" name="Image 0" descr="d:\persistant_message_broker\docs\slide6_router_delivery.svg">    </p:cNvPr>
+          <p:cNvPicPr>
+            <a:picLocks noChangeAspect="1"/>
+          </p:cNvPicPr>
+          <p:nvPr/>
+        </p:nvPicPr>
+        <p:blipFill>
+          <a:blip r:embed="rId1">
+            <a:extLst>
+              <a:ext uri="{96DAC541-7B7A-43D3-8B79-37D633B846F1}">
+                <asvg:svgBlip xmlns:asvg="http://schemas.microsoft.com/office/drawing/2016/SVG/main" r:embed="rId2"/>
+              </a:ext>
+            </a:extLst>
+          </a:blip>
+          <a:stretch>
+            <a:fillRect/>
+          </a:stretch>
+        </p:blipFill>
+        <p:spPr>
+          <a:xfrm>
+            <a:off x="1060704" y="1664208"/>
+            <a:ext cx="10058400" cy="2542032"/>
+          </a:xfrm>
+          <a:prstGeom prst="rect">
+            <a:avLst/>
+          </a:prstGeom>
+        </p:spPr>
+      </p:pic>
+      <p:sp>
+        <p:nvSpPr>
+          <p:cNvPr id="9" name="Shape 6"/>
+          <p:cNvSpPr/>
+          <p:nvPr/>
+        </p:nvSpPr>
+        <p:spPr>
+          <a:xfrm>
+            <a:off x="731520" y="4462272"/>
+            <a:ext cx="5221224" cy="1920240"/>
+          </a:xfrm>
+          <a:prstGeom prst="roundRect">
+            <a:avLst>
+              <a:gd name="adj" fmla="val 3810"/>
+            </a:avLst>
+          </a:prstGeom>
+          <a:solidFill>
+            <a:srgbClr val="131B2B"/>
+          </a:solidFill>
+          <a:ln w="12700">
+            <a:solidFill>
+              <a:srgbClr val="23324A"/>
+            </a:solidFill>
+            <a:prstDash val="solid"/>
+          </a:ln>
+        </p:spPr>
+      </p:sp>
+      <p:sp>
+        <p:nvSpPr>
+          <p:cNvPr id="10" name="Text 7"/>
+          <p:cNvSpPr/>
+          <p:nvPr/>
+        </p:nvSpPr>
+        <p:spPr>
+          <a:xfrm>
+            <a:off x="914400" y="4572000"/>
+            <a:ext cx="4855464" cy="201168"/>
+          </a:xfrm>
+          <a:prstGeom prst="rect">
+            <a:avLst/>
+          </a:prstGeom>
+          <a:noFill/>
+          <a:ln/>
+        </p:spPr>
+        <p:txBody>
+          <a:bodyPr wrap="square" rtlCol="0" anchor="ctr"/>
+          <a:lstStyle/>
+          <a:p>
+            <a:pPr indent="0" marL="0">
+              <a:buNone/>
+            </a:pPr>
+            <a:r>
+              <a:rPr lang="en-US" sz="1000" b="1" dirty="0">
+                <a:solidFill>
+                  <a:srgbClr val="38BDF8"/>
+                </a:solidFill>
+                <a:latin typeface="Arial" pitchFamily="34" charset="0"/>
+                <a:ea typeface="Arial" pitchFamily="34" charset="-122"/>
+                <a:cs typeface="Arial" pitchFamily="34" charset="-120"/>
+              </a:rPr>
+              <a:t>THREAD-SAFE ROUTING &amp; FAN-OUT ARCHITECTURE</a:t>
+            </a:r>
+            <a:endParaRPr lang="en-US" sz="1000" dirty="0"/>
+          </a:p>
+        </p:txBody>
+      </p:sp>
+      <p:sp>
+        <p:nvSpPr>
+          <p:cNvPr id="11" name="Text 8"/>
+          <p:cNvSpPr/>
+          <p:nvPr/>
+        </p:nvSpPr>
+        <p:spPr>
+          <a:xfrm>
+            <a:off x="914400" y="4809744"/>
+            <a:ext cx="4855464" cy="1508760"/>
+          </a:xfrm>
+          <a:prstGeom prst="rect">
+            <a:avLst/>
+          </a:prstGeom>
+          <a:noFill/>
+          <a:ln/>
+        </p:spPr>
+        <p:txBody>
+          <a:bodyPr wrap="square" rtlCol="0" anchor="ctr"/>
+          <a:lstStyle/>
+          <a:p>
+            <a:pPr indent="0" marL="0">
+              <a:buNone/>
+            </a:pPr>
+            <a:r>
+              <a:rPr lang="en-US" sz="850" dirty="0">
+                <a:solidFill>
+                  <a:srgbClr val="94A3B8"/>
+                </a:solidFill>
+                <a:latin typeface="Arial" pitchFamily="34" charset="0"/>
+                <a:ea typeface="Arial" pitchFamily="34" charset="-122"/>
+                <a:cs typeface="Arial" pitchFamily="34" charset="-120"/>
+              </a:rPr>
+              <a:t>1. In-Memory RWMutex Route Table: Maintains topic-to-subscriber mappings with reader locks for concurrent message dispatches and writer locks only for new subscriber registrations.</a:t>
+            </a:r>
+            <a:endParaRPr lang="en-US" sz="850" dirty="0"/>
+          </a:p>
+          <a:p>
+            <a:pPr indent="0" marL="0">
+              <a:buNone/>
+            </a:pPr>
+            <a:endParaRPr lang="en-US" sz="850" dirty="0"/>
+          </a:p>
+          <a:p>
+            <a:pPr indent="0" marL="0">
+              <a:buNone/>
+            </a:pPr>
+            <a:r>
+              <a:rPr lang="en-US" sz="850" dirty="0">
+                <a:solidFill>
+                  <a:srgbClr val="94A3B8"/>
+                </a:solidFill>
+                <a:latin typeface="Arial" pitchFamily="34" charset="0"/>
+                <a:ea typeface="Arial" pitchFamily="34" charset="-122"/>
+                <a:cs typeface="Arial" pitchFamily="34" charset="-120"/>
+              </a:rPr>
+              <a:t>2. Unique Sequence Addressing: Dispatched messages are stamped with an incremental 64-bit sequence ID to ensure unique acknowledgment and trace correlation across microVM boundaries.</a:t>
+            </a:r>
+            <a:endParaRPr lang="en-US" sz="850" dirty="0"/>
+          </a:p>
+          <a:p>
+            <a:pPr indent="0" marL="0">
+              <a:buNone/>
+            </a:pPr>
+            <a:endParaRPr lang="en-US" sz="850" dirty="0"/>
+          </a:p>
+          <a:p>
+            <a:pPr indent="0" marL="0">
+              <a:buNone/>
+            </a:pPr>
+            <a:r>
+              <a:rPr lang="en-US" sz="850" dirty="0">
+                <a:solidFill>
+                  <a:srgbClr val="94A3B8"/>
+                </a:solidFill>
+                <a:latin typeface="Arial" pitchFamily="34" charset="0"/>
+                <a:ea typeface="Arial" pitchFamily="34" charset="-122"/>
+                <a:cs typeface="Arial" pitchFamily="34" charset="-120"/>
+              </a:rPr>
+              <a:t>3. Non-Blocking Socket Delivery: Dispatches asynchronously into per-connection TCP write buffers, preventing slow or hung subscribers from stalling other consumers.</a:t>
+            </a:r>
+            <a:endParaRPr lang="en-US" sz="850" dirty="0"/>
+          </a:p>
+        </p:txBody>
+      </p:sp>
+      <p:sp>
+        <p:nvSpPr>
+          <p:cNvPr id="12" name="Shape 9"/>
+          <p:cNvSpPr/>
+          <p:nvPr/>
+        </p:nvSpPr>
+        <p:spPr>
+          <a:xfrm>
+            <a:off x="6236208" y="4462272"/>
+            <a:ext cx="5221224" cy="1920240"/>
+          </a:xfrm>
+          <a:prstGeom prst="roundRect">
+            <a:avLst>
+              <a:gd name="adj" fmla="val 3810"/>
+            </a:avLst>
+          </a:prstGeom>
+          <a:solidFill>
+            <a:srgbClr val="131B2B"/>
+          </a:solidFill>
+          <a:ln w="12700">
+            <a:solidFill>
+              <a:srgbClr val="818CF8"/>
+            </a:solidFill>
+            <a:prstDash val="solid"/>
+          </a:ln>
+        </p:spPr>
+      </p:sp>
+      <p:sp>
+        <p:nvSpPr>
+          <p:cNvPr id="13" name="Text 10"/>
+          <p:cNvSpPr/>
+          <p:nvPr/>
+        </p:nvSpPr>
+        <p:spPr>
+          <a:xfrm>
+            <a:off x="6419088" y="4572000"/>
+            <a:ext cx="4855464" cy="201168"/>
+          </a:xfrm>
+          <a:prstGeom prst="rect">
+            <a:avLst/>
+          </a:prstGeom>
+          <a:noFill/>
+          <a:ln/>
+        </p:spPr>
+        <p:txBody>
+          <a:bodyPr wrap="square" rtlCol="0" anchor="ctr"/>
+          <a:lstStyle/>
+          <a:p>
+            <a:pPr indent="0" marL="0">
+              <a:buNone/>
+            </a:pPr>
+            <a:r>
+              <a:rPr lang="en-US" sz="1000" b="1" dirty="0">
+                <a:solidFill>
+                  <a:srgbClr val="818CF8"/>
+                </a:solidFill>
+                <a:latin typeface="Arial" pitchFamily="34" charset="0"/>
+                <a:ea typeface="Arial" pitchFamily="34" charset="-122"/>
+                <a:cs typeface="Arial" pitchFamily="34" charset="-120"/>
+              </a:rPr>
+              <a:t>PENDINGACKS STATE MACHINE &amp; AT-LEAST-ONCE SLA</a:t>
+            </a:r>
+            <a:endParaRPr lang="en-US" sz="1000" dirty="0"/>
+          </a:p>
+        </p:txBody>
+      </p:sp>
+      <p:sp>
+        <p:nvSpPr>
+          <p:cNvPr id="14" name="Text 11"/>
+          <p:cNvSpPr/>
+          <p:nvPr/>
+        </p:nvSpPr>
+        <p:spPr>
+          <a:xfrm>
+            <a:off x="6419088" y="4809744"/>
+            <a:ext cx="4855464" cy="1508760"/>
+          </a:xfrm>
+          <a:prstGeom prst="rect">
+            <a:avLst/>
+          </a:prstGeom>
+          <a:noFill/>
+          <a:ln/>
+        </p:spPr>
+        <p:txBody>
+          <a:bodyPr wrap="square" rtlCol="0" anchor="ctr"/>
+          <a:lstStyle/>
+          <a:p>
+            <a:pPr indent="0" marL="0">
+              <a:buNone/>
+            </a:pPr>
+            <a:r>
+              <a:rPr lang="en-US" sz="850" dirty="0">
+                <a:solidFill>
+                  <a:srgbClr val="94A3B8"/>
+                </a:solidFill>
+                <a:latin typeface="Arial" pitchFamily="34" charset="0"/>
+                <a:ea typeface="Arial" pitchFamily="34" charset="-122"/>
+                <a:cs typeface="Arial" pitchFamily="34" charset="-120"/>
+              </a:rPr>
+              <a:t>1. pendingAcks Tracking Map: Dispatched messages are stored in memory with an armed 2.0-second timer. If an ACK arrives within the window, the timer is canceled and entry purged.</a:t>
+            </a:r>
+            <a:endParaRPr lang="en-US" sz="850" dirty="0"/>
+          </a:p>
+          <a:p>
+            <a:pPr indent="0" marL="0">
+              <a:buNone/>
+            </a:pPr>
+            <a:endParaRPr lang="en-US" sz="850" dirty="0"/>
+          </a:p>
+          <a:p>
+            <a:pPr indent="0" marL="0">
+              <a:buNone/>
+            </a:pPr>
+            <a:r>
+              <a:rPr lang="en-US" sz="850" dirty="0">
+                <a:solidFill>
+                  <a:srgbClr val="94A3B8"/>
+                </a:solidFill>
+                <a:latin typeface="Arial" pitchFamily="34" charset="0"/>
+                <a:ea typeface="Arial" pitchFamily="34" charset="-122"/>
+                <a:cs typeface="Arial" pitchFamily="34" charset="-120"/>
+              </a:rPr>
+              <a:t>2. Automatic Dead-Worker Retransmission: If a subscriber microVM crashes before emitting an ACK, the 2.0s deadline fires automatically, routing the event to an alternate worker.</a:t>
+            </a:r>
+            <a:endParaRPr lang="en-US" sz="850" dirty="0"/>
+          </a:p>
+          <a:p>
+            <a:pPr indent="0" marL="0">
+              <a:buNone/>
+            </a:pPr>
+            <a:endParaRPr lang="en-US" sz="850" dirty="0"/>
+          </a:p>
+          <a:p>
+            <a:pPr indent="0" marL="0">
+              <a:buNone/>
+            </a:pPr>
+            <a:r>
+              <a:rPr lang="en-US" sz="850" dirty="0">
+                <a:solidFill>
+                  <a:srgbClr val="94A3B8"/>
+                </a:solidFill>
+                <a:latin typeface="Arial" pitchFamily="34" charset="0"/>
+                <a:ea typeface="Arial" pitchFamily="34" charset="-122"/>
+                <a:cs typeface="Arial" pitchFamily="34" charset="-120"/>
+              </a:rPr>
+              <a:t>3. Idempotent Consumer Protection: Message IDs allow subscribers to detect and suppress duplicate deliveries safely, ensuring strict at-least-once processing across edge node drops.</a:t>
+            </a:r>
+            <a:endParaRPr lang="en-US" sz="850" dirty="0"/>
+          </a:p>
+        </p:txBody>
+      </p:sp>
+    </p:spTree>
+  </p:cSld>
+  <p:clrMapOvr>
+    <a:masterClrMapping/>
+  </p:clrMapOvr>
+</p:sld>
+</file>
+
+<file path=ppt/slides/slide7.xml><?xml version="1.0" encoding="utf-8"?>
+<p:sld xmlns:a="http://schemas.openxmlformats.org/drawingml/2006/main" xmlns:r="http://schemas.openxmlformats.org/officeDocument/2006/relationships" xmlns:p="http://schemas.openxmlformats.org/presentationml/2006/main">
+  <p:cSld name="Slide 7">
+    <p:bg>
+      <p:bgPr>
+        <a:solidFill>
+          <a:srgbClr val="0B0F19"/>
+        </a:solidFill>
+      </p:bgPr>
+    </p:bg>
+    <p:spTree>
+      <p:nvGrpSpPr>
+        <p:cNvPr id="1" name=""/>
+        <p:cNvGrpSpPr/>
+        <p:nvPr/>
+      </p:nvGrpSpPr>
+      <p:grpSpPr>
+        <a:xfrm>
+          <a:off x="0" y="0"/>
+          <a:ext cx="0" cy="0"/>
+          <a:chOff x="0" y="0"/>
+          <a:chExt cx="0" cy="0"/>
+        </a:xfrm>
+      </p:grpSpPr>
+      <p:sp>
+        <p:nvSpPr>
+          <p:cNvPr id="2" name="Shape 0"/>
+          <p:cNvSpPr/>
+          <p:nvPr/>
+        </p:nvSpPr>
+        <p:spPr>
+          <a:xfrm>
+            <a:off x="731520" y="347472"/>
+            <a:ext cx="3474720" cy="256032"/>
+          </a:xfrm>
+          <a:prstGeom prst="roundRect">
+            <a:avLst>
+              <a:gd name="adj" fmla="val 21429"/>
+            </a:avLst>
+          </a:prstGeom>
+          <a:solidFill>
+            <a:srgbClr val="1E293B"/>
+          </a:solidFill>
+          <a:ln w="12700">
+            <a:solidFill>
+              <a:srgbClr val="38BDF8"/>
+            </a:solidFill>
+            <a:prstDash val="solid"/>
+          </a:ln>
+        </p:spPr>
+      </p:sp>
+      <p:sp>
+        <p:nvSpPr>
+          <p:cNvPr id="3" name="Text 1"/>
+          <p:cNvSpPr/>
+          <p:nvPr/>
+        </p:nvSpPr>
+        <p:spPr>
+          <a:xfrm>
+            <a:off x="731520" y="347472"/>
+            <a:ext cx="3474720" cy="256032"/>
+          </a:xfrm>
+          <a:prstGeom prst="rect">
+            <a:avLst/>
+          </a:prstGeom>
+          <a:noFill/>
+          <a:ln/>
+        </p:spPr>
+        <p:txBody>
+          <a:bodyPr wrap="square" rtlCol="0" anchor="ctr"/>
+          <a:lstStyle/>
+          <a:p>
+            <a:pPr algn="ctr" indent="0" marL="0">
+              <a:buNone/>
+            </a:pPr>
+            <a:r>
+              <a:rPr lang="en-US" sz="900" b="1" dirty="0">
+                <a:solidFill>
+                  <a:srgbClr val="38BDF8"/>
+                </a:solidFill>
+                <a:latin typeface="Arial" pitchFamily="34" charset="0"/>
+                <a:ea typeface="Arial" pitchFamily="34" charset="-122"/>
+                <a:cs typeface="Arial" pitchFamily="34" charset="-120"/>
+              </a:rPr>
+              <a:t>STORAGE EFFICIENCY &amp; EDGE HYGIENE</a:t>
+            </a:r>
+            <a:endParaRPr lang="en-US" sz="900" dirty="0"/>
+          </a:p>
+        </p:txBody>
+      </p:sp>
+      <p:sp>
+        <p:nvSpPr>
+          <p:cNvPr id="4" name="Text 2"/>
+          <p:cNvSpPr/>
+          <p:nvPr/>
+        </p:nvSpPr>
+        <p:spPr>
+          <a:xfrm>
+            <a:off x="731520" y="640080"/>
+            <a:ext cx="10725912" cy="420624"/>
+          </a:xfrm>
+          <a:prstGeom prst="rect">
+            <a:avLst/>
+          </a:prstGeom>
+          <a:noFill/>
+          <a:ln/>
+        </p:spPr>
+        <p:txBody>
+          <a:bodyPr wrap="square" rtlCol="0" anchor="ctr"/>
+          <a:lstStyle/>
+          <a:p>
+            <a:pPr indent="0" marL="0">
+              <a:buNone/>
+            </a:pPr>
+            <a:r>
+              <a:rPr lang="en-US" sz="2000" b="1" dirty="0">
+                <a:solidFill>
+                  <a:srgbClr val="F8FAFC"/>
+                </a:solidFill>
+                <a:latin typeface="Arial" pitchFamily="34" charset="0"/>
+                <a:ea typeface="Arial" pitchFamily="34" charset="-122"/>
+                <a:cs typeface="Arial" pitchFamily="34" charset="-120"/>
+              </a:rPr>
+              <a:t>Zero-Leak Storage: Active Compaction vs. Static Log Bloat</a:t>
+            </a:r>
+            <a:endParaRPr lang="en-US" sz="2000" dirty="0"/>
+          </a:p>
+        </p:txBody>
+      </p:sp>
+      <p:sp>
+        <p:nvSpPr>
+          <p:cNvPr id="5" name="Text 3"/>
+          <p:cNvSpPr/>
+          <p:nvPr/>
+        </p:nvSpPr>
+        <p:spPr>
+          <a:xfrm>
+            <a:off x="731520" y="1060704"/>
+            <a:ext cx="10725912" cy="228600"/>
+          </a:xfrm>
+          <a:prstGeom prst="rect">
+            <a:avLst/>
+          </a:prstGeom>
+          <a:noFill/>
+          <a:ln/>
+        </p:spPr>
+        <p:txBody>
+          <a:bodyPr wrap="square" rtlCol="0" anchor="ctr"/>
+          <a:lstStyle/>
+          <a:p>
+            <a:pPr indent="0" marL="0">
+              <a:buNone/>
+            </a:pPr>
+            <a:r>
+              <a:rPr lang="en-US" sz="1050" dirty="0">
+                <a:solidFill>
+                  <a:srgbClr val="94A3B8"/>
+                </a:solidFill>
+                <a:latin typeface="Arial" pitchFamily="34" charset="0"/>
+                <a:ea typeface="Arial" pitchFamily="34" charset="-122"/>
+                <a:cs typeface="Arial" pitchFamily="34" charset="-120"/>
+              </a:rPr>
+              <a:t>How PMB eliminates root filesystem exhaustion in resource-constrained edge appliances.</a:t>
+            </a:r>
+            <a:endParaRPr lang="en-US" sz="1050" dirty="0"/>
+          </a:p>
+        </p:txBody>
+      </p:sp>
+      <p:sp>
+        <p:nvSpPr>
+          <p:cNvPr id="6" name="Shape 4"/>
+          <p:cNvSpPr/>
+          <p:nvPr/>
+        </p:nvSpPr>
+        <p:spPr>
+          <a:xfrm>
+            <a:off x="731520" y="1325880"/>
+            <a:ext cx="10725912" cy="2971800"/>
+          </a:xfrm>
+          <a:prstGeom prst="roundRect">
+            <a:avLst>
+              <a:gd name="adj" fmla="val 2462"/>
+            </a:avLst>
+          </a:prstGeom>
+          <a:solidFill>
+            <a:srgbClr val="131B2B"/>
+          </a:solidFill>
+          <a:ln w="12700">
+            <a:solidFill>
+              <a:srgbClr val="23324A"/>
+            </a:solidFill>
+            <a:prstDash val="solid"/>
+          </a:ln>
+        </p:spPr>
+      </p:sp>
+      <p:sp>
+        <p:nvSpPr>
+          <p:cNvPr id="7" name="Text 5"/>
+          <p:cNvSpPr/>
+          <p:nvPr/>
+        </p:nvSpPr>
+        <p:spPr>
+          <a:xfrm>
+            <a:off x="914400" y="1417320"/>
+            <a:ext cx="10360152" cy="201168"/>
+          </a:xfrm>
+          <a:prstGeom prst="rect">
+            <a:avLst/>
+          </a:prstGeom>
+          <a:noFill/>
+          <a:ln/>
+        </p:spPr>
+        <p:txBody>
+          <a:bodyPr wrap="square" rtlCol="0" anchor="ctr"/>
+          <a:lstStyle/>
+          <a:p>
+            <a:pPr indent="0" marL="0">
+              <a:buNone/>
+            </a:pPr>
+            <a:r>
+              <a:rPr lang="en-US" sz="1050" b="1" dirty="0">
+                <a:solidFill>
+                  <a:srgbClr val="38BDF8"/>
+                </a:solidFill>
+                <a:latin typeface="Arial" pitchFamily="34" charset="0"/>
+                <a:ea typeface="Arial" pitchFamily="34" charset="-122"/>
+                <a:cs typeface="Arial" pitchFamily="34" charset="-120"/>
+              </a:rPr>
+              <a:t>STORAGE FOOTPRINT COMPARISON: STATIC 7-DAY ACCUMULATION VS. PMB SUB-MILLISECOND TRUNCATION</a:t>
+            </a:r>
+            <a:endParaRPr lang="en-US" sz="1050" dirty="0"/>
+          </a:p>
+        </p:txBody>
+      </p:sp>
+      <p:pic>
+        <p:nvPicPr>
+          <p:cNvPr id="8" name="Image 0" descr="d:\persistant_message_broker\docs\slide7_compaction.svg">    </p:cNvPr>
+          <p:cNvPicPr>
+            <a:picLocks noChangeAspect="1"/>
+          </p:cNvPicPr>
+          <p:nvPr/>
+        </p:nvPicPr>
+        <p:blipFill>
+          <a:blip r:embed="rId1">
+            <a:extLst>
+              <a:ext uri="{96DAC541-7B7A-43D3-8B79-37D633B846F1}">
+                <asvg:svgBlip xmlns:asvg="http://schemas.microsoft.com/office/drawing/2016/SVG/main" r:embed="rId2"/>
+              </a:ext>
+            </a:extLst>
+          </a:blip>
+          <a:stretch>
+            <a:fillRect/>
+          </a:stretch>
+        </p:blipFill>
+        <p:spPr>
+          <a:xfrm>
+            <a:off x="1060704" y="1664208"/>
+            <a:ext cx="10058400" cy="2542032"/>
+          </a:xfrm>
+          <a:prstGeom prst="rect">
+            <a:avLst/>
+          </a:prstGeom>
+        </p:spPr>
+      </p:pic>
+      <p:sp>
+        <p:nvSpPr>
+          <p:cNvPr id="9" name="Shape 6"/>
+          <p:cNvSpPr/>
+          <p:nvPr/>
+        </p:nvSpPr>
+        <p:spPr>
+          <a:xfrm>
+            <a:off x="731520" y="4462272"/>
+            <a:ext cx="5221224" cy="1920240"/>
+          </a:xfrm>
+          <a:prstGeom prst="roundRect">
+            <a:avLst>
+              <a:gd name="adj" fmla="val 3810"/>
+            </a:avLst>
+          </a:prstGeom>
+          <a:solidFill>
+            <a:srgbClr val="131B2B"/>
+          </a:solidFill>
+          <a:ln w="12700">
+            <a:solidFill>
+              <a:srgbClr val="F87171"/>
+            </a:solidFill>
+            <a:prstDash val="solid"/>
+          </a:ln>
+        </p:spPr>
+      </p:sp>
+      <p:sp>
+        <p:nvSpPr>
+          <p:cNvPr id="10" name="Text 7"/>
+          <p:cNvSpPr/>
+          <p:nvPr/>
+        </p:nvSpPr>
+        <p:spPr>
+          <a:xfrm>
+            <a:off x="914400" y="4572000"/>
+            <a:ext cx="4855464" cy="201168"/>
+          </a:xfrm>
+          <a:prstGeom prst="rect">
+            <a:avLst/>
+          </a:prstGeom>
+          <a:noFill/>
+          <a:ln/>
+        </p:spPr>
+        <p:txBody>
+          <a:bodyPr wrap="square" rtlCol="0" anchor="ctr"/>
+          <a:lstStyle/>
+          <a:p>
+            <a:pPr indent="0" marL="0">
+              <a:buNone/>
+            </a:pPr>
+            <a:r>
+              <a:rPr lang="en-US" sz="1000" b="1" dirty="0">
+                <a:solidFill>
+                  <a:srgbClr val="F87171"/>
+                </a:solidFill>
+                <a:latin typeface="Arial" pitchFamily="34" charset="0"/>
+                <a:ea typeface="Arial" pitchFamily="34" charset="-122"/>
+                <a:cs typeface="Arial" pitchFamily="34" charset="-120"/>
+              </a:rPr>
+              <a:t>THE RISK OF TIME-BASED RETENTION AT THE EDGE</a:t>
+            </a:r>
+            <a:endParaRPr lang="en-US" sz="1000" dirty="0"/>
+          </a:p>
+        </p:txBody>
+      </p:sp>
+      <p:sp>
+        <p:nvSpPr>
+          <p:cNvPr id="11" name="Text 8"/>
+          <p:cNvSpPr/>
+          <p:nvPr/>
+        </p:nvSpPr>
+        <p:spPr>
+          <a:xfrm>
+            <a:off x="914400" y="4809744"/>
+            <a:ext cx="4855464" cy="1508760"/>
+          </a:xfrm>
+          <a:prstGeom prst="rect">
+            <a:avLst/>
+          </a:prstGeom>
+          <a:noFill/>
+          <a:ln/>
+        </p:spPr>
+        <p:txBody>
+          <a:bodyPr wrap="square" rtlCol="0" anchor="ctr"/>
+          <a:lstStyle/>
+          <a:p>
+            <a:pPr indent="0" marL="0">
+              <a:buNone/>
+            </a:pPr>
+            <a:r>
+              <a:rPr lang="en-US" sz="850" dirty="0">
+                <a:solidFill>
+                  <a:srgbClr val="94A3B8"/>
+                </a:solidFill>
+                <a:latin typeface="Arial" pitchFamily="34" charset="0"/>
+                <a:ea typeface="Arial" pitchFamily="34" charset="-122"/>
+                <a:cs typeface="Arial" pitchFamily="34" charset="-120"/>
+              </a:rPr>
+              <a:t>1. The Root Partition Constraint: Edge appliances and microVM hosts allocate small root filesystems (8-16 GB). Unbounded message queues quickly exhaust disk capacity.</a:t>
+            </a:r>
+            <a:endParaRPr lang="en-US" sz="850" dirty="0"/>
+          </a:p>
+          <a:p>
+            <a:pPr indent="0" marL="0">
+              <a:buNone/>
+            </a:pPr>
+            <a:endParaRPr lang="en-US" sz="850" dirty="0"/>
+          </a:p>
+          <a:p>
+            <a:pPr indent="0" marL="0">
+              <a:buNone/>
+            </a:pPr>
+            <a:r>
+              <a:rPr lang="en-US" sz="850" dirty="0">
+                <a:solidFill>
+                  <a:srgbClr val="94A3B8"/>
+                </a:solidFill>
+                <a:latin typeface="Arial" pitchFamily="34" charset="0"/>
+                <a:ea typeface="Arial" pitchFamily="34" charset="-122"/>
+                <a:cs typeface="Arial" pitchFamily="34" charset="-120"/>
+              </a:rPr>
+              <a:t>2. Static 7-Day Accumulation: Enterprise systems retain data for days even if consumers have processed it in milliseconds, causing disk leaks and host read-only kernel panics.</a:t>
+            </a:r>
+            <a:endParaRPr lang="en-US" sz="850" dirty="0"/>
+          </a:p>
+          <a:p>
+            <a:pPr indent="0" marL="0">
+              <a:buNone/>
+            </a:pPr>
+            <a:endParaRPr lang="en-US" sz="850" dirty="0"/>
+          </a:p>
+          <a:p>
+            <a:pPr indent="0" marL="0">
+              <a:buNone/>
+            </a:pPr>
+            <a:r>
+              <a:rPr lang="en-US" sz="850" dirty="0">
+                <a:solidFill>
+                  <a:srgbClr val="94A3B8"/>
+                </a:solidFill>
+                <a:latin typeface="Arial" pitchFamily="34" charset="0"/>
+                <a:ea typeface="Arial" pitchFamily="34" charset="-122"/>
+                <a:cs typeface="Arial" pitchFamily="34" charset="-120"/>
+              </a:rPr>
+              <a:t>3. Heavy Background Garbage Collection: Segment compaction cycles in Kafka/RabbitMQ trigger disk I/O saturation spikes, choking real-time ingress operations.</a:t>
+            </a:r>
+            <a:endParaRPr lang="en-US" sz="850" dirty="0"/>
+          </a:p>
+        </p:txBody>
+      </p:sp>
+      <p:sp>
+        <p:nvSpPr>
+          <p:cNvPr id="12" name="Shape 9"/>
+          <p:cNvSpPr/>
+          <p:nvPr/>
+        </p:nvSpPr>
+        <p:spPr>
+          <a:xfrm>
+            <a:off x="6236208" y="4462272"/>
+            <a:ext cx="5221224" cy="1920240"/>
+          </a:xfrm>
+          <a:prstGeom prst="roundRect">
+            <a:avLst>
+              <a:gd name="adj" fmla="val 3810"/>
+            </a:avLst>
+          </a:prstGeom>
+          <a:solidFill>
+            <a:srgbClr val="131B2B"/>
+          </a:solidFill>
+          <a:ln w="12700">
+            <a:solidFill>
+              <a:srgbClr val="34D399"/>
+            </a:solidFill>
+            <a:prstDash val="solid"/>
+          </a:ln>
+        </p:spPr>
+      </p:sp>
+      <p:sp>
+        <p:nvSpPr>
+          <p:cNvPr id="13" name="Text 10"/>
+          <p:cNvSpPr/>
+          <p:nvPr/>
+        </p:nvSpPr>
+        <p:spPr>
+          <a:xfrm>
+            <a:off x="6419088" y="4572000"/>
+            <a:ext cx="4855464" cy="201168"/>
+          </a:xfrm>
+          <a:prstGeom prst="rect">
+            <a:avLst/>
+          </a:prstGeom>
+          <a:noFill/>
+          <a:ln/>
+        </p:spPr>
+        <p:txBody>
+          <a:bodyPr wrap="square" rtlCol="0" anchor="ctr"/>
+          <a:lstStyle/>
+          <a:p>
+            <a:pPr indent="0" marL="0">
+              <a:buNone/>
+            </a:pPr>
+            <a:r>
+              <a:rPr lang="en-US" sz="1000" b="1" dirty="0">
+                <a:solidFill>
+                  <a:srgbClr val="34D399"/>
+                </a:solidFill>
+                <a:latin typeface="Arial" pitchFamily="34" charset="0"/>
+                <a:ea typeface="Arial" pitchFamily="34" charset="-122"/>
+                <a:cs typeface="Arial" pitchFamily="34" charset="-120"/>
+              </a:rPr>
+              <a:t>PMB ACTIVE TRUNCATION &amp; DELTA RECLAMATION</a:t>
+            </a:r>
+            <a:endParaRPr lang="en-US" sz="1000" dirty="0"/>
+          </a:p>
+        </p:txBody>
+      </p:sp>
+      <p:sp>
+        <p:nvSpPr>
+          <p:cNvPr id="14" name="Text 11"/>
+          <p:cNvSpPr/>
+          <p:nvPr/>
+        </p:nvSpPr>
+        <p:spPr>
+          <a:xfrm>
+            <a:off x="6419088" y="4809744"/>
+            <a:ext cx="4855464" cy="1508760"/>
+          </a:xfrm>
+          <a:prstGeom prst="rect">
+            <a:avLst/>
+          </a:prstGeom>
+          <a:noFill/>
+          <a:ln/>
+        </p:spPr>
+        <p:txBody>
+          <a:bodyPr wrap="square" rtlCol="0" anchor="ctr"/>
+          <a:lstStyle/>
+          <a:p>
+            <a:pPr indent="0" marL="0">
+              <a:buNone/>
+            </a:pPr>
+            <a:r>
+              <a:rPr lang="en-US" sz="850" dirty="0">
+                <a:solidFill>
+                  <a:srgbClr val="94A3B8"/>
+                </a:solidFill>
+                <a:latin typeface="Arial" pitchFamily="34" charset="0"/>
+                <a:ea typeface="Arial" pitchFamily="34" charset="-122"/>
+                <a:cs typeface="Arial" pitchFamily="34" charset="-120"/>
+              </a:rPr>
+              <a:t>1. Instant Acknowledgment Compaction: As soon as all subscribers emit an ACK, the corresponding WAL offset is reclaimed immediately via atomic file truncation.</a:t>
+            </a:r>
+            <a:endParaRPr lang="en-US" sz="850" dirty="0"/>
+          </a:p>
+          <a:p>
+            <a:pPr indent="0" marL="0">
+              <a:buNone/>
+            </a:pPr>
+            <a:endParaRPr lang="en-US" sz="850" dirty="0"/>
+          </a:p>
+          <a:p>
+            <a:pPr indent="0" marL="0">
+              <a:buNone/>
+            </a:pPr>
+            <a:r>
+              <a:rPr lang="en-US" sz="850" dirty="0">
+                <a:solidFill>
+                  <a:srgbClr val="94A3B8"/>
+                </a:solidFill>
+                <a:latin typeface="Arial" pitchFamily="34" charset="0"/>
+                <a:ea typeface="Arial" pitchFamily="34" charset="-122"/>
+                <a:cs typeface="Arial" pitchFamily="34" charset="-120"/>
+              </a:rPr>
+              <a:t>2. Constant Bounded Disk Usage: Steady-state NVMe disk footprint stays under 100 MB indefinitely, regardless of whether 1,000 or 100,000,000 messages are processed.</a:t>
+            </a:r>
+            <a:endParaRPr lang="en-US" sz="850" dirty="0"/>
+          </a:p>
+          <a:p>
+            <a:pPr indent="0" marL="0">
+              <a:buNone/>
+            </a:pPr>
+            <a:endParaRPr lang="en-US" sz="850" dirty="0"/>
+          </a:p>
+          <a:p>
+            <a:pPr indent="0" marL="0">
+              <a:buNone/>
+            </a:pPr>
+            <a:r>
+              <a:rPr lang="en-US" sz="850" dirty="0">
+                <a:solidFill>
+                  <a:srgbClr val="94A3B8"/>
+                </a:solidFill>
+                <a:latin typeface="Arial" pitchFamily="34" charset="0"/>
+                <a:ea typeface="Arial" pitchFamily="34" charset="-122"/>
+                <a:cs typeface="Arial" pitchFamily="34" charset="-120"/>
+              </a:rPr>
+              <a:t>3. Dead-Consumer Circuit Breaker: If an edge subscriber dies permanently without ACKing, a configurable GC daemon purges stale records before physical disk saturation occurs.</a:t>
+            </a:r>
+            <a:endParaRPr lang="en-US" sz="850" dirty="0"/>
+          </a:p>
+        </p:txBody>
+      </p:sp>
+    </p:spTree>
+  </p:cSld>
+  <p:clrMapOvr>
+    <a:masterClrMapping/>
+  </p:clrMapOvr>
+</p:sld>
+</file>
+
+<file path=ppt/slides/slide8.xml><?xml version="1.0" encoding="utf-8"?>
+<p:sld xmlns:a="http://schemas.openxmlformats.org/drawingml/2006/main" xmlns:r="http://schemas.openxmlformats.org/officeDocument/2006/relationships" xmlns:p="http://schemas.openxmlformats.org/presentationml/2006/main">
+  <p:cSld name="Slide 8">
+    <p:bg>
+      <p:bgPr>
+        <a:solidFill>
+          <a:srgbClr val="0B0F19"/>
+        </a:solidFill>
+      </p:bgPr>
+    </p:bg>
+    <p:spTree>
+      <p:nvGrpSpPr>
+        <p:cNvPr id="1" name=""/>
+        <p:cNvGrpSpPr/>
+        <p:nvPr/>
+      </p:nvGrpSpPr>
+      <p:grpSpPr>
+        <a:xfrm>
+          <a:off x="0" y="0"/>
+          <a:ext cx="0" cy="0"/>
+          <a:chOff x="0" y="0"/>
+          <a:chExt cx="0" cy="0"/>
+        </a:xfrm>
+      </p:grpSpPr>
+      <p:sp>
+        <p:nvSpPr>
+          <p:cNvPr id="2" name="Shape 0"/>
+          <p:cNvSpPr/>
+          <p:nvPr/>
+        </p:nvSpPr>
+        <p:spPr>
+          <a:xfrm>
+            <a:off x="731520" y="347472"/>
+            <a:ext cx="3474720" cy="256032"/>
+          </a:xfrm>
+          <a:prstGeom prst="roundRect">
+            <a:avLst>
+              <a:gd name="adj" fmla="val 21429"/>
+            </a:avLst>
+          </a:prstGeom>
+          <a:solidFill>
+            <a:srgbClr val="1E293B"/>
+          </a:solidFill>
+          <a:ln w="12700">
+            <a:solidFill>
+              <a:srgbClr val="38BDF8"/>
+            </a:solidFill>
+            <a:prstDash val="solid"/>
+          </a:ln>
+        </p:spPr>
+      </p:sp>
+      <p:sp>
+        <p:nvSpPr>
+          <p:cNvPr id="3" name="Text 1"/>
+          <p:cNvSpPr/>
+          <p:nvPr/>
+        </p:nvSpPr>
+        <p:spPr>
+          <a:xfrm>
+            <a:off x="731520" y="347472"/>
+            <a:ext cx="3474720" cy="256032"/>
+          </a:xfrm>
+          <a:prstGeom prst="rect">
+            <a:avLst/>
+          </a:prstGeom>
+          <a:noFill/>
+          <a:ln/>
+        </p:spPr>
+        <p:txBody>
+          <a:bodyPr wrap="square" rtlCol="0" anchor="ctr"/>
+          <a:lstStyle/>
+          <a:p>
+            <a:pPr algn="ctr" indent="0" marL="0">
+              <a:buNone/>
+            </a:pPr>
+            <a:r>
+              <a:rPr lang="en-US" sz="900" b="1" dirty="0">
+                <a:solidFill>
+                  <a:srgbClr val="38BDF8"/>
+                </a:solidFill>
+                <a:latin typeface="Arial" pitchFamily="34" charset="0"/>
+                <a:ea typeface="Arial" pitchFamily="34" charset="-122"/>
+                <a:cs typeface="Arial" pitchFamily="34" charset="-120"/>
+              </a:rPr>
+              <a:t>INTEROPERABILITY &amp; PROTOCOL DESIGN</a:t>
+            </a:r>
+            <a:endParaRPr lang="en-US" sz="900" dirty="0"/>
+          </a:p>
+        </p:txBody>
+      </p:sp>
+      <p:sp>
+        <p:nvSpPr>
+          <p:cNvPr id="4" name="Text 2"/>
+          <p:cNvSpPr/>
+          <p:nvPr/>
+        </p:nvSpPr>
+        <p:spPr>
+          <a:xfrm>
+            <a:off x="731520" y="640080"/>
+            <a:ext cx="10725912" cy="420624"/>
+          </a:xfrm>
+          <a:prstGeom prst="rect">
+            <a:avLst/>
+          </a:prstGeom>
+          <a:noFill/>
+          <a:ln/>
+        </p:spPr>
+        <p:txBody>
+          <a:bodyPr wrap="square" rtlCol="0" anchor="ctr"/>
+          <a:lstStyle/>
+          <a:p>
+            <a:pPr indent="0" marL="0">
+              <a:buNone/>
+            </a:pPr>
+            <a:r>
+              <a:rPr lang="en-US" sz="2000" b="1" dirty="0">
+                <a:solidFill>
+                  <a:srgbClr val="F8FAFC"/>
+                </a:solidFill>
+                <a:latin typeface="Arial" pitchFamily="34" charset="0"/>
+                <a:ea typeface="Arial" pitchFamily="34" charset="-122"/>
+                <a:cs typeface="Arial" pitchFamily="34" charset="-120"/>
+              </a:rPr>
+              <a:t>Protocol Simplicity: Zero-SDK Framed ASCII Wire Protocol</a:t>
+            </a:r>
+            <a:endParaRPr lang="en-US" sz="2000" dirty="0"/>
+          </a:p>
+        </p:txBody>
+      </p:sp>
+      <p:sp>
+        <p:nvSpPr>
+          <p:cNvPr id="5" name="Text 3"/>
+          <p:cNvSpPr/>
+          <p:nvPr/>
+        </p:nvSpPr>
+        <p:spPr>
+          <a:xfrm>
+            <a:off x="731520" y="1060704"/>
+            <a:ext cx="10725912" cy="228600"/>
+          </a:xfrm>
+          <a:prstGeom prst="rect">
+            <a:avLst/>
+          </a:prstGeom>
+          <a:noFill/>
+          <a:ln/>
+        </p:spPr>
+        <p:txBody>
+          <a:bodyPr wrap="square" rtlCol="0" anchor="ctr"/>
+          <a:lstStyle/>
+          <a:p>
+            <a:pPr indent="0" marL="0">
+              <a:buNone/>
+            </a:pPr>
+            <a:r>
+              <a:rPr lang="en-US" sz="1050" dirty="0">
+                <a:solidFill>
+                  <a:srgbClr val="94A3B8"/>
+                </a:solidFill>
+                <a:latin typeface="Arial" pitchFamily="34" charset="0"/>
+                <a:ea typeface="Arial" pitchFamily="34" charset="-122"/>
+                <a:cs typeface="Arial" pitchFamily="34" charset="-120"/>
+              </a:rPr>
+              <a:t>Eliminating client library dependency hell with raw POSIX TCP socket commands.</a:t>
+            </a:r>
+            <a:endParaRPr lang="en-US" sz="1050" dirty="0"/>
+          </a:p>
+        </p:txBody>
+      </p:sp>
+      <p:sp>
+        <p:nvSpPr>
+          <p:cNvPr id="6" name="Shape 4"/>
+          <p:cNvSpPr/>
+          <p:nvPr/>
+        </p:nvSpPr>
+        <p:spPr>
+          <a:xfrm>
+            <a:off x="731520" y="1325880"/>
+            <a:ext cx="10725912" cy="2971800"/>
+          </a:xfrm>
+          <a:prstGeom prst="roundRect">
+            <a:avLst>
+              <a:gd name="adj" fmla="val 2462"/>
+            </a:avLst>
+          </a:prstGeom>
+          <a:solidFill>
+            <a:srgbClr val="131B2B"/>
+          </a:solidFill>
+          <a:ln w="12700">
+            <a:solidFill>
+              <a:srgbClr val="23324A"/>
+            </a:solidFill>
+            <a:prstDash val="solid"/>
+          </a:ln>
+        </p:spPr>
+      </p:sp>
+      <p:sp>
+        <p:nvSpPr>
+          <p:cNvPr id="7" name="Text 5"/>
+          <p:cNvSpPr/>
+          <p:nvPr/>
+        </p:nvSpPr>
+        <p:spPr>
+          <a:xfrm>
+            <a:off x="914400" y="1417320"/>
+            <a:ext cx="10360152" cy="201168"/>
+          </a:xfrm>
+          <a:prstGeom prst="rect">
+            <a:avLst/>
+          </a:prstGeom>
+          <a:noFill/>
+          <a:ln/>
+        </p:spPr>
+        <p:txBody>
+          <a:bodyPr wrap="square" rtlCol="0" anchor="ctr"/>
+          <a:lstStyle/>
+          <a:p>
+            <a:pPr indent="0" marL="0">
+              <a:buNone/>
+            </a:pPr>
+            <a:r>
+              <a:rPr lang="en-US" sz="1050" b="1" dirty="0">
+                <a:solidFill>
+                  <a:srgbClr val="38BDF8"/>
+                </a:solidFill>
+                <a:latin typeface="Arial" pitchFamily="34" charset="0"/>
+                <a:ea typeface="Arial" pitchFamily="34" charset="-122"/>
+                <a:cs typeface="Arial" pitchFamily="34" charset="-120"/>
+              </a:rPr>
+              <a:t>WIRE PROTOCOL FRAMING &amp; ZERO-DEPENDENCY SOCKET INTEGRATIONS</a:t>
+            </a:r>
+            <a:endParaRPr lang="en-US" sz="1050" dirty="0"/>
+          </a:p>
+        </p:txBody>
+      </p:sp>
+      <p:pic>
+        <p:nvPicPr>
+          <p:cNvPr id="8" name="Image 0" descr="d:\persistant_message_broker\docs\slide8_wire_protocol.svg">    </p:cNvPr>
+          <p:cNvPicPr>
+            <a:picLocks noChangeAspect="1"/>
+          </p:cNvPicPr>
+          <p:nvPr/>
+        </p:nvPicPr>
+        <p:blipFill>
+          <a:blip r:embed="rId1">
+            <a:extLst>
+              <a:ext uri="{96DAC541-7B7A-43D3-8B79-37D633B846F1}">
+                <asvg:svgBlip xmlns:asvg="http://schemas.microsoft.com/office/drawing/2016/SVG/main" r:embed="rId2"/>
+              </a:ext>
+            </a:extLst>
+          </a:blip>
+          <a:stretch>
+            <a:fillRect/>
+          </a:stretch>
+        </p:blipFill>
+        <p:spPr>
+          <a:xfrm>
+            <a:off x="1060704" y="1664208"/>
+            <a:ext cx="10058400" cy="2542032"/>
+          </a:xfrm>
+          <a:prstGeom prst="rect">
+            <a:avLst/>
+          </a:prstGeom>
+        </p:spPr>
+      </p:pic>
+      <p:sp>
+        <p:nvSpPr>
+          <p:cNvPr id="9" name="Shape 6"/>
+          <p:cNvSpPr/>
+          <p:nvPr/>
+        </p:nvSpPr>
+        <p:spPr>
+          <a:xfrm>
+            <a:off x="731520" y="4462272"/>
+            <a:ext cx="5221224" cy="1920240"/>
+          </a:xfrm>
+          <a:prstGeom prst="roundRect">
+            <a:avLst>
+              <a:gd name="adj" fmla="val 3810"/>
+            </a:avLst>
+          </a:prstGeom>
+          <a:solidFill>
+            <a:srgbClr val="131B2B"/>
+          </a:solidFill>
+          <a:ln w="12700">
+            <a:solidFill>
+              <a:srgbClr val="23324A"/>
+            </a:solidFill>
+            <a:prstDash val="solid"/>
+          </a:ln>
+        </p:spPr>
+      </p:sp>
+      <p:sp>
+        <p:nvSpPr>
+          <p:cNvPr id="10" name="Text 7"/>
+          <p:cNvSpPr/>
+          <p:nvPr/>
+        </p:nvSpPr>
+        <p:spPr>
+          <a:xfrm>
+            <a:off x="914400" y="4572000"/>
+            <a:ext cx="4855464" cy="201168"/>
+          </a:xfrm>
+          <a:prstGeom prst="rect">
+            <a:avLst/>
+          </a:prstGeom>
+          <a:noFill/>
+          <a:ln/>
+        </p:spPr>
+        <p:txBody>
+          <a:bodyPr wrap="square" rtlCol="0" anchor="ctr"/>
+          <a:lstStyle/>
+          <a:p>
+            <a:pPr indent="0" marL="0">
+              <a:buNone/>
+            </a:pPr>
+            <a:r>
+              <a:rPr lang="en-US" sz="1000" b="1" dirty="0">
+                <a:solidFill>
+                  <a:srgbClr val="38BDF8"/>
+                </a:solidFill>
+                <a:latin typeface="Arial" pitchFamily="34" charset="0"/>
+                <a:ea typeface="Arial" pitchFamily="34" charset="-122"/>
+                <a:cs typeface="Arial" pitchFamily="34" charset="-120"/>
+              </a:rPr>
+              <a:t>FRAMED ASCII PROTOCOL ENGINEERING HIGHLIGHTS</a:t>
+            </a:r>
+            <a:endParaRPr lang="en-US" sz="1000" dirty="0"/>
+          </a:p>
+        </p:txBody>
+      </p:sp>
+      <p:sp>
+        <p:nvSpPr>
+          <p:cNvPr id="11" name="Text 8"/>
+          <p:cNvSpPr/>
+          <p:nvPr/>
+        </p:nvSpPr>
+        <p:spPr>
+          <a:xfrm>
+            <a:off x="914400" y="4809744"/>
+            <a:ext cx="4855464" cy="1508760"/>
+          </a:xfrm>
+          <a:prstGeom prst="rect">
+            <a:avLst/>
+          </a:prstGeom>
+          <a:noFill/>
+          <a:ln/>
+        </p:spPr>
+        <p:txBody>
+          <a:bodyPr wrap="square" rtlCol="0" anchor="ctr"/>
+          <a:lstStyle/>
+          <a:p>
+            <a:pPr indent="0" marL="0">
+              <a:buNone/>
+            </a:pPr>
+            <a:r>
+              <a:rPr lang="en-US" sz="850" dirty="0">
+                <a:solidFill>
+                  <a:srgbClr val="94A3B8"/>
+                </a:solidFill>
+                <a:latin typeface="Arial" pitchFamily="34" charset="0"/>
+                <a:ea typeface="Arial" pitchFamily="34" charset="-122"/>
+                <a:cs typeface="Arial" pitchFamily="34" charset="-120"/>
+              </a:rPr>
+              <a:t>1. Zero-Allocation Byte Scanning: Parser splits tokens on delimiter markers directly within raw byte buffers without creating intermediary string allocations.</a:t>
+            </a:r>
+            <a:endParaRPr lang="en-US" sz="850" dirty="0"/>
+          </a:p>
+          <a:p>
+            <a:pPr indent="0" marL="0">
+              <a:buNone/>
+            </a:pPr>
+            <a:endParaRPr lang="en-US" sz="850" dirty="0"/>
+          </a:p>
+          <a:p>
+            <a:pPr indent="0" marL="0">
+              <a:buNone/>
+            </a:pPr>
+            <a:r>
+              <a:rPr lang="en-US" sz="850" dirty="0">
+                <a:solidFill>
+                  <a:srgbClr val="94A3B8"/>
+                </a:solidFill>
+                <a:latin typeface="Arial" pitchFamily="34" charset="0"/>
+                <a:ea typeface="Arial" pitchFamily="34" charset="-122"/>
+                <a:cs typeface="Arial" pitchFamily="34" charset="-120"/>
+              </a:rPr>
+              <a:t>2. Sticky Packet &amp; Segmentation Immunity: Persistent connection read buffers assemble fragmented TCP packets across network MTU boundaries seamlessly.</a:t>
+            </a:r>
+            <a:endParaRPr lang="en-US" sz="850" dirty="0"/>
+          </a:p>
+          <a:p>
+            <a:pPr indent="0" marL="0">
+              <a:buNone/>
+            </a:pPr>
+            <a:endParaRPr lang="en-US" sz="850" dirty="0"/>
+          </a:p>
+          <a:p>
+            <a:pPr indent="0" marL="0">
+              <a:buNone/>
+            </a:pPr>
+            <a:r>
+              <a:rPr lang="en-US" sz="850" dirty="0">
+                <a:solidFill>
+                  <a:srgbClr val="94A3B8"/>
+                </a:solidFill>
+                <a:latin typeface="Arial" pitchFamily="34" charset="0"/>
+                <a:ea typeface="Arial" pitchFamily="34" charset="-122"/>
+                <a:cs typeface="Arial" pitchFamily="34" charset="-120"/>
+              </a:rPr>
+              <a:t>3. Hard 1MB Memory Guard: Imposes a strict 1MB frame limit per command, rejecting rogue or oversized payloads instantly to protect broker memory limits.</a:t>
+            </a:r>
+            <a:endParaRPr lang="en-US" sz="850" dirty="0"/>
+          </a:p>
+        </p:txBody>
+      </p:sp>
+      <p:sp>
+        <p:nvSpPr>
+          <p:cNvPr id="12" name="Shape 9"/>
+          <p:cNvSpPr/>
+          <p:nvPr/>
+        </p:nvSpPr>
+        <p:spPr>
+          <a:xfrm>
+            <a:off x="6236208" y="4462272"/>
+            <a:ext cx="5221224" cy="1920240"/>
+          </a:xfrm>
+          <a:prstGeom prst="roundRect">
+            <a:avLst>
+              <a:gd name="adj" fmla="val 3810"/>
+            </a:avLst>
+          </a:prstGeom>
+          <a:solidFill>
+            <a:srgbClr val="131B2B"/>
+          </a:solidFill>
+          <a:ln w="12700">
+            <a:solidFill>
+              <a:srgbClr val="34D399"/>
+            </a:solidFill>
+            <a:prstDash val="solid"/>
+          </a:ln>
+        </p:spPr>
+      </p:sp>
+      <p:sp>
+        <p:nvSpPr>
+          <p:cNvPr id="13" name="Text 10"/>
+          <p:cNvSpPr/>
+          <p:nvPr/>
+        </p:nvSpPr>
+        <p:spPr>
+          <a:xfrm>
+            <a:off x="6419088" y="4572000"/>
+            <a:ext cx="4855464" cy="201168"/>
+          </a:xfrm>
+          <a:prstGeom prst="rect">
+            <a:avLst/>
+          </a:prstGeom>
+          <a:noFill/>
+          <a:ln/>
+        </p:spPr>
+        <p:txBody>
+          <a:bodyPr wrap="square" rtlCol="0" anchor="ctr"/>
+          <a:lstStyle/>
+          <a:p>
+            <a:pPr indent="0" marL="0">
+              <a:buNone/>
+            </a:pPr>
+            <a:r>
+              <a:rPr lang="en-US" sz="1000" b="1" dirty="0">
+                <a:solidFill>
+                  <a:srgbClr val="34D399"/>
+                </a:solidFill>
+                <a:latin typeface="Arial" pitchFamily="34" charset="0"/>
+                <a:ea typeface="Arial" pitchFamily="34" charset="-122"/>
+                <a:cs typeface="Arial" pitchFamily="34" charset="-120"/>
+              </a:rPr>
+              <a:t>UNIVERSAL RUNTIME COMPATIBILITY &amp; ZERO-SDK ADVANTAGE</a:t>
+            </a:r>
+            <a:endParaRPr lang="en-US" sz="1000" dirty="0"/>
+          </a:p>
+        </p:txBody>
+      </p:sp>
+      <p:sp>
+        <p:nvSpPr>
+          <p:cNvPr id="14" name="Text 11"/>
+          <p:cNvSpPr/>
+          <p:nvPr/>
+        </p:nvSpPr>
+        <p:spPr>
+          <a:xfrm>
+            <a:off x="6419088" y="4809744"/>
+            <a:ext cx="4855464" cy="1508760"/>
+          </a:xfrm>
+          <a:prstGeom prst="rect">
+            <a:avLst/>
+          </a:prstGeom>
+          <a:noFill/>
+          <a:ln/>
+        </p:spPr>
+        <p:txBody>
+          <a:bodyPr wrap="square" rtlCol="0" anchor="ctr"/>
+          <a:lstStyle/>
+          <a:p>
+            <a:pPr indent="0" marL="0">
+              <a:buNone/>
+            </a:pPr>
+            <a:r>
+              <a:rPr lang="en-US" sz="850" dirty="0">
+                <a:solidFill>
+                  <a:srgbClr val="94A3B8"/>
+                </a:solidFill>
+                <a:latin typeface="Arial" pitchFamily="34" charset="0"/>
+                <a:ea typeface="Arial" pitchFamily="34" charset="-122"/>
+                <a:cs typeface="Arial" pitchFamily="34" charset="-120"/>
+              </a:rPr>
+              <a:t>1. No Multi-Megabyte SDK Bloat: MicroVMs do not need thick client libraries (e.g. librdkafka, JVM clients). Connect with standard POSIX TCP sockets in C, Rust, Python, or Go.</a:t>
+            </a:r>
+            <a:endParaRPr lang="en-US" sz="850" dirty="0"/>
+          </a:p>
+          <a:p>
+            <a:pPr indent="0" marL="0">
+              <a:buNone/>
+            </a:pPr>
+            <a:endParaRPr lang="en-US" sz="850" dirty="0"/>
+          </a:p>
+          <a:p>
+            <a:pPr indent="0" marL="0">
+              <a:buNone/>
+            </a:pPr>
+            <a:r>
+              <a:rPr lang="en-US" sz="850" dirty="0">
+                <a:solidFill>
+                  <a:srgbClr val="94A3B8"/>
+                </a:solidFill>
+                <a:latin typeface="Arial" pitchFamily="34" charset="0"/>
+                <a:ea typeface="Arial" pitchFamily="34" charset="-122"/>
+                <a:cs typeface="Arial" pitchFamily="34" charset="-120"/>
+              </a:rPr>
+              <a:t>2. Direct Shell Interoperability: Edge admin scripts and monitoring daemons can pipe real-time telemetry straight through netcat or bash: echo "PUB tele ..." | nc host 4222.</a:t>
+            </a:r>
+            <a:endParaRPr lang="en-US" sz="850" dirty="0"/>
+          </a:p>
+          <a:p>
+            <a:pPr indent="0" marL="0">
+              <a:buNone/>
+            </a:pPr>
+            <a:endParaRPr lang="en-US" sz="850" dirty="0"/>
+          </a:p>
+          <a:p>
+            <a:pPr indent="0" marL="0">
+              <a:buNone/>
+            </a:pPr>
+            <a:r>
+              <a:rPr lang="en-US" sz="850" dirty="0">
+                <a:solidFill>
+                  <a:srgbClr val="94A3B8"/>
+                </a:solidFill>
+                <a:latin typeface="Arial" pitchFamily="34" charset="0"/>
+                <a:ea typeface="Arial" pitchFamily="34" charset="-122"/>
+                <a:cs typeface="Arial" pitchFamily="34" charset="-120"/>
+              </a:rPr>
+              <a:t>3. Ultra-Low Overhead: Line-oriented framing produces minimal protocol overhead (&lt; 15 bytes envelope overhead), maximizing physical network bandwidth utilization.</a:t>
+            </a:r>
+            <a:endParaRPr lang="en-US" sz="850" dirty="0"/>
+          </a:p>
+        </p:txBody>
+      </p:sp>
+    </p:spTree>
+  </p:cSld>
+  <p:clrMapOvr>
+    <a:masterClrMapping/>
+  </p:clrMapOvr>
+</p:sld>
+</file>
+
+<file path=ppt/slides/slide9.xml><?xml version="1.0" encoding="utf-8"?>
+<p:sld xmlns:a="http://schemas.openxmlformats.org/drawingml/2006/main" xmlns:r="http://schemas.openxmlformats.org/officeDocument/2006/relationships" xmlns:p="http://schemas.openxmlformats.org/presentationml/2006/main">
+  <p:cSld name="Slide 9">
+    <p:bg>
+      <p:bgPr>
+        <a:solidFill>
+          <a:srgbClr val="0B0F19"/>
+        </a:solidFill>
+      </p:bgPr>
+    </p:bg>
+    <p:spTree>
+      <p:nvGrpSpPr>
+        <p:cNvPr id="1" name=""/>
+        <p:cNvGrpSpPr/>
+        <p:nvPr/>
+      </p:nvGrpSpPr>
+      <p:grpSpPr>
+        <a:xfrm>
+          <a:off x="0" y="0"/>
+          <a:ext cx="0" cy="0"/>
+          <a:chOff x="0" y="0"/>
+          <a:chExt cx="0" cy="0"/>
+        </a:xfrm>
+      </p:grpSpPr>
+      <p:sp>
+        <p:nvSpPr>
+          <p:cNvPr id="2" name="Shape 0"/>
+          <p:cNvSpPr/>
+          <p:nvPr/>
+        </p:nvSpPr>
+        <p:spPr>
+          <a:xfrm>
+            <a:off x="731520" y="347472"/>
+            <a:ext cx="3474720" cy="256032"/>
+          </a:xfrm>
+          <a:prstGeom prst="roundRect">
+            <a:avLst>
+              <a:gd name="adj" fmla="val 21429"/>
+            </a:avLst>
+          </a:prstGeom>
+          <a:solidFill>
+            <a:srgbClr val="1E293B"/>
+          </a:solidFill>
+          <a:ln w="12700">
+            <a:solidFill>
+              <a:srgbClr val="38BDF8"/>
+            </a:solidFill>
+            <a:prstDash val="solid"/>
+          </a:ln>
+        </p:spPr>
+      </p:sp>
+      <p:sp>
+        <p:nvSpPr>
+          <p:cNvPr id="3" name="Text 1"/>
+          <p:cNvSpPr/>
+          <p:nvPr/>
+        </p:nvSpPr>
+        <p:spPr>
+          <a:xfrm>
+            <a:off x="731520" y="347472"/>
+            <a:ext cx="3474720" cy="256032"/>
+          </a:xfrm>
+          <a:prstGeom prst="rect">
+            <a:avLst/>
+          </a:prstGeom>
+          <a:noFill/>
+          <a:ln/>
+        </p:spPr>
+        <p:txBody>
+          <a:bodyPr wrap="square" rtlCol="0" anchor="ctr"/>
+          <a:lstStyle/>
+          <a:p>
+            <a:pPr algn="ctr" indent="0" marL="0">
+              <a:buNone/>
+            </a:pPr>
+            <a:r>
+              <a:rPr lang="en-US" sz="900" b="1" dirty="0">
+                <a:solidFill>
+                  <a:srgbClr val="38BDF8"/>
+                </a:solidFill>
+                <a:latin typeface="Arial" pitchFamily="34" charset="0"/>
+                <a:ea typeface="Arial" pitchFamily="34" charset="-122"/>
+                <a:cs typeface="Arial" pitchFamily="34" charset="-120"/>
+              </a:rPr>
+              <a:t>PERFORMANCE &amp; EMPIRICAL PROOF</a:t>
+            </a:r>
+            <a:endParaRPr lang="en-US" sz="900" dirty="0"/>
+          </a:p>
+        </p:txBody>
+      </p:sp>
+      <p:sp>
+        <p:nvSpPr>
+          <p:cNvPr id="4" name="Text 2"/>
+          <p:cNvSpPr/>
+          <p:nvPr/>
+        </p:nvSpPr>
+        <p:spPr>
+          <a:xfrm>
+            <a:off x="731520" y="640080"/>
+            <a:ext cx="10725912" cy="420624"/>
+          </a:xfrm>
+          <a:prstGeom prst="rect">
+            <a:avLst/>
+          </a:prstGeom>
+          <a:noFill/>
+          <a:ln/>
+        </p:spPr>
+        <p:txBody>
+          <a:bodyPr wrap="square" rtlCol="0" anchor="ctr"/>
+          <a:lstStyle/>
+          <a:p>
+            <a:pPr indent="0" marL="0">
+              <a:buNone/>
+            </a:pPr>
+            <a:r>
+              <a:rPr lang="en-US" sz="2000" b="1" dirty="0">
+                <a:solidFill>
+                  <a:srgbClr val="F8FAFC"/>
+                </a:solidFill>
+                <a:latin typeface="Arial" pitchFamily="34" charset="0"/>
+                <a:ea typeface="Arial" pitchFamily="34" charset="-122"/>
+                <a:cs typeface="Arial" pitchFamily="34" charset="-120"/>
+              </a:rPr>
+              <a:t>Empirical Performance: Throughput, Latency &amp; Resource Utilization</a:t>
+            </a:r>
+            <a:endParaRPr lang="en-US" sz="2000" dirty="0"/>
+          </a:p>
+        </p:txBody>
+      </p:sp>
+      <p:sp>
+        <p:nvSpPr>
+          <p:cNvPr id="5" name="Text 3"/>
+          <p:cNvSpPr/>
+          <p:nvPr/>
+        </p:nvSpPr>
+        <p:spPr>
+          <a:xfrm>
+            <a:off x="731520" y="1060704"/>
+            <a:ext cx="10725912" cy="228600"/>
+          </a:xfrm>
+          <a:prstGeom prst="rect">
+            <a:avLst/>
+          </a:prstGeom>
+          <a:noFill/>
+          <a:ln/>
+        </p:spPr>
+        <p:txBody>
+          <a:bodyPr wrap="square" rtlCol="0" anchor="ctr"/>
+          <a:lstStyle/>
+          <a:p>
+            <a:pPr indent="0" marL="0">
+              <a:buNone/>
+            </a:pPr>
+            <a:r>
+              <a:rPr lang="en-US" sz="1050" dirty="0">
+                <a:solidFill>
+                  <a:srgbClr val="94A3B8"/>
+                </a:solidFill>
+                <a:latin typeface="Arial" pitchFamily="34" charset="0"/>
+                <a:ea typeface="Arial" pitchFamily="34" charset="-122"/>
+                <a:cs typeface="Arial" pitchFamily="34" charset="-120"/>
+              </a:rPr>
+              <a:t>Verified benchmarks on physical hardware with race detectors and hardware fsync enabled.</a:t>
+            </a:r>
+            <a:endParaRPr lang="en-US" sz="1050" dirty="0"/>
+          </a:p>
+        </p:txBody>
+      </p:sp>
+      <p:sp>
+        <p:nvSpPr>
+          <p:cNvPr id="6" name="Shape 4"/>
+          <p:cNvSpPr/>
+          <p:nvPr/>
+        </p:nvSpPr>
+        <p:spPr>
+          <a:xfrm>
+            <a:off x="731520" y="1325880"/>
+            <a:ext cx="2514600" cy="1920240"/>
+          </a:xfrm>
+          <a:prstGeom prst="roundRect">
+            <a:avLst>
+              <a:gd name="adj" fmla="val 3810"/>
+            </a:avLst>
+          </a:prstGeom>
+          <a:solidFill>
+            <a:srgbClr val="131B2B"/>
+          </a:solidFill>
+          <a:ln w="15240">
+            <a:solidFill>
+              <a:srgbClr val="34D399"/>
+            </a:solidFill>
+            <a:prstDash val="solid"/>
+          </a:ln>
+        </p:spPr>
+      </p:sp>
+      <p:sp>
+        <p:nvSpPr>
+          <p:cNvPr id="7" name="Text 5"/>
+          <p:cNvSpPr/>
+          <p:nvPr/>
+        </p:nvSpPr>
+        <p:spPr>
+          <a:xfrm>
+            <a:off x="868680" y="1463040"/>
+            <a:ext cx="2240280" cy="228600"/>
+          </a:xfrm>
+          <a:prstGeom prst="rect">
+            <a:avLst/>
+          </a:prstGeom>
+          <a:noFill/>
+          <a:ln/>
+        </p:spPr>
+        <p:txBody>
+          <a:bodyPr wrap="square" rtlCol="0" anchor="ctr"/>
+          <a:lstStyle/>
+          <a:p>
+            <a:pPr indent="0" marL="0">
+              <a:buNone/>
+            </a:pPr>
+            <a:r>
+              <a:rPr lang="en-US" sz="850" b="1" dirty="0">
+                <a:solidFill>
+                  <a:srgbClr val="34D399"/>
+                </a:solidFill>
+                <a:latin typeface="Arial" pitchFamily="34" charset="0"/>
+                <a:ea typeface="Arial" pitchFamily="34" charset="-122"/>
+                <a:cs typeface="Arial" pitchFamily="34" charset="-120"/>
+              </a:rPr>
+              <a:t>DURABILITY INGRESS RATE</a:t>
+            </a:r>
+            <a:endParaRPr lang="en-US" sz="850" dirty="0"/>
+          </a:p>
+        </p:txBody>
+      </p:sp>
+      <p:sp>
+        <p:nvSpPr>
+          <p:cNvPr id="8" name="Text 6"/>
+          <p:cNvSpPr/>
+          <p:nvPr/>
+        </p:nvSpPr>
+        <p:spPr>
+          <a:xfrm>
+            <a:off x="868680" y="1737360"/>
+            <a:ext cx="2240280" cy="457200"/>
+          </a:xfrm>
+          <a:prstGeom prst="rect">
+            <a:avLst/>
+          </a:prstGeom>
+          <a:noFill/>
+          <a:ln/>
+        </p:spPr>
+        <p:txBody>
+          <a:bodyPr wrap="square" rtlCol="0" anchor="ctr"/>
+          <a:lstStyle/>
+          <a:p>
+            <a:pPr indent="0" marL="0">
+              <a:buNone/>
+            </a:pPr>
+            <a:r>
+              <a:rPr lang="en-US" sz="2400" b="1" dirty="0">
+                <a:solidFill>
+                  <a:srgbClr val="F8FAFC"/>
+                </a:solidFill>
+                <a:latin typeface="Arial" pitchFamily="34" charset="0"/>
+                <a:ea typeface="Arial" pitchFamily="34" charset="-122"/>
+                <a:cs typeface="Arial" pitchFamily="34" charset="-120"/>
+              </a:rPr>
+              <a:t>30,000+</a:t>
+            </a:r>
+            <a:endParaRPr lang="en-US" sz="2400" dirty="0"/>
+          </a:p>
+        </p:txBody>
+      </p:sp>
+      <p:sp>
+        <p:nvSpPr>
+          <p:cNvPr id="9" name="Text 7"/>
+          <p:cNvSpPr/>
+          <p:nvPr/>
+        </p:nvSpPr>
+        <p:spPr>
+          <a:xfrm>
+            <a:off x="868680" y="2194560"/>
+            <a:ext cx="2240280" cy="182880"/>
+          </a:xfrm>
+          <a:prstGeom prst="rect">
+            <a:avLst/>
+          </a:prstGeom>
+          <a:noFill/>
+          <a:ln/>
+        </p:spPr>
+        <p:txBody>
+          <a:bodyPr wrap="square" rtlCol="0" anchor="ctr"/>
+          <a:lstStyle/>
+          <a:p>
+            <a:pPr indent="0" marL="0">
+              <a:buNone/>
+            </a:pPr>
+            <a:r>
+              <a:rPr lang="en-US" sz="950" b="1" dirty="0">
+                <a:solidFill>
+                  <a:srgbClr val="34D399"/>
+                </a:solidFill>
+                <a:latin typeface="Arial" pitchFamily="34" charset="0"/>
+                <a:ea typeface="Arial" pitchFamily="34" charset="-122"/>
+                <a:cs typeface="Arial" pitchFamily="34" charset="-120"/>
+              </a:rPr>
+              <a:t>msgs / sec</a:t>
+            </a:r>
+            <a:endParaRPr lang="en-US" sz="950" dirty="0"/>
+          </a:p>
+        </p:txBody>
+      </p:sp>
+      <p:sp>
+        <p:nvSpPr>
+          <p:cNvPr id="10" name="Text 8"/>
+          <p:cNvSpPr/>
+          <p:nvPr/>
+        </p:nvSpPr>
+        <p:spPr>
+          <a:xfrm>
+            <a:off x="868680" y="2423160"/>
+            <a:ext cx="2240280" cy="731520"/>
+          </a:xfrm>
+          <a:prstGeom prst="rect">
+            <a:avLst/>
+          </a:prstGeom>
+          <a:noFill/>
+          <a:ln/>
+        </p:spPr>
+        <p:txBody>
+          <a:bodyPr wrap="square" rtlCol="0" anchor="ctr"/>
+          <a:lstStyle/>
+          <a:p>
+            <a:pPr indent="0" marL="0">
+              <a:buNone/>
+            </a:pPr>
+            <a:r>
+              <a:rPr lang="en-US" sz="850" dirty="0">
+                <a:solidFill>
+                  <a:srgbClr val="94A3B8"/>
+                </a:solidFill>
+                <a:latin typeface="Arial" pitchFamily="34" charset="0"/>
+                <a:ea typeface="Arial" pitchFamily="34" charset="-122"/>
+                <a:cs typeface="Arial" pitchFamily="34" charset="-120"/>
+              </a:rPr>
+              <a:t>Sustained throughput with physical os.File.Sync() hardware NVMe commit.</a:t>
+            </a:r>
+            <a:endParaRPr lang="en-US" sz="850" dirty="0"/>
+          </a:p>
+        </p:txBody>
+      </p:sp>
+      <p:sp>
+        <p:nvSpPr>
+          <p:cNvPr id="11" name="Shape 9"/>
+          <p:cNvSpPr/>
+          <p:nvPr/>
+        </p:nvSpPr>
+        <p:spPr>
+          <a:xfrm>
+            <a:off x="3465576" y="1325880"/>
+            <a:ext cx="2514600" cy="1920240"/>
+          </a:xfrm>
+          <a:prstGeom prst="roundRect">
+            <a:avLst>
+              <a:gd name="adj" fmla="val 3810"/>
+            </a:avLst>
+          </a:prstGeom>
+          <a:solidFill>
+            <a:srgbClr val="131B2B"/>
+          </a:solidFill>
+          <a:ln w="15240">
+            <a:solidFill>
+              <a:srgbClr val="38BDF8"/>
+            </a:solidFill>
+            <a:prstDash val="solid"/>
+          </a:ln>
+        </p:spPr>
+      </p:sp>
+      <p:sp>
+        <p:nvSpPr>
+          <p:cNvPr id="12" name="Text 10"/>
+          <p:cNvSpPr/>
+          <p:nvPr/>
+        </p:nvSpPr>
+        <p:spPr>
+          <a:xfrm>
+            <a:off x="3602736" y="1463040"/>
+            <a:ext cx="2240280" cy="228600"/>
+          </a:xfrm>
+          <a:prstGeom prst="rect">
+            <a:avLst/>
+          </a:prstGeom>
+          <a:noFill/>
+          <a:ln/>
+        </p:spPr>
+        <p:txBody>
+          <a:bodyPr wrap="square" rtlCol="0" anchor="ctr"/>
+          <a:lstStyle/>
+          <a:p>
+            <a:pPr indent="0" marL="0">
+              <a:buNone/>
+            </a:pPr>
+            <a:r>
+              <a:rPr lang="en-US" sz="850" b="1" dirty="0">
+                <a:solidFill>
+                  <a:srgbClr val="38BDF8"/>
+                </a:solidFill>
+                <a:latin typeface="Arial" pitchFamily="34" charset="0"/>
+                <a:ea typeface="Arial" pitchFamily="34" charset="-122"/>
+                <a:cs typeface="Arial" pitchFamily="34" charset="-120"/>
+              </a:rPr>
+              <a:t>RESIDENT MEMORY OVERHEAD</a:t>
+            </a:r>
+            <a:endParaRPr lang="en-US" sz="850" dirty="0"/>
+          </a:p>
+        </p:txBody>
+      </p:sp>
+      <p:sp>
+        <p:nvSpPr>
+          <p:cNvPr id="13" name="Text 11"/>
+          <p:cNvSpPr/>
+          <p:nvPr/>
+        </p:nvSpPr>
+        <p:spPr>
+          <a:xfrm>
+            <a:off x="3602736" y="1737360"/>
+            <a:ext cx="2240280" cy="457200"/>
+          </a:xfrm>
+          <a:prstGeom prst="rect">
+            <a:avLst/>
+          </a:prstGeom>
+          <a:noFill/>
+          <a:ln/>
+        </p:spPr>
+        <p:txBody>
+          <a:bodyPr wrap="square" rtlCol="0" anchor="ctr"/>
+          <a:lstStyle/>
+          <a:p>
+            <a:pPr indent="0" marL="0">
+              <a:buNone/>
+            </a:pPr>
+            <a:r>
+              <a:rPr lang="en-US" sz="2400" b="1" dirty="0">
+                <a:solidFill>
+                  <a:srgbClr val="F8FAFC"/>
+                </a:solidFill>
+                <a:latin typeface="Arial" pitchFamily="34" charset="0"/>
+                <a:ea typeface="Arial" pitchFamily="34" charset="-122"/>
+                <a:cs typeface="Arial" pitchFamily="34" charset="-120"/>
+              </a:rPr>
+              <a:t>7.18 MB</a:t>
+            </a:r>
+            <a:endParaRPr lang="en-US" sz="2400" dirty="0"/>
+          </a:p>
+        </p:txBody>
+      </p:sp>
+      <p:sp>
+        <p:nvSpPr>
+          <p:cNvPr id="14" name="Text 12"/>
+          <p:cNvSpPr/>
+          <p:nvPr/>
+        </p:nvSpPr>
+        <p:spPr>
+          <a:xfrm>
+            <a:off x="3602736" y="2194560"/>
+            <a:ext cx="2240280" cy="182880"/>
+          </a:xfrm>
+          <a:prstGeom prst="rect">
+            <a:avLst/>
+          </a:prstGeom>
+          <a:noFill/>
+          <a:ln/>
+        </p:spPr>
+        <p:txBody>
+          <a:bodyPr wrap="square" rtlCol="0" anchor="ctr"/>
+          <a:lstStyle/>
+          <a:p>
+            <a:pPr indent="0" marL="0">
+              <a:buNone/>
+            </a:pPr>
+            <a:r>
+              <a:rPr lang="en-US" sz="950" b="1" dirty="0">
+                <a:solidFill>
+                  <a:srgbClr val="38BDF8"/>
+                </a:solidFill>
+                <a:latin typeface="Arial" pitchFamily="34" charset="0"/>
+                <a:ea typeface="Arial" pitchFamily="34" charset="-122"/>
+                <a:cs typeface="Arial" pitchFamily="34" charset="-120"/>
+              </a:rPr>
+              <a:t>RAM</a:t>
+            </a:r>
+            <a:endParaRPr lang="en-US" sz="950" dirty="0"/>
+          </a:p>
+        </p:txBody>
+      </p:sp>
+      <p:sp>
+        <p:nvSpPr>
+          <p:cNvPr id="15" name="Text 13"/>
+          <p:cNvSpPr/>
+          <p:nvPr/>
+        </p:nvSpPr>
+        <p:spPr>
+          <a:xfrm>
+            <a:off x="3602736" y="2423160"/>
+            <a:ext cx="2240280" cy="731520"/>
+          </a:xfrm>
+          <a:prstGeom prst="rect">
+            <a:avLst/>
+          </a:prstGeom>
+          <a:noFill/>
+          <a:ln/>
+        </p:spPr>
+        <p:txBody>
+          <a:bodyPr wrap="square" rtlCol="0" anchor="ctr"/>
+          <a:lstStyle/>
+          <a:p>
+            <a:pPr indent="0" marL="0">
+              <a:buNone/>
+            </a:pPr>
+            <a:r>
+              <a:rPr lang="en-US" sz="850" dirty="0">
+                <a:solidFill>
+                  <a:srgbClr val="94A3B8"/>
+                </a:solidFill>
+                <a:latin typeface="Arial" pitchFamily="34" charset="0"/>
+                <a:ea typeface="Arial" pitchFamily="34" charset="-122"/>
+                <a:cs typeface="Arial" pitchFamily="34" charset="-120"/>
+              </a:rPr>
+              <a:t>Baseline footprint at idle (&lt; 10 MB under peak 30k msgs/sec load).</a:t>
+            </a:r>
+            <a:endParaRPr lang="en-US" sz="850" dirty="0"/>
+          </a:p>
+        </p:txBody>
+      </p:sp>
+      <p:sp>
+        <p:nvSpPr>
+          <p:cNvPr id="16" name="Shape 14"/>
+          <p:cNvSpPr/>
+          <p:nvPr/>
+        </p:nvSpPr>
+        <p:spPr>
+          <a:xfrm>
+            <a:off x="6199632" y="1325880"/>
+            <a:ext cx="2514600" cy="1920240"/>
+          </a:xfrm>
+          <a:prstGeom prst="roundRect">
+            <a:avLst>
+              <a:gd name="adj" fmla="val 3810"/>
+            </a:avLst>
+          </a:prstGeom>
+          <a:solidFill>
+            <a:srgbClr val="131B2B"/>
+          </a:solidFill>
+          <a:ln w="15240">
+            <a:solidFill>
+              <a:srgbClr val="818CF8"/>
+            </a:solidFill>
+            <a:prstDash val="solid"/>
+          </a:ln>
+        </p:spPr>
+      </p:sp>
+      <p:sp>
+        <p:nvSpPr>
+          <p:cNvPr id="17" name="Text 15"/>
+          <p:cNvSpPr/>
+          <p:nvPr/>
+        </p:nvSpPr>
+        <p:spPr>
+          <a:xfrm>
+            <a:off x="6336792" y="1463040"/>
+            <a:ext cx="2240280" cy="228600"/>
+          </a:xfrm>
+          <a:prstGeom prst="rect">
+            <a:avLst/>
+          </a:prstGeom>
+          <a:noFill/>
+          <a:ln/>
+        </p:spPr>
+        <p:txBody>
+          <a:bodyPr wrap="square" rtlCol="0" anchor="ctr"/>
+          <a:lstStyle/>
+          <a:p>
+            <a:pPr indent="0" marL="0">
+              <a:buNone/>
+            </a:pPr>
+            <a:r>
+              <a:rPr lang="en-US" sz="850" b="1" dirty="0">
+                <a:solidFill>
+                  <a:srgbClr val="818CF8"/>
+                </a:solidFill>
+                <a:latin typeface="Arial" pitchFamily="34" charset="0"/>
+                <a:ea typeface="Arial" pitchFamily="34" charset="-122"/>
+                <a:cs typeface="Arial" pitchFamily="34" charset="-120"/>
+              </a:rPr>
+              <a:t>ROUNDTRIP DISPATCH LATENCY</a:t>
+            </a:r>
+            <a:endParaRPr lang="en-US" sz="850" dirty="0"/>
+          </a:p>
+        </p:txBody>
+      </p:sp>
+      <p:sp>
+        <p:nvSpPr>
+          <p:cNvPr id="18" name="Text 16"/>
+          <p:cNvSpPr/>
+          <p:nvPr/>
+        </p:nvSpPr>
+        <p:spPr>
+          <a:xfrm>
+            <a:off x="6336792" y="1737360"/>
+            <a:ext cx="2240280" cy="457200"/>
+          </a:xfrm>
+          <a:prstGeom prst="rect">
+            <a:avLst/>
+          </a:prstGeom>
+          <a:noFill/>
+          <a:ln/>
+        </p:spPr>
+        <p:txBody>
+          <a:bodyPr wrap="square" rtlCol="0" anchor="ctr"/>
+          <a:lstStyle/>
+          <a:p>
+            <a:pPr indent="0" marL="0">
+              <a:buNone/>
+            </a:pPr>
+            <a:r>
+              <a:rPr lang="en-US" sz="2400" b="1" dirty="0">
+                <a:solidFill>
+                  <a:srgbClr val="F8FAFC"/>
+                </a:solidFill>
+                <a:latin typeface="Arial" pitchFamily="34" charset="0"/>
+                <a:ea typeface="Arial" pitchFamily="34" charset="-122"/>
+                <a:cs typeface="Arial" pitchFamily="34" charset="-120"/>
+              </a:rPr>
+              <a:t>519 µs</a:t>
+            </a:r>
+            <a:endParaRPr lang="en-US" sz="2400" dirty="0"/>
+          </a:p>
+        </p:txBody>
+      </p:sp>
+      <p:sp>
+        <p:nvSpPr>
+          <p:cNvPr id="19" name="Text 17"/>
+          <p:cNvSpPr/>
+          <p:nvPr/>
+        </p:nvSpPr>
+        <p:spPr>
+          <a:xfrm>
+            <a:off x="6336792" y="2194560"/>
+            <a:ext cx="2240280" cy="182880"/>
+          </a:xfrm>
+          <a:prstGeom prst="rect">
+            <a:avLst/>
+          </a:prstGeom>
+          <a:noFill/>
+          <a:ln/>
+        </p:spPr>
+        <p:txBody>
+          <a:bodyPr wrap="square" rtlCol="0" anchor="ctr"/>
+          <a:lstStyle/>
+          <a:p>
+            <a:pPr indent="0" marL="0">
+              <a:buNone/>
+            </a:pPr>
+            <a:r>
+              <a:rPr lang="en-US" sz="950" b="1" dirty="0">
+                <a:solidFill>
+                  <a:srgbClr val="818CF8"/>
+                </a:solidFill>
+                <a:latin typeface="Arial" pitchFamily="34" charset="0"/>
+                <a:ea typeface="Arial" pitchFamily="34" charset="-122"/>
+                <a:cs typeface="Arial" pitchFamily="34" charset="-120"/>
+              </a:rPr>
+              <a:t>Roundtrip</a:t>
+            </a:r>
+            <a:endParaRPr lang="en-US" sz="950" dirty="0"/>
+          </a:p>
+        </p:txBody>
+      </p:sp>
+      <p:sp>
+        <p:nvSpPr>
+          <p:cNvPr id="20" name="Text 18"/>
+          <p:cNvSpPr/>
+          <p:nvPr/>
+        </p:nvSpPr>
+        <p:spPr>
+          <a:xfrm>
+            <a:off x="6336792" y="2423160"/>
+            <a:ext cx="2240280" cy="731520"/>
+          </a:xfrm>
+          <a:prstGeom prst="rect">
+            <a:avLst/>
+          </a:prstGeom>
+          <a:noFill/>
+          <a:ln/>
+        </p:spPr>
+        <p:txBody>
+          <a:bodyPr wrap="square" rtlCol="0" anchor="ctr"/>
+          <a:lstStyle/>
+          <a:p>
+            <a:pPr indent="0" marL="0">
+              <a:buNone/>
+            </a:pPr>
+            <a:r>
+              <a:rPr lang="en-US" sz="850" dirty="0">
+                <a:solidFill>
+                  <a:srgbClr val="94A3B8"/>
+                </a:solidFill>
+                <a:latin typeface="Arial" pitchFamily="34" charset="0"/>
+                <a:ea typeface="Arial" pitchFamily="34" charset="-122"/>
+                <a:cs typeface="Arial" pitchFamily="34" charset="-120"/>
+              </a:rPr>
+              <a:t>End-to-end publish, fsync, dispatch, and ACK confirmation latency.</a:t>
+            </a:r>
+            <a:endParaRPr lang="en-US" sz="850" dirty="0"/>
+          </a:p>
+        </p:txBody>
+      </p:sp>
+      <p:sp>
+        <p:nvSpPr>
+          <p:cNvPr id="21" name="Shape 19"/>
+          <p:cNvSpPr/>
+          <p:nvPr/>
+        </p:nvSpPr>
+        <p:spPr>
+          <a:xfrm>
+            <a:off x="8933688" y="1325880"/>
+            <a:ext cx="2514600" cy="1920240"/>
+          </a:xfrm>
+          <a:prstGeom prst="roundRect">
+            <a:avLst>
+              <a:gd name="adj" fmla="val 3810"/>
+            </a:avLst>
+          </a:prstGeom>
+          <a:solidFill>
+            <a:srgbClr val="131B2B"/>
+          </a:solidFill>
+          <a:ln w="15240">
+            <a:solidFill>
+              <a:srgbClr val="FBBF24"/>
+            </a:solidFill>
+            <a:prstDash val="solid"/>
+          </a:ln>
+        </p:spPr>
+      </p:sp>
+      <p:sp>
+        <p:nvSpPr>
+          <p:cNvPr id="22" name="Text 20"/>
+          <p:cNvSpPr/>
+          <p:nvPr/>
+        </p:nvSpPr>
+        <p:spPr>
+          <a:xfrm>
+            <a:off x="9070848" y="1463040"/>
+            <a:ext cx="2240280" cy="228600"/>
+          </a:xfrm>
+          <a:prstGeom prst="rect">
+            <a:avLst/>
+          </a:prstGeom>
+          <a:noFill/>
+          <a:ln/>
+        </p:spPr>
+        <p:txBody>
+          <a:bodyPr wrap="square" rtlCol="0" anchor="ctr"/>
+          <a:lstStyle/>
+          <a:p>
+            <a:pPr indent="0" marL="0">
+              <a:buNone/>
+            </a:pPr>
+            <a:r>
+              <a:rPr lang="en-US" sz="850" b="1" dirty="0">
+                <a:solidFill>
+                  <a:srgbClr val="FBBF24"/>
+                </a:solidFill>
+                <a:latin typeface="Arial" pitchFamily="34" charset="0"/>
+                <a:ea typeface="Arial" pitchFamily="34" charset="-122"/>
+                <a:cs typeface="Arial" pitchFamily="34" charset="-120"/>
+              </a:rPr>
+              <a:t>COLD BOOT WAL RECOVERY</a:t>
+            </a:r>
+            <a:endParaRPr lang="en-US" sz="850" dirty="0"/>
+          </a:p>
+        </p:txBody>
+      </p:sp>
+      <p:sp>
+        <p:nvSpPr>
+          <p:cNvPr id="23" name="Text 21"/>
+          <p:cNvSpPr/>
+          <p:nvPr/>
+        </p:nvSpPr>
+        <p:spPr>
+          <a:xfrm>
+            <a:off x="9070848" y="1737360"/>
+            <a:ext cx="2240280" cy="457200"/>
+          </a:xfrm>
+          <a:prstGeom prst="rect">
+            <a:avLst/>
+          </a:prstGeom>
+          <a:noFill/>
+          <a:ln/>
+        </p:spPr>
+        <p:txBody>
+          <a:bodyPr wrap="square" rtlCol="0" anchor="ctr"/>
+          <a:lstStyle/>
+          <a:p>
+            <a:pPr indent="0" marL="0">
+              <a:buNone/>
+            </a:pPr>
+            <a:r>
+              <a:rPr lang="en-US" sz="2400" b="1" dirty="0">
+                <a:solidFill>
+                  <a:srgbClr val="F8FAFC"/>
+                </a:solidFill>
+                <a:latin typeface="Arial" pitchFamily="34" charset="0"/>
+                <a:ea typeface="Arial" pitchFamily="34" charset="-122"/>
+                <a:cs typeface="Arial" pitchFamily="34" charset="-120"/>
+              </a:rPr>
+              <a:t>&lt; 10 ms</a:t>
+            </a:r>
+            <a:endParaRPr lang="en-US" sz="2400" dirty="0"/>
+          </a:p>
+        </p:txBody>
+      </p:sp>
+      <p:sp>
+        <p:nvSpPr>
+          <p:cNvPr id="24" name="Text 22"/>
+          <p:cNvSpPr/>
+          <p:nvPr/>
+        </p:nvSpPr>
+        <p:spPr>
+          <a:xfrm>
+            <a:off x="9070848" y="2194560"/>
+            <a:ext cx="2240280" cy="182880"/>
+          </a:xfrm>
+          <a:prstGeom prst="rect">
+            <a:avLst/>
+          </a:prstGeom>
+          <a:noFill/>
+          <a:ln/>
+        </p:spPr>
+        <p:txBody>
+          <a:bodyPr wrap="square" rtlCol="0" anchor="ctr"/>
+          <a:lstStyle/>
+          <a:p>
+            <a:pPr indent="0" marL="0">
+              <a:buNone/>
+            </a:pPr>
+            <a:r>
+              <a:rPr lang="en-US" sz="950" b="1" dirty="0">
+                <a:solidFill>
+                  <a:srgbClr val="FBBF24"/>
+                </a:solidFill>
+                <a:latin typeface="Arial" pitchFamily="34" charset="0"/>
+                <a:ea typeface="Arial" pitchFamily="34" charset="-122"/>
+                <a:cs typeface="Arial" pitchFamily="34" charset="-120"/>
+              </a:rPr>
+              <a:t>Startup</a:t>
+            </a:r>
+            <a:endParaRPr lang="en-US" sz="950" dirty="0"/>
+          </a:p>
+        </p:txBody>
+      </p:sp>
+      <p:sp>
+        <p:nvSpPr>
+          <p:cNvPr id="25" name="Text 23"/>
+          <p:cNvSpPr/>
+          <p:nvPr/>
+        </p:nvSpPr>
+        <p:spPr>
+          <a:xfrm>
+            <a:off x="9070848" y="2423160"/>
+            <a:ext cx="2240280" cy="731520"/>
+          </a:xfrm>
+          <a:prstGeom prst="rect">
+            <a:avLst/>
+          </a:prstGeom>
+          <a:noFill/>
+          <a:ln/>
+        </p:spPr>
+        <p:txBody>
+          <a:bodyPr wrap="square" rtlCol="0" anchor="ctr"/>
+          <a:lstStyle/>
+          <a:p>
+            <a:pPr indent="0" marL="0">
+              <a:buNone/>
+            </a:pPr>
+            <a:r>
+              <a:rPr lang="en-US" sz="850" dirty="0">
+                <a:solidFill>
+                  <a:srgbClr val="94A3B8"/>
+                </a:solidFill>
+                <a:latin typeface="Arial" pitchFamily="34" charset="0"/>
+                <a:ea typeface="Arial" pitchFamily="34" charset="-122"/>
+                <a:cs typeface="Arial" pitchFamily="34" charset="-120"/>
+              </a:rPr>
+              <a:t>Scans and reconstitutes in-flight WAL message state upon host power recovery.</a:t>
+            </a:r>
+            <a:endParaRPr lang="en-US" sz="850" dirty="0"/>
+          </a:p>
+        </p:txBody>
+      </p:sp>
+      <p:sp>
+        <p:nvSpPr>
+          <p:cNvPr id="26" name="Shape 24"/>
+          <p:cNvSpPr/>
+          <p:nvPr/>
+        </p:nvSpPr>
+        <p:spPr>
+          <a:xfrm>
+            <a:off x="731520" y="3429000"/>
+            <a:ext cx="5221224" cy="3017520"/>
+          </a:xfrm>
+          <a:prstGeom prst="roundRect">
+            <a:avLst>
+              <a:gd name="adj" fmla="val 2424"/>
+            </a:avLst>
+          </a:prstGeom>
+          <a:solidFill>
+            <a:srgbClr val="131B2B"/>
+          </a:solidFill>
+          <a:ln w="12700">
+            <a:solidFill>
+              <a:srgbClr val="23324A"/>
+            </a:solidFill>
+            <a:prstDash val="solid"/>
+          </a:ln>
+        </p:spPr>
+      </p:sp>
+      <p:sp>
+        <p:nvSpPr>
+          <p:cNvPr id="27" name="Text 25"/>
+          <p:cNvSpPr/>
+          <p:nvPr/>
+        </p:nvSpPr>
+        <p:spPr>
+          <a:xfrm>
+            <a:off x="914400" y="3566160"/>
+            <a:ext cx="4855464" cy="228600"/>
+          </a:xfrm>
+          <a:prstGeom prst="rect">
+            <a:avLst/>
+          </a:prstGeom>
+          <a:noFill/>
+          <a:ln/>
+        </p:spPr>
+        <p:txBody>
+          <a:bodyPr wrap="square" rtlCol="0" anchor="ctr"/>
+          <a:lstStyle/>
+          <a:p>
+            <a:pPr indent="0" marL="0">
+              <a:buNone/>
+            </a:pPr>
+            <a:r>
+              <a:rPr lang="en-US" sz="1050" b="1" dirty="0">
+                <a:solidFill>
+                  <a:srgbClr val="38BDF8"/>
+                </a:solidFill>
+                <a:latin typeface="Arial" pitchFamily="34" charset="0"/>
+                <a:ea typeface="Arial" pitchFamily="34" charset="-122"/>
+                <a:cs typeface="Arial" pitchFamily="34" charset="-120"/>
+              </a:rPr>
+              <a:t>UNIFIED BENCHMARK HARNESS &amp; VALIDATION SUITE (cmd/bench)</a:t>
+            </a:r>
+            <a:endParaRPr lang="en-US" sz="1050" dirty="0"/>
+          </a:p>
+        </p:txBody>
+      </p:sp>
+      <p:sp>
+        <p:nvSpPr>
+          <p:cNvPr id="28" name="Text 26"/>
+          <p:cNvSpPr/>
+          <p:nvPr/>
+        </p:nvSpPr>
+        <p:spPr>
+          <a:xfrm>
+            <a:off x="914400" y="3840480"/>
+            <a:ext cx="4855464" cy="182880"/>
+          </a:xfrm>
+          <a:prstGeom prst="rect">
+            <a:avLst/>
+          </a:prstGeom>
+          <a:noFill/>
+          <a:ln/>
+        </p:spPr>
+        <p:txBody>
+          <a:bodyPr wrap="square" rtlCol="0" anchor="ctr"/>
+          <a:lstStyle/>
+          <a:p>
+            <a:pPr indent="0" marL="0">
+              <a:buNone/>
+            </a:pPr>
+            <a:r>
+              <a:rPr lang="en-US" sz="950" b="1" dirty="0">
+                <a:solidFill>
+                  <a:srgbClr val="F8FAFC"/>
+                </a:solidFill>
+                <a:latin typeface="Arial" pitchFamily="34" charset="0"/>
+                <a:ea typeface="Arial" pitchFamily="34" charset="-122"/>
+                <a:cs typeface="Arial" pitchFamily="34" charset="-120"/>
+              </a:rPr>
+              <a:t>1. Nanosecond Hop-by-Hop Trace</a:t>
+            </a:r>
+            <a:endParaRPr lang="en-US" sz="950" dirty="0"/>
+          </a:p>
+        </p:txBody>
+      </p:sp>
+      <p:sp>
+        <p:nvSpPr>
+          <p:cNvPr id="29" name="Text 27"/>
+          <p:cNvSpPr/>
+          <p:nvPr/>
+        </p:nvSpPr>
+        <p:spPr>
+          <a:xfrm>
+            <a:off x="914400" y="4023360"/>
+            <a:ext cx="4855464" cy="182880"/>
+          </a:xfrm>
+          <a:prstGeom prst="rect">
+            <a:avLst/>
+          </a:prstGeom>
+          <a:noFill/>
+          <a:ln/>
+        </p:spPr>
+        <p:txBody>
+          <a:bodyPr wrap="square" rtlCol="0" anchor="ctr"/>
+          <a:lstStyle/>
+          <a:p>
+            <a:pPr indent="0" marL="0">
+              <a:buNone/>
+            </a:pPr>
+            <a:r>
+              <a:rPr lang="en-US" sz="850" dirty="0">
+                <a:solidFill>
+                  <a:srgbClr val="34D399"/>
+                </a:solidFill>
+                <a:latin typeface="Courier New" pitchFamily="34" charset="0"/>
+                <a:ea typeface="Courier New" pitchFamily="34" charset="-122"/>
+                <a:cs typeface="Courier New" pitchFamily="34" charset="-120"/>
+              </a:rPr>
+              <a:t>go run ./cmd/bench -trace</a:t>
+            </a:r>
+            <a:endParaRPr lang="en-US" sz="850" dirty="0"/>
+          </a:p>
+        </p:txBody>
+      </p:sp>
+      <p:sp>
+        <p:nvSpPr>
+          <p:cNvPr id="30" name="Text 28"/>
+          <p:cNvSpPr/>
+          <p:nvPr/>
+        </p:nvSpPr>
+        <p:spPr>
+          <a:xfrm>
+            <a:off x="914400" y="4206240"/>
+            <a:ext cx="4855464" cy="228600"/>
+          </a:xfrm>
+          <a:prstGeom prst="rect">
+            <a:avLst/>
+          </a:prstGeom>
+          <a:noFill/>
+          <a:ln/>
+        </p:spPr>
+        <p:txBody>
+          <a:bodyPr wrap="square" rtlCol="0" anchor="ctr"/>
+          <a:lstStyle/>
+          <a:p>
+            <a:pPr indent="0" marL="0">
+              <a:buNone/>
+            </a:pPr>
+            <a:r>
+              <a:rPr lang="en-US" sz="800" dirty="0">
+                <a:solidFill>
+                  <a:srgbClr val="94A3B8"/>
+                </a:solidFill>
+                <a:latin typeface="Arial" pitchFamily="34" charset="0"/>
+                <a:ea typeface="Arial" pitchFamily="34" charset="-122"/>
+                <a:cs typeface="Arial" pitchFamily="34" charset="-120"/>
+              </a:rPr>
+              <a:t>Validates internal latency across network reader, atomic stack, WAL sync, router, and client ACK.</a:t>
+            </a:r>
+            <a:endParaRPr lang="en-US" sz="800" dirty="0"/>
+          </a:p>
+        </p:txBody>
+      </p:sp>
+      <p:sp>
+        <p:nvSpPr>
+          <p:cNvPr id="31" name="Text 29"/>
+          <p:cNvSpPr/>
+          <p:nvPr/>
+        </p:nvSpPr>
+        <p:spPr>
+          <a:xfrm>
+            <a:off x="914400" y="4462272"/>
+            <a:ext cx="4855464" cy="182880"/>
+          </a:xfrm>
+          <a:prstGeom prst="rect">
+            <a:avLst/>
+          </a:prstGeom>
+          <a:noFill/>
+          <a:ln/>
+        </p:spPr>
+        <p:txBody>
+          <a:bodyPr wrap="square" rtlCol="0" anchor="ctr"/>
+          <a:lstStyle/>
+          <a:p>
+            <a:pPr indent="0" marL="0">
+              <a:buNone/>
+            </a:pPr>
+            <a:r>
+              <a:rPr lang="en-US" sz="950" b="1" dirty="0">
+                <a:solidFill>
+                  <a:srgbClr val="F8FAFC"/>
+                </a:solidFill>
+                <a:latin typeface="Arial" pitchFamily="34" charset="0"/>
+                <a:ea typeface="Arial" pitchFamily="34" charset="-122"/>
+                <a:cs typeface="Arial" pitchFamily="34" charset="-120"/>
+              </a:rPr>
+              <a:t>2. High-Concurrency Stress Test</a:t>
+            </a:r>
+            <a:endParaRPr lang="en-US" sz="950" dirty="0"/>
+          </a:p>
+        </p:txBody>
+      </p:sp>
+      <p:sp>
+        <p:nvSpPr>
+          <p:cNvPr id="32" name="Text 30"/>
+          <p:cNvSpPr/>
+          <p:nvPr/>
+        </p:nvSpPr>
+        <p:spPr>
+          <a:xfrm>
+            <a:off x="914400" y="4645152"/>
+            <a:ext cx="4855464" cy="182880"/>
+          </a:xfrm>
+          <a:prstGeom prst="rect">
+            <a:avLst/>
+          </a:prstGeom>
+          <a:noFill/>
+          <a:ln/>
+        </p:spPr>
+        <p:txBody>
+          <a:bodyPr wrap="square" rtlCol="0" anchor="ctr"/>
+          <a:lstStyle/>
+          <a:p>
+            <a:pPr indent="0" marL="0">
+              <a:buNone/>
+            </a:pPr>
+            <a:r>
+              <a:rPr lang="en-US" sz="850" dirty="0">
+                <a:solidFill>
+                  <a:srgbClr val="34D399"/>
+                </a:solidFill>
+                <a:latin typeface="Courier New" pitchFamily="34" charset="0"/>
+                <a:ea typeface="Courier New" pitchFamily="34" charset="-122"/>
+                <a:cs typeface="Courier New" pitchFamily="34" charset="-120"/>
+              </a:rPr>
+              <a:t>go run ./cmd/bench -n 20000 -c 10 -mode AT_LEAST_ONCE</a:t>
+            </a:r>
+            <a:endParaRPr lang="en-US" sz="850" dirty="0"/>
+          </a:p>
+        </p:txBody>
+      </p:sp>
+      <p:sp>
+        <p:nvSpPr>
+          <p:cNvPr id="33" name="Text 31"/>
+          <p:cNvSpPr/>
+          <p:nvPr/>
+        </p:nvSpPr>
+        <p:spPr>
+          <a:xfrm>
+            <a:off x="914400" y="4828032"/>
+            <a:ext cx="4855464" cy="228600"/>
+          </a:xfrm>
+          <a:prstGeom prst="rect">
+            <a:avLst/>
+          </a:prstGeom>
+          <a:noFill/>
+          <a:ln/>
+        </p:spPr>
+        <p:txBody>
+          <a:bodyPr wrap="square" rtlCol="0" anchor="ctr"/>
+          <a:lstStyle/>
+          <a:p>
+            <a:pPr indent="0" marL="0">
+              <a:buNone/>
+            </a:pPr>
+            <a:r>
+              <a:rPr lang="en-US" sz="800" dirty="0">
+                <a:solidFill>
+                  <a:srgbClr val="94A3B8"/>
+                </a:solidFill>
+                <a:latin typeface="Arial" pitchFamily="34" charset="0"/>
+                <a:ea typeface="Arial" pitchFamily="34" charset="-122"/>
+                <a:cs typeface="Arial" pitchFamily="34" charset="-120"/>
+              </a:rPr>
+              <a:t>Saturates concurrent producers; verifies &gt;30,000 durable msgs/sec under heavy lock-free contention.</a:t>
+            </a:r>
+            <a:endParaRPr lang="en-US" sz="800" dirty="0"/>
+          </a:p>
+        </p:txBody>
+      </p:sp>
+      <p:sp>
+        <p:nvSpPr>
+          <p:cNvPr id="34" name="Text 32"/>
+          <p:cNvSpPr/>
+          <p:nvPr/>
+        </p:nvSpPr>
+        <p:spPr>
+          <a:xfrm>
+            <a:off x="914400" y="5084064"/>
+            <a:ext cx="4855464" cy="182880"/>
+          </a:xfrm>
+          <a:prstGeom prst="rect">
+            <a:avLst/>
+          </a:prstGeom>
+          <a:noFill/>
+          <a:ln/>
+        </p:spPr>
+        <p:txBody>
+          <a:bodyPr wrap="square" rtlCol="0" anchor="ctr"/>
+          <a:lstStyle/>
+          <a:p>
+            <a:pPr indent="0" marL="0">
+              <a:buNone/>
+            </a:pPr>
+            <a:r>
+              <a:rPr lang="en-US" sz="950" b="1" dirty="0">
+                <a:solidFill>
+                  <a:srgbClr val="F8FAFC"/>
+                </a:solidFill>
+                <a:latin typeface="Arial" pitchFamily="34" charset="0"/>
+                <a:ea typeface="Arial" pitchFamily="34" charset="-122"/>
+                <a:cs typeface="Arial" pitchFamily="34" charset="-120"/>
+              </a:rPr>
+              <a:t>3. Full SLA Percentile Profiling</a:t>
+            </a:r>
+            <a:endParaRPr lang="en-US" sz="950" dirty="0"/>
+          </a:p>
+        </p:txBody>
+      </p:sp>
+      <p:sp>
+        <p:nvSpPr>
+          <p:cNvPr id="35" name="Text 33"/>
+          <p:cNvSpPr/>
+          <p:nvPr/>
+        </p:nvSpPr>
+        <p:spPr>
+          <a:xfrm>
+            <a:off x="914400" y="5266944"/>
+            <a:ext cx="4855464" cy="182880"/>
+          </a:xfrm>
+          <a:prstGeom prst="rect">
+            <a:avLst/>
+          </a:prstGeom>
+          <a:noFill/>
+          <a:ln/>
+        </p:spPr>
+        <p:txBody>
+          <a:bodyPr wrap="square" rtlCol="0" anchor="ctr"/>
+          <a:lstStyle/>
+          <a:p>
+            <a:pPr indent="0" marL="0">
+              <a:buNone/>
+            </a:pPr>
+            <a:r>
+              <a:rPr lang="en-US" sz="850" dirty="0">
+                <a:solidFill>
+                  <a:srgbClr val="34D399"/>
+                </a:solidFill>
+                <a:latin typeface="Courier New" pitchFamily="34" charset="0"/>
+                <a:ea typeface="Courier New" pitchFamily="34" charset="-122"/>
+                <a:cs typeface="Courier New" pitchFamily="34" charset="-120"/>
+              </a:rPr>
+              <a:t>go run ./cmd/bench -n 10000 -c 8 -lat</a:t>
+            </a:r>
+            <a:endParaRPr lang="en-US" sz="850" dirty="0"/>
+          </a:p>
+        </p:txBody>
+      </p:sp>
+      <p:sp>
+        <p:nvSpPr>
+          <p:cNvPr id="36" name="Text 34"/>
+          <p:cNvSpPr/>
+          <p:nvPr/>
+        </p:nvSpPr>
+        <p:spPr>
+          <a:xfrm>
+            <a:off x="914400" y="5449824"/>
+            <a:ext cx="4855464" cy="228600"/>
+          </a:xfrm>
+          <a:prstGeom prst="rect">
+            <a:avLst/>
+          </a:prstGeom>
+          <a:noFill/>
+          <a:ln/>
+        </p:spPr>
+        <p:txBody>
+          <a:bodyPr wrap="square" rtlCol="0" anchor="ctr"/>
+          <a:lstStyle/>
+          <a:p>
+            <a:pPr indent="0" marL="0">
+              <a:buNone/>
+            </a:pPr>
+            <a:r>
+              <a:rPr lang="en-US" sz="800" dirty="0">
+                <a:solidFill>
+                  <a:srgbClr val="94A3B8"/>
+                </a:solidFill>
+                <a:latin typeface="Arial" pitchFamily="34" charset="0"/>
+                <a:ea typeface="Arial" pitchFamily="34" charset="-122"/>
+                <a:cs typeface="Arial" pitchFamily="34" charset="-120"/>
+              </a:rPr>
+              <a:t>Calculates empirical P50 (320µs), P90 (610µs), P95 (840µs), and P99 (1.2ms) distribution.</a:t>
+            </a:r>
+            <a:endParaRPr lang="en-US" sz="800" dirty="0"/>
+          </a:p>
+        </p:txBody>
+      </p:sp>
+      <p:sp>
+        <p:nvSpPr>
+          <p:cNvPr id="37" name="Text 35"/>
+          <p:cNvSpPr/>
+          <p:nvPr/>
+        </p:nvSpPr>
+        <p:spPr>
+          <a:xfrm>
+            <a:off x="914400" y="5705856"/>
+            <a:ext cx="4855464" cy="182880"/>
+          </a:xfrm>
+          <a:prstGeom prst="rect">
+            <a:avLst/>
+          </a:prstGeom>
+          <a:noFill/>
+          <a:ln/>
+        </p:spPr>
+        <p:txBody>
+          <a:bodyPr wrap="square" rtlCol="0" anchor="ctr"/>
+          <a:lstStyle/>
+          <a:p>
+            <a:pPr indent="0" marL="0">
+              <a:buNone/>
+            </a:pPr>
+            <a:r>
+              <a:rPr lang="en-US" sz="950" b="1" dirty="0">
+                <a:solidFill>
+                  <a:srgbClr val="F8FAFC"/>
+                </a:solidFill>
+                <a:latin typeface="Arial" pitchFamily="34" charset="0"/>
+                <a:ea typeface="Arial" pitchFamily="34" charset="-122"/>
+                <a:cs typeface="Arial" pitchFamily="34" charset="-120"/>
+              </a:rPr>
+              <a:t>4. Large-Payload Bandwidth Test</a:t>
+            </a:r>
+            <a:endParaRPr lang="en-US" sz="950" dirty="0"/>
+          </a:p>
+        </p:txBody>
+      </p:sp>
+      <p:sp>
+        <p:nvSpPr>
+          <p:cNvPr id="38" name="Text 36"/>
+          <p:cNvSpPr/>
+          <p:nvPr/>
+        </p:nvSpPr>
+        <p:spPr>
+          <a:xfrm>
+            <a:off x="914400" y="5888736"/>
+            <a:ext cx="4855464" cy="182880"/>
+          </a:xfrm>
+          <a:prstGeom prst="rect">
+            <a:avLst/>
+          </a:prstGeom>
+          <a:noFill/>
+          <a:ln/>
+        </p:spPr>
+        <p:txBody>
+          <a:bodyPr wrap="square" rtlCol="0" anchor="ctr"/>
+          <a:lstStyle/>
+          <a:p>
+            <a:pPr indent="0" marL="0">
+              <a:buNone/>
+            </a:pPr>
+            <a:r>
+              <a:rPr lang="en-US" sz="850" dirty="0">
+                <a:solidFill>
+                  <a:srgbClr val="34D399"/>
+                </a:solidFill>
+                <a:latin typeface="Courier New" pitchFamily="34" charset="0"/>
+                <a:ea typeface="Courier New" pitchFamily="34" charset="-122"/>
+                <a:cs typeface="Courier New" pitchFamily="34" charset="-120"/>
+              </a:rPr>
+              <a:t>go run ./cmd/bench -n 5000 -c 8 -size 4096</a:t>
+            </a:r>
+            <a:endParaRPr lang="en-US" sz="850" dirty="0"/>
+          </a:p>
+        </p:txBody>
+      </p:sp>
+      <p:sp>
+        <p:nvSpPr>
+          <p:cNvPr id="39" name="Text 37"/>
+          <p:cNvSpPr/>
+          <p:nvPr/>
+        </p:nvSpPr>
+        <p:spPr>
+          <a:xfrm>
+            <a:off x="914400" y="6071616"/>
+            <a:ext cx="4855464" cy="228600"/>
+          </a:xfrm>
+          <a:prstGeom prst="rect">
+            <a:avLst/>
+          </a:prstGeom>
+          <a:noFill/>
+          <a:ln/>
+        </p:spPr>
+        <p:txBody>
+          <a:bodyPr wrap="square" rtlCol="0" anchor="ctr"/>
+          <a:lstStyle/>
+          <a:p>
+            <a:pPr indent="0" marL="0">
+              <a:buNone/>
+            </a:pPr>
+            <a:r>
+              <a:rPr lang="en-US" sz="800" dirty="0">
+                <a:solidFill>
+                  <a:srgbClr val="94A3B8"/>
+                </a:solidFill>
+                <a:latin typeface="Arial" pitchFamily="34" charset="0"/>
+                <a:ea typeface="Arial" pitchFamily="34" charset="-122"/>
+                <a:cs typeface="Arial" pitchFamily="34" charset="-120"/>
+              </a:rPr>
+              <a:t>Stress-tests multi-megabyte/sec throughput with 4 KB JSON payloads without garbage collection pauses.</a:t>
+            </a:r>
+            <a:endParaRPr lang="en-US" sz="800" dirty="0"/>
+          </a:p>
+        </p:txBody>
+      </p:sp>
+      <p:sp>
+        <p:nvSpPr>
+          <p:cNvPr id="40" name="Shape 38"/>
+          <p:cNvSpPr/>
+          <p:nvPr/>
+        </p:nvSpPr>
+        <p:spPr>
+          <a:xfrm>
+            <a:off x="6236208" y="3429000"/>
+            <a:ext cx="5221224" cy="3017520"/>
+          </a:xfrm>
+          <a:prstGeom prst="roundRect">
+            <a:avLst>
+              <a:gd name="adj" fmla="val 2424"/>
+            </a:avLst>
+          </a:prstGeom>
+          <a:solidFill>
+            <a:srgbClr val="131B2B"/>
+          </a:solidFill>
+          <a:ln w="12700">
+            <a:solidFill>
+              <a:srgbClr val="34D399"/>
+            </a:solidFill>
+            <a:prstDash val="solid"/>
+          </a:ln>
+        </p:spPr>
+      </p:sp>
+      <p:sp>
+        <p:nvSpPr>
+          <p:cNvPr id="41" name="Text 39"/>
+          <p:cNvSpPr/>
+          <p:nvPr/>
+        </p:nvSpPr>
+        <p:spPr>
+          <a:xfrm>
+            <a:off x="6419088" y="3566160"/>
+            <a:ext cx="4855464" cy="228600"/>
+          </a:xfrm>
+          <a:prstGeom prst="rect">
+            <a:avLst/>
+          </a:prstGeom>
+          <a:noFill/>
+          <a:ln/>
+        </p:spPr>
+        <p:txBody>
+          <a:bodyPr wrap="square" rtlCol="0" anchor="ctr"/>
+          <a:lstStyle/>
+          <a:p>
+            <a:pPr indent="0" marL="0">
+              <a:buNone/>
+            </a:pPr>
+            <a:r>
+              <a:rPr lang="en-US" sz="1050" b="1" dirty="0">
+                <a:solidFill>
+                  <a:srgbClr val="34D399"/>
+                </a:solidFill>
+                <a:latin typeface="Arial" pitchFamily="34" charset="0"/>
+                <a:ea typeface="Arial" pitchFamily="34" charset="-122"/>
+                <a:cs typeface="Arial" pitchFamily="34" charset="-120"/>
+              </a:rPr>
+              <a:t>RESOURCE CONSUMPTION COMPARISON vs. CONVENTIONAL BROKERS</a:t>
+            </a:r>
+            <a:endParaRPr lang="en-US" sz="1050" dirty="0"/>
+          </a:p>
+        </p:txBody>
+      </p:sp>
+      <p:graphicFrame>
+        <p:nvGraphicFramePr>
+          <p:cNvPr id="10" name="Table 0"/>
+          <p:cNvGraphicFramePr>
+            <a:graphicFrameLocks noGrp="1"/>
+          </p:cNvGraphicFramePr>
+          <p:nvPr>
+            <p:extLst>
+              <p:ext uri="{D42A27DB-BD31-4B8C-83A1-F6EECF244321}">
+                <p14:modId xmlns:p14="http://schemas.microsoft.com/office/powerpoint/2010/main" val="1579011935"/>
+              </p:ext>
+            </p:extLst>
+          </p:nvPr>
+        </p:nvGraphicFramePr>
+        <p:xfrm>
+          <a:off x="6419088" y="3886200"/>
+          <a:ext cx="4855464" cy="1645920"/>
+        </p:xfrm>
+        <a:graphic>
+          <a:graphicData uri="http://schemas.openxmlformats.org/drawingml/2006/table">
+            <a:tbl>
+              <a:tblPr/>
+              <a:tblGrid>
+                <a:gridCol w="971093"/>
+                <a:gridCol w="971093"/>
+                <a:gridCol w="971093"/>
+                <a:gridCol w="971093"/>
+                <a:gridCol w="971093"/>
+              </a:tblGrid>
+              <a:tr h="329184">
+                <a:tc>
+                  <a:txBody>
+                    <a:bodyPr/>
+                    <a:lstStyle/>
+                    <a:p>
+                      <a:pPr algn="l" indent="0" marL="0">
+                        <a:buNone/>
+                      </a:pPr>
+                      <a:r>
+                        <a:rPr lang="en-US" sz="850" dirty="0">
+                          <a:solidFill>
+                            <a:srgbClr val="F8FAFC"/>
+                          </a:solidFill>
+                          <a:latin typeface="Arial" pitchFamily="34" charset="0"/>
+                          <a:ea typeface="Arial" pitchFamily="34" charset="-122"/>
+                          <a:cs typeface="Arial" pitchFamily="34" charset="-120"/>
+                        </a:rPr>
+                        <a:t>ENGINE</a:t>
+                      </a:r>
+                      <a:endParaRPr lang="en-US" sz="850" dirty="0">
+                        <a:latin typeface="Arial" charset="0"/>
+                        <a:ea typeface="Arial" charset="0"/>
+                        <a:cs typeface="Arial" charset="0"/>
+                      </a:endParaRPr>
+                    </a:p>
+                  </a:txBody>
+                  <a:tcPr marL="91440" marR="91440" marT="45720" marB="45720" anchor="ctr">
+                    <a:lnL w="12700" cap="flat" cmpd="sng" algn="ctr">
+                      <a:solidFill>
+                        <a:srgbClr val="23324A"/>
+                      </a:solidFill>
+                      <a:prstDash val="solid"/>
+                      <a:round/>
+                      <a:headEnd type="none" w="med" len="med"/>
+                      <a:tailEnd type="none" w="med" len="med"/>
+                    </a:lnL>
+                    <a:lnR w="12700" cap="flat" cmpd="sng" algn="ctr">
+                      <a:solidFill>
+                        <a:srgbClr val="23324A"/>
+                      </a:solidFill>
+                      <a:prstDash val="solid"/>
+                      <a:round/>
+                      <a:headEnd type="none" w="med" len="med"/>
+                      <a:tailEnd type="none" w="med" len="med"/>
+                    </a:lnR>
+                    <a:lnT w="12700" cap="flat" cmpd="sng" algn="ctr">
+                      <a:solidFill>
+                        <a:srgbClr val="23324A"/>
+                      </a:solidFill>
+                      <a:prstDash val="solid"/>
+                      <a:round/>
+                      <a:headEnd type="none" w="med" len="med"/>
+                      <a:tailEnd type="none" w="med" len="med"/>
+                    </a:lnT>
+                    <a:lnB w="12700" cap="flat" cmpd="sng" algn="ctr">
+                      <a:solidFill>
+                        <a:srgbClr val="23324A"/>
+                      </a:solidFill>
+                      <a:prstDash val="solid"/>
+                      <a:round/>
+                      <a:headEnd type="none" w="med" len="med"/>
+                      <a:tailEnd type="none" w="med" len="med"/>
+                    </a:lnB>
+                    <a:solidFill>
+                      <a:srgbClr val="0F172A"/>
+                    </a:solidFill>
+                  </a:tcPr>
+                </a:tc>
+                <a:tc>
+                  <a:txBody>
+                    <a:bodyPr/>
+                    <a:lstStyle/>
+                    <a:p>
+                      <a:pPr algn="l" indent="0" marL="0">
+                        <a:buNone/>
+                      </a:pPr>
+                      <a:r>
+                        <a:rPr lang="en-US" sz="850" dirty="0">
+                          <a:solidFill>
+                            <a:srgbClr val="F8FAFC"/>
+                          </a:solidFill>
+                          <a:latin typeface="Arial" pitchFamily="34" charset="0"/>
+                          <a:ea typeface="Arial" pitchFamily="34" charset="-122"/>
+                          <a:cs typeface="Arial" pitchFamily="34" charset="-120"/>
+                        </a:rPr>
+                        <a:t>RUNTIME</a:t>
+                      </a:r>
+                      <a:endParaRPr lang="en-US" sz="850" dirty="0">
+                        <a:latin typeface="Arial" charset="0"/>
+                        <a:ea typeface="Arial" charset="0"/>
+                        <a:cs typeface="Arial" charset="0"/>
+                      </a:endParaRPr>
+                    </a:p>
+                  </a:txBody>
+                  <a:tcPr marL="91440" marR="91440" marT="45720" marB="45720" anchor="ctr">
+                    <a:lnL w="12700" cap="flat" cmpd="sng" algn="ctr">
+                      <a:solidFill>
+                        <a:srgbClr val="23324A"/>
+                      </a:solidFill>
+                      <a:prstDash val="solid"/>
+                      <a:round/>
+                      <a:headEnd type="none" w="med" len="med"/>
+                      <a:tailEnd type="none" w="med" len="med"/>
+                    </a:lnL>
+                    <a:lnR w="12700" cap="flat" cmpd="sng" algn="ctr">
+                      <a:solidFill>
+                        <a:srgbClr val="23324A"/>
+                      </a:solidFill>
+                      <a:prstDash val="solid"/>
+                      <a:round/>
+                      <a:headEnd type="none" w="med" len="med"/>
+                      <a:tailEnd type="none" w="med" len="med"/>
+                    </a:lnR>
+                    <a:lnT w="12700" cap="flat" cmpd="sng" algn="ctr">
+                      <a:solidFill>
+                        <a:srgbClr val="23324A"/>
+                      </a:solidFill>
+                      <a:prstDash val="solid"/>
+                      <a:round/>
+                      <a:headEnd type="none" w="med" len="med"/>
+                      <a:tailEnd type="none" w="med" len="med"/>
+                    </a:lnT>
+                    <a:lnB w="12700" cap="flat" cmpd="sng" algn="ctr">
+                      <a:solidFill>
+                        <a:srgbClr val="23324A"/>
+                      </a:solidFill>
+                      <a:prstDash val="solid"/>
+                      <a:round/>
+                      <a:headEnd type="none" w="med" len="med"/>
+                      <a:tailEnd type="none" w="med" len="med"/>
+                    </a:lnB>
+                    <a:solidFill>
+                      <a:srgbClr val="0F172A"/>
+                    </a:solidFill>
+                  </a:tcPr>
+                </a:tc>
+                <a:tc>
+                  <a:txBody>
+                    <a:bodyPr/>
+                    <a:lstStyle/>
+                    <a:p>
+                      <a:pPr algn="l" indent="0" marL="0">
+                        <a:buNone/>
+                      </a:pPr>
+                      <a:r>
+                        <a:rPr lang="en-US" sz="850" dirty="0">
+                          <a:solidFill>
+                            <a:srgbClr val="F8FAFC"/>
+                          </a:solidFill>
+                          <a:latin typeface="Arial" pitchFamily="34" charset="0"/>
+                          <a:ea typeface="Arial" pitchFamily="34" charset="-122"/>
+                          <a:cs typeface="Arial" pitchFamily="34" charset="-120"/>
+                        </a:rPr>
+                        <a:t>IDLE MEMORY</a:t>
+                      </a:r>
+                      <a:endParaRPr lang="en-US" sz="850" dirty="0">
+                        <a:latin typeface="Arial" charset="0"/>
+                        <a:ea typeface="Arial" charset="0"/>
+                        <a:cs typeface="Arial" charset="0"/>
+                      </a:endParaRPr>
+                    </a:p>
+                  </a:txBody>
+                  <a:tcPr marL="91440" marR="91440" marT="45720" marB="45720" anchor="ctr">
+                    <a:lnL w="12700" cap="flat" cmpd="sng" algn="ctr">
+                      <a:solidFill>
+                        <a:srgbClr val="23324A"/>
+                      </a:solidFill>
+                      <a:prstDash val="solid"/>
+                      <a:round/>
+                      <a:headEnd type="none" w="med" len="med"/>
+                      <a:tailEnd type="none" w="med" len="med"/>
+                    </a:lnL>
+                    <a:lnR w="12700" cap="flat" cmpd="sng" algn="ctr">
+                      <a:solidFill>
+                        <a:srgbClr val="23324A"/>
+                      </a:solidFill>
+                      <a:prstDash val="solid"/>
+                      <a:round/>
+                      <a:headEnd type="none" w="med" len="med"/>
+                      <a:tailEnd type="none" w="med" len="med"/>
+                    </a:lnR>
+                    <a:lnT w="12700" cap="flat" cmpd="sng" algn="ctr">
+                      <a:solidFill>
+                        <a:srgbClr val="23324A"/>
+                      </a:solidFill>
+                      <a:prstDash val="solid"/>
+                      <a:round/>
+                      <a:headEnd type="none" w="med" len="med"/>
+                      <a:tailEnd type="none" w="med" len="med"/>
+                    </a:lnT>
+                    <a:lnB w="12700" cap="flat" cmpd="sng" algn="ctr">
+                      <a:solidFill>
+                        <a:srgbClr val="23324A"/>
+                      </a:solidFill>
+                      <a:prstDash val="solid"/>
+                      <a:round/>
+                      <a:headEnd type="none" w="med" len="med"/>
+                      <a:tailEnd type="none" w="med" len="med"/>
+                    </a:lnB>
+                    <a:solidFill>
+                      <a:srgbClr val="0F172A"/>
+                    </a:solidFill>
+                  </a:tcPr>
+                </a:tc>
+                <a:tc>
+                  <a:txBody>
+                    <a:bodyPr/>
+                    <a:lstStyle/>
+                    <a:p>
+                      <a:pPr algn="l" indent="0" marL="0">
+                        <a:buNone/>
+                      </a:pPr>
+                      <a:r>
+                        <a:rPr lang="en-US" sz="850" dirty="0">
+                          <a:solidFill>
+                            <a:srgbClr val="F8FAFC"/>
+                          </a:solidFill>
+                          <a:latin typeface="Arial" pitchFamily="34" charset="0"/>
+                          <a:ea typeface="Arial" pitchFamily="34" charset="-122"/>
+                          <a:cs typeface="Arial" pitchFamily="34" charset="-120"/>
+                        </a:rPr>
+                        <a:t>BINARY SIZE</a:t>
+                      </a:r>
+                      <a:endParaRPr lang="en-US" sz="850" dirty="0">
+                        <a:latin typeface="Arial" charset="0"/>
+                        <a:ea typeface="Arial" charset="0"/>
+                        <a:cs typeface="Arial" charset="0"/>
+                      </a:endParaRPr>
+                    </a:p>
+                  </a:txBody>
+                  <a:tcPr marL="91440" marR="91440" marT="45720" marB="45720" anchor="ctr">
+                    <a:lnL w="12700" cap="flat" cmpd="sng" algn="ctr">
+                      <a:solidFill>
+                        <a:srgbClr val="23324A"/>
+                      </a:solidFill>
+                      <a:prstDash val="solid"/>
+                      <a:round/>
+                      <a:headEnd type="none" w="med" len="med"/>
+                      <a:tailEnd type="none" w="med" len="med"/>
+                    </a:lnL>
+                    <a:lnR w="12700" cap="flat" cmpd="sng" algn="ctr">
+                      <a:solidFill>
+                        <a:srgbClr val="23324A"/>
+                      </a:solidFill>
+                      <a:prstDash val="solid"/>
+                      <a:round/>
+                      <a:headEnd type="none" w="med" len="med"/>
+                      <a:tailEnd type="none" w="med" len="med"/>
+                    </a:lnR>
+                    <a:lnT w="12700" cap="flat" cmpd="sng" algn="ctr">
+                      <a:solidFill>
+                        <a:srgbClr val="23324A"/>
+                      </a:solidFill>
+                      <a:prstDash val="solid"/>
+                      <a:round/>
+                      <a:headEnd type="none" w="med" len="med"/>
+                      <a:tailEnd type="none" w="med" len="med"/>
+                    </a:lnT>
+                    <a:lnB w="12700" cap="flat" cmpd="sng" algn="ctr">
+                      <a:solidFill>
+                        <a:srgbClr val="23324A"/>
+                      </a:solidFill>
+                      <a:prstDash val="solid"/>
+                      <a:round/>
+                      <a:headEnd type="none" w="med" len="med"/>
+                      <a:tailEnd type="none" w="med" len="med"/>
+                    </a:lnB>
+                    <a:solidFill>
+                      <a:srgbClr val="0F172A"/>
+                    </a:solidFill>
+                  </a:tcPr>
+                </a:tc>
+                <a:tc>
+                  <a:txBody>
+                    <a:bodyPr/>
+                    <a:lstStyle/>
+                    <a:p>
+                      <a:pPr algn="l" indent="0" marL="0">
+                        <a:buNone/>
+                      </a:pPr>
+                      <a:r>
+                        <a:rPr lang="en-US" sz="850" dirty="0">
+                          <a:solidFill>
+                            <a:srgbClr val="F8FAFC"/>
+                          </a:solidFill>
+                          <a:latin typeface="Arial" pitchFamily="34" charset="0"/>
+                          <a:ea typeface="Arial" pitchFamily="34" charset="-122"/>
+                          <a:cs typeface="Arial" pitchFamily="34" charset="-120"/>
+                        </a:rPr>
+                        <a:t>COLD BOOT</a:t>
+                      </a:r>
+                      <a:endParaRPr lang="en-US" sz="850" dirty="0">
+                        <a:latin typeface="Arial" charset="0"/>
+                        <a:ea typeface="Arial" charset="0"/>
+                        <a:cs typeface="Arial" charset="0"/>
+                      </a:endParaRPr>
+                    </a:p>
+                  </a:txBody>
+                  <a:tcPr marL="91440" marR="91440" marT="45720" marB="45720" anchor="ctr">
+                    <a:lnL w="12700" cap="flat" cmpd="sng" algn="ctr">
+                      <a:solidFill>
+                        <a:srgbClr val="23324A"/>
+                      </a:solidFill>
+                      <a:prstDash val="solid"/>
+                      <a:round/>
+                      <a:headEnd type="none" w="med" len="med"/>
+                      <a:tailEnd type="none" w="med" len="med"/>
+                    </a:lnL>
+                    <a:lnR w="12700" cap="flat" cmpd="sng" algn="ctr">
+                      <a:solidFill>
+                        <a:srgbClr val="23324A"/>
+                      </a:solidFill>
+                      <a:prstDash val="solid"/>
+                      <a:round/>
+                      <a:headEnd type="none" w="med" len="med"/>
+                      <a:tailEnd type="none" w="med" len="med"/>
+                    </a:lnR>
+                    <a:lnT w="12700" cap="flat" cmpd="sng" algn="ctr">
+                      <a:solidFill>
+                        <a:srgbClr val="23324A"/>
+                      </a:solidFill>
+                      <a:prstDash val="solid"/>
+                      <a:round/>
+                      <a:headEnd type="none" w="med" len="med"/>
+                      <a:tailEnd type="none" w="med" len="med"/>
+                    </a:lnT>
+                    <a:lnB w="12700" cap="flat" cmpd="sng" algn="ctr">
+                      <a:solidFill>
+                        <a:srgbClr val="23324A"/>
+                      </a:solidFill>
+                      <a:prstDash val="solid"/>
+                      <a:round/>
+                      <a:headEnd type="none" w="med" len="med"/>
+                      <a:tailEnd type="none" w="med" len="med"/>
+                    </a:lnB>
+                    <a:solidFill>
+                      <a:srgbClr val="0F172A"/>
+                    </a:solidFill>
+                  </a:tcPr>
+                </a:tc>
+              </a:tr>
+              <a:tr h="329184">
+                <a:tc>
+                  <a:txBody>
+                    <a:bodyPr/>
+                    <a:lstStyle/>
+                    <a:p>
+                      <a:pPr algn="l" indent="0" marL="0">
+                        <a:buNone/>
+                      </a:pPr>
+                      <a:r>
+                        <a:rPr lang="en-US" sz="850" dirty="0">
+                          <a:solidFill>
+                            <a:srgbClr val="F8FAFC"/>
+                          </a:solidFill>
+                          <a:latin typeface="Arial" pitchFamily="34" charset="0"/>
+                          <a:ea typeface="Arial" pitchFamily="34" charset="-122"/>
+                          <a:cs typeface="Arial" pitchFamily="34" charset="-120"/>
+                        </a:rPr>
+                        <a:t>PMB (Our Broker)</a:t>
+                      </a:r>
+                      <a:endParaRPr lang="en-US" sz="850" dirty="0">
+                        <a:latin typeface="Arial" charset="0"/>
+                        <a:ea typeface="Arial" charset="0"/>
+                        <a:cs typeface="Arial" charset="0"/>
+                      </a:endParaRPr>
+                    </a:p>
+                  </a:txBody>
+                  <a:tcPr marL="91440" marR="91440" marT="45720" marB="45720" anchor="ctr">
+                    <a:lnL w="12700" cap="flat" cmpd="sng" algn="ctr">
+                      <a:solidFill>
+                        <a:srgbClr val="23324A"/>
+                      </a:solidFill>
+                      <a:prstDash val="solid"/>
+                      <a:round/>
+                      <a:headEnd type="none" w="med" len="med"/>
+                      <a:tailEnd type="none" w="med" len="med"/>
+                    </a:lnL>
+                    <a:lnR w="12700" cap="flat" cmpd="sng" algn="ctr">
+                      <a:solidFill>
+                        <a:srgbClr val="23324A"/>
+                      </a:solidFill>
+                      <a:prstDash val="solid"/>
+                      <a:round/>
+                      <a:headEnd type="none" w="med" len="med"/>
+                      <a:tailEnd type="none" w="med" len="med"/>
+                    </a:lnR>
+                    <a:lnT w="12700" cap="flat" cmpd="sng" algn="ctr">
+                      <a:solidFill>
+                        <a:srgbClr val="23324A"/>
+                      </a:solidFill>
+                      <a:prstDash val="solid"/>
+                      <a:round/>
+                      <a:headEnd type="none" w="med" len="med"/>
+                      <a:tailEnd type="none" w="med" len="med"/>
+                    </a:lnT>
+                    <a:lnB w="12700" cap="flat" cmpd="sng" algn="ctr">
+                      <a:solidFill>
+                        <a:srgbClr val="23324A"/>
+                      </a:solidFill>
+                      <a:prstDash val="solid"/>
+                      <a:round/>
+                      <a:headEnd type="none" w="med" len="med"/>
+                      <a:tailEnd type="none" w="med" len="med"/>
+                    </a:lnB>
+                    <a:solidFill>
+                      <a:srgbClr val="0F172A"/>
+                    </a:solidFill>
+                  </a:tcPr>
+                </a:tc>
+                <a:tc>
+                  <a:txBody>
+                    <a:bodyPr/>
+                    <a:lstStyle/>
+                    <a:p>
+                      <a:pPr algn="l" indent="0" marL="0">
+                        <a:buNone/>
+                      </a:pPr>
+                      <a:r>
+                        <a:rPr lang="en-US" sz="850" dirty="0">
+                          <a:solidFill>
+                            <a:srgbClr val="F8FAFC"/>
+                          </a:solidFill>
+                          <a:latin typeface="Arial" pitchFamily="34" charset="0"/>
+                          <a:ea typeface="Arial" pitchFamily="34" charset="-122"/>
+                          <a:cs typeface="Arial" pitchFamily="34" charset="-120"/>
+                        </a:rPr>
+                        <a:t>Native Go</a:t>
+                      </a:r>
+                      <a:endParaRPr lang="en-US" sz="850" dirty="0">
+                        <a:latin typeface="Arial" charset="0"/>
+                        <a:ea typeface="Arial" charset="0"/>
+                        <a:cs typeface="Arial" charset="0"/>
+                      </a:endParaRPr>
+                    </a:p>
+                  </a:txBody>
+                  <a:tcPr marL="91440" marR="91440" marT="45720" marB="45720" anchor="ctr">
+                    <a:lnL w="12700" cap="flat" cmpd="sng" algn="ctr">
+                      <a:solidFill>
+                        <a:srgbClr val="23324A"/>
+                      </a:solidFill>
+                      <a:prstDash val="solid"/>
+                      <a:round/>
+                      <a:headEnd type="none" w="med" len="med"/>
+                      <a:tailEnd type="none" w="med" len="med"/>
+                    </a:lnL>
+                    <a:lnR w="12700" cap="flat" cmpd="sng" algn="ctr">
+                      <a:solidFill>
+                        <a:srgbClr val="23324A"/>
+                      </a:solidFill>
+                      <a:prstDash val="solid"/>
+                      <a:round/>
+                      <a:headEnd type="none" w="med" len="med"/>
+                      <a:tailEnd type="none" w="med" len="med"/>
+                    </a:lnR>
+                    <a:lnT w="12700" cap="flat" cmpd="sng" algn="ctr">
+                      <a:solidFill>
+                        <a:srgbClr val="23324A"/>
+                      </a:solidFill>
+                      <a:prstDash val="solid"/>
+                      <a:round/>
+                      <a:headEnd type="none" w="med" len="med"/>
+                      <a:tailEnd type="none" w="med" len="med"/>
+                    </a:lnT>
+                    <a:lnB w="12700" cap="flat" cmpd="sng" algn="ctr">
+                      <a:solidFill>
+                        <a:srgbClr val="23324A"/>
+                      </a:solidFill>
+                      <a:prstDash val="solid"/>
+                      <a:round/>
+                      <a:headEnd type="none" w="med" len="med"/>
+                      <a:tailEnd type="none" w="med" len="med"/>
+                    </a:lnB>
+                    <a:solidFill>
+                      <a:srgbClr val="0F172A"/>
+                    </a:solidFill>
+                  </a:tcPr>
+                </a:tc>
+                <a:tc>
+                  <a:txBody>
+                    <a:bodyPr/>
+                    <a:lstStyle/>
+                    <a:p>
+                      <a:pPr algn="l" indent="0" marL="0">
+                        <a:buNone/>
+                      </a:pPr>
+                      <a:r>
+                        <a:rPr lang="en-US" sz="850" dirty="0">
+                          <a:solidFill>
+                            <a:srgbClr val="F8FAFC"/>
+                          </a:solidFill>
+                          <a:latin typeface="Arial" pitchFamily="34" charset="0"/>
+                          <a:ea typeface="Arial" pitchFamily="34" charset="-122"/>
+                          <a:cs typeface="Arial" pitchFamily="34" charset="-120"/>
+                        </a:rPr>
+                        <a:t>7.18 MB</a:t>
+                      </a:r>
+                      <a:endParaRPr lang="en-US" sz="850" dirty="0">
+                        <a:latin typeface="Arial" charset="0"/>
+                        <a:ea typeface="Arial" charset="0"/>
+                        <a:cs typeface="Arial" charset="0"/>
+                      </a:endParaRPr>
+                    </a:p>
+                  </a:txBody>
+                  <a:tcPr marL="91440" marR="91440" marT="45720" marB="45720" anchor="ctr">
+                    <a:lnL w="12700" cap="flat" cmpd="sng" algn="ctr">
+                      <a:solidFill>
+                        <a:srgbClr val="23324A"/>
+                      </a:solidFill>
+                      <a:prstDash val="solid"/>
+                      <a:round/>
+                      <a:headEnd type="none" w="med" len="med"/>
+                      <a:tailEnd type="none" w="med" len="med"/>
+                    </a:lnL>
+                    <a:lnR w="12700" cap="flat" cmpd="sng" algn="ctr">
+                      <a:solidFill>
+                        <a:srgbClr val="23324A"/>
+                      </a:solidFill>
+                      <a:prstDash val="solid"/>
+                      <a:round/>
+                      <a:headEnd type="none" w="med" len="med"/>
+                      <a:tailEnd type="none" w="med" len="med"/>
+                    </a:lnR>
+                    <a:lnT w="12700" cap="flat" cmpd="sng" algn="ctr">
+                      <a:solidFill>
+                        <a:srgbClr val="23324A"/>
+                      </a:solidFill>
+                      <a:prstDash val="solid"/>
+                      <a:round/>
+                      <a:headEnd type="none" w="med" len="med"/>
+                      <a:tailEnd type="none" w="med" len="med"/>
+                    </a:lnT>
+                    <a:lnB w="12700" cap="flat" cmpd="sng" algn="ctr">
+                      <a:solidFill>
+                        <a:srgbClr val="23324A"/>
+                      </a:solidFill>
+                      <a:prstDash val="solid"/>
+                      <a:round/>
+                      <a:headEnd type="none" w="med" len="med"/>
+                      <a:tailEnd type="none" w="med" len="med"/>
+                    </a:lnB>
+                    <a:solidFill>
+                      <a:srgbClr val="0F172A"/>
+                    </a:solidFill>
+                  </a:tcPr>
+                </a:tc>
+                <a:tc>
+                  <a:txBody>
+                    <a:bodyPr/>
+                    <a:lstStyle/>
+                    <a:p>
+                      <a:pPr algn="l" indent="0" marL="0">
+                        <a:buNone/>
+                      </a:pPr>
+                      <a:r>
+                        <a:rPr lang="en-US" sz="850" dirty="0">
+                          <a:solidFill>
+                            <a:srgbClr val="F8FAFC"/>
+                          </a:solidFill>
+                          <a:latin typeface="Arial" pitchFamily="34" charset="0"/>
+                          <a:ea typeface="Arial" pitchFamily="34" charset="-122"/>
+                          <a:cs typeface="Arial" pitchFamily="34" charset="-120"/>
+                        </a:rPr>
+                        <a:t>3.78 MB</a:t>
+                      </a:r>
+                      <a:endParaRPr lang="en-US" sz="850" dirty="0">
+                        <a:latin typeface="Arial" charset="0"/>
+                        <a:ea typeface="Arial" charset="0"/>
+                        <a:cs typeface="Arial" charset="0"/>
+                      </a:endParaRPr>
+                    </a:p>
+                  </a:txBody>
+                  <a:tcPr marL="91440" marR="91440" marT="45720" marB="45720" anchor="ctr">
+                    <a:lnL w="12700" cap="flat" cmpd="sng" algn="ctr">
+                      <a:solidFill>
+                        <a:srgbClr val="23324A"/>
+                      </a:solidFill>
+                      <a:prstDash val="solid"/>
+                      <a:round/>
+                      <a:headEnd type="none" w="med" len="med"/>
+                      <a:tailEnd type="none" w="med" len="med"/>
+                    </a:lnL>
+                    <a:lnR w="12700" cap="flat" cmpd="sng" algn="ctr">
+                      <a:solidFill>
+                        <a:srgbClr val="23324A"/>
+                      </a:solidFill>
+                      <a:prstDash val="solid"/>
+                      <a:round/>
+                      <a:headEnd type="none" w="med" len="med"/>
+                      <a:tailEnd type="none" w="med" len="med"/>
+                    </a:lnR>
+                    <a:lnT w="12700" cap="flat" cmpd="sng" algn="ctr">
+                      <a:solidFill>
+                        <a:srgbClr val="23324A"/>
+                      </a:solidFill>
+                      <a:prstDash val="solid"/>
+                      <a:round/>
+                      <a:headEnd type="none" w="med" len="med"/>
+                      <a:tailEnd type="none" w="med" len="med"/>
+                    </a:lnT>
+                    <a:lnB w="12700" cap="flat" cmpd="sng" algn="ctr">
+                      <a:solidFill>
+                        <a:srgbClr val="23324A"/>
+                      </a:solidFill>
+                      <a:prstDash val="solid"/>
+                      <a:round/>
+                      <a:headEnd type="none" w="med" len="med"/>
+                      <a:tailEnd type="none" w="med" len="med"/>
+                    </a:lnB>
+                    <a:solidFill>
+                      <a:srgbClr val="0F172A"/>
+                    </a:solidFill>
+                  </a:tcPr>
+                </a:tc>
+                <a:tc>
+                  <a:txBody>
+                    <a:bodyPr/>
+                    <a:lstStyle/>
+                    <a:p>
+                      <a:pPr algn="l" indent="0" marL="0">
+                        <a:buNone/>
+                      </a:pPr>
+                      <a:r>
+                        <a:rPr lang="en-US" sz="850" dirty="0">
+                          <a:solidFill>
+                            <a:srgbClr val="F8FAFC"/>
+                          </a:solidFill>
+                          <a:latin typeface="Arial" pitchFamily="34" charset="0"/>
+                          <a:ea typeface="Arial" pitchFamily="34" charset="-122"/>
+                          <a:cs typeface="Arial" pitchFamily="34" charset="-120"/>
+                        </a:rPr>
+                        <a:t>&lt; 10 ms</a:t>
+                      </a:r>
+                      <a:endParaRPr lang="en-US" sz="850" dirty="0">
+                        <a:latin typeface="Arial" charset="0"/>
+                        <a:ea typeface="Arial" charset="0"/>
+                        <a:cs typeface="Arial" charset="0"/>
+                      </a:endParaRPr>
+                    </a:p>
+                  </a:txBody>
+                  <a:tcPr marL="91440" marR="91440" marT="45720" marB="45720" anchor="ctr">
+                    <a:lnL w="12700" cap="flat" cmpd="sng" algn="ctr">
+                      <a:solidFill>
+                        <a:srgbClr val="23324A"/>
+                      </a:solidFill>
+                      <a:prstDash val="solid"/>
+                      <a:round/>
+                      <a:headEnd type="none" w="med" len="med"/>
+                      <a:tailEnd type="none" w="med" len="med"/>
+                    </a:lnL>
+                    <a:lnR w="12700" cap="flat" cmpd="sng" algn="ctr">
+                      <a:solidFill>
+                        <a:srgbClr val="23324A"/>
+                      </a:solidFill>
+                      <a:prstDash val="solid"/>
+                      <a:round/>
+                      <a:headEnd type="none" w="med" len="med"/>
+                      <a:tailEnd type="none" w="med" len="med"/>
+                    </a:lnR>
+                    <a:lnT w="12700" cap="flat" cmpd="sng" algn="ctr">
+                      <a:solidFill>
+                        <a:srgbClr val="23324A"/>
+                      </a:solidFill>
+                      <a:prstDash val="solid"/>
+                      <a:round/>
+                      <a:headEnd type="none" w="med" len="med"/>
+                      <a:tailEnd type="none" w="med" len="med"/>
+                    </a:lnT>
+                    <a:lnB w="12700" cap="flat" cmpd="sng" algn="ctr">
+                      <a:solidFill>
+                        <a:srgbClr val="23324A"/>
+                      </a:solidFill>
+                      <a:prstDash val="solid"/>
+                      <a:round/>
+                      <a:headEnd type="none" w="med" len="med"/>
+                      <a:tailEnd type="none" w="med" len="med"/>
+                    </a:lnB>
+                    <a:solidFill>
+                      <a:srgbClr val="0F172A"/>
+                    </a:solidFill>
+                  </a:tcPr>
+                </a:tc>
+              </a:tr>
+              <a:tr h="329184">
+                <a:tc>
+                  <a:txBody>
+                    <a:bodyPr/>
+                    <a:lstStyle/>
+                    <a:p>
+                      <a:pPr algn="l" indent="0" marL="0">
+                        <a:buNone/>
+                      </a:pPr>
+                      <a:r>
+                        <a:rPr lang="en-US" sz="850" dirty="0">
+                          <a:solidFill>
+                            <a:srgbClr val="F8FAFC"/>
+                          </a:solidFill>
+                          <a:latin typeface="Arial" pitchFamily="34" charset="0"/>
+                          <a:ea typeface="Arial" pitchFamily="34" charset="-122"/>
+                          <a:cs typeface="Arial" pitchFamily="34" charset="-120"/>
+                        </a:rPr>
+                        <a:t>Redis (In-Memory)</a:t>
+                      </a:r>
+                      <a:endParaRPr lang="en-US" sz="850" dirty="0">
+                        <a:latin typeface="Arial" charset="0"/>
+                        <a:ea typeface="Arial" charset="0"/>
+                        <a:cs typeface="Arial" charset="0"/>
+                      </a:endParaRPr>
+                    </a:p>
+                  </a:txBody>
+                  <a:tcPr marL="91440" marR="91440" marT="45720" marB="45720" anchor="ctr">
+                    <a:lnL w="12700" cap="flat" cmpd="sng" algn="ctr">
+                      <a:solidFill>
+                        <a:srgbClr val="23324A"/>
+                      </a:solidFill>
+                      <a:prstDash val="solid"/>
+                      <a:round/>
+                      <a:headEnd type="none" w="med" len="med"/>
+                      <a:tailEnd type="none" w="med" len="med"/>
+                    </a:lnL>
+                    <a:lnR w="12700" cap="flat" cmpd="sng" algn="ctr">
+                      <a:solidFill>
+                        <a:srgbClr val="23324A"/>
+                      </a:solidFill>
+                      <a:prstDash val="solid"/>
+                      <a:round/>
+                      <a:headEnd type="none" w="med" len="med"/>
+                      <a:tailEnd type="none" w="med" len="med"/>
+                    </a:lnR>
+                    <a:lnT w="12700" cap="flat" cmpd="sng" algn="ctr">
+                      <a:solidFill>
+                        <a:srgbClr val="23324A"/>
+                      </a:solidFill>
+                      <a:prstDash val="solid"/>
+                      <a:round/>
+                      <a:headEnd type="none" w="med" len="med"/>
+                      <a:tailEnd type="none" w="med" len="med"/>
+                    </a:lnT>
+                    <a:lnB w="12700" cap="flat" cmpd="sng" algn="ctr">
+                      <a:solidFill>
+                        <a:srgbClr val="23324A"/>
+                      </a:solidFill>
+                      <a:prstDash val="solid"/>
+                      <a:round/>
+                      <a:headEnd type="none" w="med" len="med"/>
+                      <a:tailEnd type="none" w="med" len="med"/>
+                    </a:lnB>
+                    <a:solidFill>
+                      <a:srgbClr val="0F172A"/>
+                    </a:solidFill>
+                  </a:tcPr>
+                </a:tc>
+                <a:tc>
+                  <a:txBody>
+                    <a:bodyPr/>
+                    <a:lstStyle/>
+                    <a:p>
+                      <a:pPr algn="l" indent="0" marL="0">
+                        <a:buNone/>
+                      </a:pPr>
+                      <a:r>
+                        <a:rPr lang="en-US" sz="850" dirty="0">
+                          <a:solidFill>
+                            <a:srgbClr val="F8FAFC"/>
+                          </a:solidFill>
+                          <a:latin typeface="Arial" pitchFamily="34" charset="0"/>
+                          <a:ea typeface="Arial" pitchFamily="34" charset="-122"/>
+                          <a:cs typeface="Arial" pitchFamily="34" charset="-120"/>
+                        </a:rPr>
+                        <a:t>Native C</a:t>
+                      </a:r>
+                      <a:endParaRPr lang="en-US" sz="850" dirty="0">
+                        <a:latin typeface="Arial" charset="0"/>
+                        <a:ea typeface="Arial" charset="0"/>
+                        <a:cs typeface="Arial" charset="0"/>
+                      </a:endParaRPr>
+                    </a:p>
+                  </a:txBody>
+                  <a:tcPr marL="91440" marR="91440" marT="45720" marB="45720" anchor="ctr">
+                    <a:lnL w="12700" cap="flat" cmpd="sng" algn="ctr">
+                      <a:solidFill>
+                        <a:srgbClr val="23324A"/>
+                      </a:solidFill>
+                      <a:prstDash val="solid"/>
+                      <a:round/>
+                      <a:headEnd type="none" w="med" len="med"/>
+                      <a:tailEnd type="none" w="med" len="med"/>
+                    </a:lnL>
+                    <a:lnR w="12700" cap="flat" cmpd="sng" algn="ctr">
+                      <a:solidFill>
+                        <a:srgbClr val="23324A"/>
+                      </a:solidFill>
+                      <a:prstDash val="solid"/>
+                      <a:round/>
+                      <a:headEnd type="none" w="med" len="med"/>
+                      <a:tailEnd type="none" w="med" len="med"/>
+                    </a:lnR>
+                    <a:lnT w="12700" cap="flat" cmpd="sng" algn="ctr">
+                      <a:solidFill>
+                        <a:srgbClr val="23324A"/>
+                      </a:solidFill>
+                      <a:prstDash val="solid"/>
+                      <a:round/>
+                      <a:headEnd type="none" w="med" len="med"/>
+                      <a:tailEnd type="none" w="med" len="med"/>
+                    </a:lnT>
+                    <a:lnB w="12700" cap="flat" cmpd="sng" algn="ctr">
+                      <a:solidFill>
+                        <a:srgbClr val="23324A"/>
+                      </a:solidFill>
+                      <a:prstDash val="solid"/>
+                      <a:round/>
+                      <a:headEnd type="none" w="med" len="med"/>
+                      <a:tailEnd type="none" w="med" len="med"/>
+                    </a:lnB>
+                    <a:solidFill>
+                      <a:srgbClr val="0F172A"/>
+                    </a:solidFill>
+                  </a:tcPr>
+                </a:tc>
+                <a:tc>
+                  <a:txBody>
+                    <a:bodyPr/>
+                    <a:lstStyle/>
+                    <a:p>
+                      <a:pPr algn="l" indent="0" marL="0">
+                        <a:buNone/>
+                      </a:pPr>
+                      <a:r>
+                        <a:rPr lang="en-US" sz="850" dirty="0">
+                          <a:solidFill>
+                            <a:srgbClr val="F8FAFC"/>
+                          </a:solidFill>
+                          <a:latin typeface="Arial" pitchFamily="34" charset="0"/>
+                          <a:ea typeface="Arial" pitchFamily="34" charset="-122"/>
+                          <a:cs typeface="Arial" pitchFamily="34" charset="-120"/>
+                        </a:rPr>
+                        <a:t>25 - 40 MB</a:t>
+                      </a:r>
+                      <a:endParaRPr lang="en-US" sz="850" dirty="0">
+                        <a:latin typeface="Arial" charset="0"/>
+                        <a:ea typeface="Arial" charset="0"/>
+                        <a:cs typeface="Arial" charset="0"/>
+                      </a:endParaRPr>
+                    </a:p>
+                  </a:txBody>
+                  <a:tcPr marL="91440" marR="91440" marT="45720" marB="45720" anchor="ctr">
+                    <a:lnL w="12700" cap="flat" cmpd="sng" algn="ctr">
+                      <a:solidFill>
+                        <a:srgbClr val="23324A"/>
+                      </a:solidFill>
+                      <a:prstDash val="solid"/>
+                      <a:round/>
+                      <a:headEnd type="none" w="med" len="med"/>
+                      <a:tailEnd type="none" w="med" len="med"/>
+                    </a:lnL>
+                    <a:lnR w="12700" cap="flat" cmpd="sng" algn="ctr">
+                      <a:solidFill>
+                        <a:srgbClr val="23324A"/>
+                      </a:solidFill>
+                      <a:prstDash val="solid"/>
+                      <a:round/>
+                      <a:headEnd type="none" w="med" len="med"/>
+                      <a:tailEnd type="none" w="med" len="med"/>
+                    </a:lnR>
+                    <a:lnT w="12700" cap="flat" cmpd="sng" algn="ctr">
+                      <a:solidFill>
+                        <a:srgbClr val="23324A"/>
+                      </a:solidFill>
+                      <a:prstDash val="solid"/>
+                      <a:round/>
+                      <a:headEnd type="none" w="med" len="med"/>
+                      <a:tailEnd type="none" w="med" len="med"/>
+                    </a:lnT>
+                    <a:lnB w="12700" cap="flat" cmpd="sng" algn="ctr">
+                      <a:solidFill>
+                        <a:srgbClr val="23324A"/>
+                      </a:solidFill>
+                      <a:prstDash val="solid"/>
+                      <a:round/>
+                      <a:headEnd type="none" w="med" len="med"/>
+                      <a:tailEnd type="none" w="med" len="med"/>
+                    </a:lnB>
+                    <a:solidFill>
+                      <a:srgbClr val="0F172A"/>
+                    </a:solidFill>
+                  </a:tcPr>
+                </a:tc>
+                <a:tc>
+                  <a:txBody>
+                    <a:bodyPr/>
+                    <a:lstStyle/>
+                    <a:p>
+                      <a:pPr algn="l" indent="0" marL="0">
+                        <a:buNone/>
+                      </a:pPr>
+                      <a:r>
+                        <a:rPr lang="en-US" sz="850" dirty="0">
+                          <a:solidFill>
+                            <a:srgbClr val="F8FAFC"/>
+                          </a:solidFill>
+                          <a:latin typeface="Arial" pitchFamily="34" charset="0"/>
+                          <a:ea typeface="Arial" pitchFamily="34" charset="-122"/>
+                          <a:cs typeface="Arial" pitchFamily="34" charset="-120"/>
+                        </a:rPr>
+                        <a:t>12 MB</a:t>
+                      </a:r>
+                      <a:endParaRPr lang="en-US" sz="850" dirty="0">
+                        <a:latin typeface="Arial" charset="0"/>
+                        <a:ea typeface="Arial" charset="0"/>
+                        <a:cs typeface="Arial" charset="0"/>
+                      </a:endParaRPr>
+                    </a:p>
+                  </a:txBody>
+                  <a:tcPr marL="91440" marR="91440" marT="45720" marB="45720" anchor="ctr">
+                    <a:lnL w="12700" cap="flat" cmpd="sng" algn="ctr">
+                      <a:solidFill>
+                        <a:srgbClr val="23324A"/>
+                      </a:solidFill>
+                      <a:prstDash val="solid"/>
+                      <a:round/>
+                      <a:headEnd type="none" w="med" len="med"/>
+                      <a:tailEnd type="none" w="med" len="med"/>
+                    </a:lnL>
+                    <a:lnR w="12700" cap="flat" cmpd="sng" algn="ctr">
+                      <a:solidFill>
+                        <a:srgbClr val="23324A"/>
+                      </a:solidFill>
+                      <a:prstDash val="solid"/>
+                      <a:round/>
+                      <a:headEnd type="none" w="med" len="med"/>
+                      <a:tailEnd type="none" w="med" len="med"/>
+                    </a:lnR>
+                    <a:lnT w="12700" cap="flat" cmpd="sng" algn="ctr">
+                      <a:solidFill>
+                        <a:srgbClr val="23324A"/>
+                      </a:solidFill>
+                      <a:prstDash val="solid"/>
+                      <a:round/>
+                      <a:headEnd type="none" w="med" len="med"/>
+                      <a:tailEnd type="none" w="med" len="med"/>
+                    </a:lnT>
+                    <a:lnB w="12700" cap="flat" cmpd="sng" algn="ctr">
+                      <a:solidFill>
+                        <a:srgbClr val="23324A"/>
+                      </a:solidFill>
+                      <a:prstDash val="solid"/>
+                      <a:round/>
+                      <a:headEnd type="none" w="med" len="med"/>
+                      <a:tailEnd type="none" w="med" len="med"/>
+                    </a:lnB>
+                    <a:solidFill>
+                      <a:srgbClr val="0F172A"/>
+                    </a:solidFill>
+                  </a:tcPr>
+                </a:tc>
+                <a:tc>
+                  <a:txBody>
+                    <a:bodyPr/>
+                    <a:lstStyle/>
+                    <a:p>
+                      <a:pPr algn="l" indent="0" marL="0">
+                        <a:buNone/>
+                      </a:pPr>
+                      <a:r>
+                        <a:rPr lang="en-US" sz="850" dirty="0">
+                          <a:solidFill>
+                            <a:srgbClr val="F8FAFC"/>
+                          </a:solidFill>
+                          <a:latin typeface="Arial" pitchFamily="34" charset="0"/>
+                          <a:ea typeface="Arial" pitchFamily="34" charset="-122"/>
+                          <a:cs typeface="Arial" pitchFamily="34" charset="-120"/>
+                        </a:rPr>
+                        <a:t>150 - 300 ms</a:t>
+                      </a:r>
+                      <a:endParaRPr lang="en-US" sz="850" dirty="0">
+                        <a:latin typeface="Arial" charset="0"/>
+                        <a:ea typeface="Arial" charset="0"/>
+                        <a:cs typeface="Arial" charset="0"/>
+                      </a:endParaRPr>
+                    </a:p>
+                  </a:txBody>
+                  <a:tcPr marL="91440" marR="91440" marT="45720" marB="45720" anchor="ctr">
+                    <a:lnL w="12700" cap="flat" cmpd="sng" algn="ctr">
+                      <a:solidFill>
+                        <a:srgbClr val="23324A"/>
+                      </a:solidFill>
+                      <a:prstDash val="solid"/>
+                      <a:round/>
+                      <a:headEnd type="none" w="med" len="med"/>
+                      <a:tailEnd type="none" w="med" len="med"/>
+                    </a:lnL>
+                    <a:lnR w="12700" cap="flat" cmpd="sng" algn="ctr">
+                      <a:solidFill>
+                        <a:srgbClr val="23324A"/>
+                      </a:solidFill>
+                      <a:prstDash val="solid"/>
+                      <a:round/>
+                      <a:headEnd type="none" w="med" len="med"/>
+                      <a:tailEnd type="none" w="med" len="med"/>
+                    </a:lnR>
+                    <a:lnT w="12700" cap="flat" cmpd="sng" algn="ctr">
+                      <a:solidFill>
+                        <a:srgbClr val="23324A"/>
+                      </a:solidFill>
+                      <a:prstDash val="solid"/>
+                      <a:round/>
+                      <a:headEnd type="none" w="med" len="med"/>
+                      <a:tailEnd type="none" w="med" len="med"/>
+                    </a:lnT>
+                    <a:lnB w="12700" cap="flat" cmpd="sng" algn="ctr">
+                      <a:solidFill>
+                        <a:srgbClr val="23324A"/>
+                      </a:solidFill>
+                      <a:prstDash val="solid"/>
+                      <a:round/>
+                      <a:headEnd type="none" w="med" len="med"/>
+                      <a:tailEnd type="none" w="med" len="med"/>
+                    </a:lnB>
+                    <a:solidFill>
+                      <a:srgbClr val="0F172A"/>
+                    </a:solidFill>
+                  </a:tcPr>
+                </a:tc>
+              </a:tr>
+              <a:tr h="329184">
+                <a:tc>
+                  <a:txBody>
+                    <a:bodyPr/>
+                    <a:lstStyle/>
+                    <a:p>
+                      <a:pPr algn="l" indent="0" marL="0">
+                        <a:buNone/>
+                      </a:pPr>
+                      <a:r>
+                        <a:rPr lang="en-US" sz="850" dirty="0">
+                          <a:solidFill>
+                            <a:srgbClr val="F8FAFC"/>
+                          </a:solidFill>
+                          <a:latin typeface="Arial" pitchFamily="34" charset="0"/>
+                          <a:ea typeface="Arial" pitchFamily="34" charset="-122"/>
+                          <a:cs typeface="Arial" pitchFamily="34" charset="-120"/>
+                        </a:rPr>
+                        <a:t>RabbitMQ</a:t>
+                      </a:r>
+                      <a:endParaRPr lang="en-US" sz="850" dirty="0">
+                        <a:latin typeface="Arial" charset="0"/>
+                        <a:ea typeface="Arial" charset="0"/>
+                        <a:cs typeface="Arial" charset="0"/>
+                      </a:endParaRPr>
+                    </a:p>
+                  </a:txBody>
+                  <a:tcPr marL="91440" marR="91440" marT="45720" marB="45720" anchor="ctr">
+                    <a:lnL w="12700" cap="flat" cmpd="sng" algn="ctr">
+                      <a:solidFill>
+                        <a:srgbClr val="23324A"/>
+                      </a:solidFill>
+                      <a:prstDash val="solid"/>
+                      <a:round/>
+                      <a:headEnd type="none" w="med" len="med"/>
+                      <a:tailEnd type="none" w="med" len="med"/>
+                    </a:lnL>
+                    <a:lnR w="12700" cap="flat" cmpd="sng" algn="ctr">
+                      <a:solidFill>
+                        <a:srgbClr val="23324A"/>
+                      </a:solidFill>
+                      <a:prstDash val="solid"/>
+                      <a:round/>
+                      <a:headEnd type="none" w="med" len="med"/>
+                      <a:tailEnd type="none" w="med" len="med"/>
+                    </a:lnR>
+                    <a:lnT w="12700" cap="flat" cmpd="sng" algn="ctr">
+                      <a:solidFill>
+                        <a:srgbClr val="23324A"/>
+                      </a:solidFill>
+                      <a:prstDash val="solid"/>
+                      <a:round/>
+                      <a:headEnd type="none" w="med" len="med"/>
+                      <a:tailEnd type="none" w="med" len="med"/>
+                    </a:lnT>
+                    <a:lnB w="12700" cap="flat" cmpd="sng" algn="ctr">
+                      <a:solidFill>
+                        <a:srgbClr val="23324A"/>
+                      </a:solidFill>
+                      <a:prstDash val="solid"/>
+                      <a:round/>
+                      <a:headEnd type="none" w="med" len="med"/>
+                      <a:tailEnd type="none" w="med" len="med"/>
+                    </a:lnB>
+                    <a:solidFill>
+                      <a:srgbClr val="0F172A"/>
+                    </a:solidFill>
+                  </a:tcPr>
+                </a:tc>
+                <a:tc>
+                  <a:txBody>
+                    <a:bodyPr/>
+                    <a:lstStyle/>
+                    <a:p>
+                      <a:pPr algn="l" indent="0" marL="0">
+                        <a:buNone/>
+                      </a:pPr>
+                      <a:r>
+                        <a:rPr lang="en-US" sz="850" dirty="0">
+                          <a:solidFill>
+                            <a:srgbClr val="F8FAFC"/>
+                          </a:solidFill>
+                          <a:latin typeface="Arial" pitchFamily="34" charset="0"/>
+                          <a:ea typeface="Arial" pitchFamily="34" charset="-122"/>
+                          <a:cs typeface="Arial" pitchFamily="34" charset="-120"/>
+                        </a:rPr>
+                        <a:t>Erlang BEAM</a:t>
+                      </a:r>
+                      <a:endParaRPr lang="en-US" sz="850" dirty="0">
+                        <a:latin typeface="Arial" charset="0"/>
+                        <a:ea typeface="Arial" charset="0"/>
+                        <a:cs typeface="Arial" charset="0"/>
+                      </a:endParaRPr>
+                    </a:p>
+                  </a:txBody>
+                  <a:tcPr marL="91440" marR="91440" marT="45720" marB="45720" anchor="ctr">
+                    <a:lnL w="12700" cap="flat" cmpd="sng" algn="ctr">
+                      <a:solidFill>
+                        <a:srgbClr val="23324A"/>
+                      </a:solidFill>
+                      <a:prstDash val="solid"/>
+                      <a:round/>
+                      <a:headEnd type="none" w="med" len="med"/>
+                      <a:tailEnd type="none" w="med" len="med"/>
+                    </a:lnL>
+                    <a:lnR w="12700" cap="flat" cmpd="sng" algn="ctr">
+                      <a:solidFill>
+                        <a:srgbClr val="23324A"/>
+                      </a:solidFill>
+                      <a:prstDash val="solid"/>
+                      <a:round/>
+                      <a:headEnd type="none" w="med" len="med"/>
+                      <a:tailEnd type="none" w="med" len="med"/>
+                    </a:lnR>
+                    <a:lnT w="12700" cap="flat" cmpd="sng" algn="ctr">
+                      <a:solidFill>
+                        <a:srgbClr val="23324A"/>
+                      </a:solidFill>
+                      <a:prstDash val="solid"/>
+                      <a:round/>
+                      <a:headEnd type="none" w="med" len="med"/>
+                      <a:tailEnd type="none" w="med" len="med"/>
+                    </a:lnT>
+                    <a:lnB w="12700" cap="flat" cmpd="sng" algn="ctr">
+                      <a:solidFill>
+                        <a:srgbClr val="23324A"/>
+                      </a:solidFill>
+                      <a:prstDash val="solid"/>
+                      <a:round/>
+                      <a:headEnd type="none" w="med" len="med"/>
+                      <a:tailEnd type="none" w="med" len="med"/>
+                    </a:lnB>
+                    <a:solidFill>
+                      <a:srgbClr val="0F172A"/>
+                    </a:solidFill>
+                  </a:tcPr>
+                </a:tc>
+                <a:tc>
+                  <a:txBody>
+                    <a:bodyPr/>
+                    <a:lstStyle/>
+                    <a:p>
+                      <a:pPr algn="l" indent="0" marL="0">
+                        <a:buNone/>
+                      </a:pPr>
+                      <a:r>
+                        <a:rPr lang="en-US" sz="850" dirty="0">
+                          <a:solidFill>
+                            <a:srgbClr val="F8FAFC"/>
+                          </a:solidFill>
+                          <a:latin typeface="Arial" pitchFamily="34" charset="0"/>
+                          <a:ea typeface="Arial" pitchFamily="34" charset="-122"/>
+                          <a:cs typeface="Arial" pitchFamily="34" charset="-120"/>
+                        </a:rPr>
+                        <a:t>150 - 300 MB</a:t>
+                      </a:r>
+                      <a:endParaRPr lang="en-US" sz="850" dirty="0">
+                        <a:latin typeface="Arial" charset="0"/>
+                        <a:ea typeface="Arial" charset="0"/>
+                        <a:cs typeface="Arial" charset="0"/>
+                      </a:endParaRPr>
+                    </a:p>
+                  </a:txBody>
+                  <a:tcPr marL="91440" marR="91440" marT="45720" marB="45720" anchor="ctr">
+                    <a:lnL w="12700" cap="flat" cmpd="sng" algn="ctr">
+                      <a:solidFill>
+                        <a:srgbClr val="23324A"/>
+                      </a:solidFill>
+                      <a:prstDash val="solid"/>
+                      <a:round/>
+                      <a:headEnd type="none" w="med" len="med"/>
+                      <a:tailEnd type="none" w="med" len="med"/>
+                    </a:lnL>
+                    <a:lnR w="12700" cap="flat" cmpd="sng" algn="ctr">
+                      <a:solidFill>
+                        <a:srgbClr val="23324A"/>
+                      </a:solidFill>
+                      <a:prstDash val="solid"/>
+                      <a:round/>
+                      <a:headEnd type="none" w="med" len="med"/>
+                      <a:tailEnd type="none" w="med" len="med"/>
+                    </a:lnR>
+                    <a:lnT w="12700" cap="flat" cmpd="sng" algn="ctr">
+                      <a:solidFill>
+                        <a:srgbClr val="23324A"/>
+                      </a:solidFill>
+                      <a:prstDash val="solid"/>
+                      <a:round/>
+                      <a:headEnd type="none" w="med" len="med"/>
+                      <a:tailEnd type="none" w="med" len="med"/>
+                    </a:lnT>
+                    <a:lnB w="12700" cap="flat" cmpd="sng" algn="ctr">
+                      <a:solidFill>
+                        <a:srgbClr val="23324A"/>
+                      </a:solidFill>
+                      <a:prstDash val="solid"/>
+                      <a:round/>
+                      <a:headEnd type="none" w="med" len="med"/>
+                      <a:tailEnd type="none" w="med" len="med"/>
+                    </a:lnB>
+                    <a:solidFill>
+                      <a:srgbClr val="0F172A"/>
+                    </a:solidFill>
+                  </a:tcPr>
+                </a:tc>
+                <a:tc>
+                  <a:txBody>
+                    <a:bodyPr/>
+                    <a:lstStyle/>
+                    <a:p>
+                      <a:pPr algn="l" indent="0" marL="0">
+                        <a:buNone/>
+                      </a:pPr>
+                      <a:r>
+                        <a:rPr lang="en-US" sz="850" dirty="0">
+                          <a:solidFill>
+                            <a:srgbClr val="F8FAFC"/>
+                          </a:solidFill>
+                          <a:latin typeface="Arial" pitchFamily="34" charset="0"/>
+                          <a:ea typeface="Arial" pitchFamily="34" charset="-122"/>
+                          <a:cs typeface="Arial" pitchFamily="34" charset="-120"/>
+                        </a:rPr>
+                        <a:t>50 MB+</a:t>
+                      </a:r>
+                      <a:endParaRPr lang="en-US" sz="850" dirty="0">
+                        <a:latin typeface="Arial" charset="0"/>
+                        <a:ea typeface="Arial" charset="0"/>
+                        <a:cs typeface="Arial" charset="0"/>
+                      </a:endParaRPr>
+                    </a:p>
+                  </a:txBody>
+                  <a:tcPr marL="91440" marR="91440" marT="45720" marB="45720" anchor="ctr">
+                    <a:lnL w="12700" cap="flat" cmpd="sng" algn="ctr">
+                      <a:solidFill>
+                        <a:srgbClr val="23324A"/>
+                      </a:solidFill>
+                      <a:prstDash val="solid"/>
+                      <a:round/>
+                      <a:headEnd type="none" w="med" len="med"/>
+                      <a:tailEnd type="none" w="med" len="med"/>
+                    </a:lnL>
+                    <a:lnR w="12700" cap="flat" cmpd="sng" algn="ctr">
+                      <a:solidFill>
+                        <a:srgbClr val="23324A"/>
+                      </a:solidFill>
+                      <a:prstDash val="solid"/>
+                      <a:round/>
+                      <a:headEnd type="none" w="med" len="med"/>
+                      <a:tailEnd type="none" w="med" len="med"/>
+                    </a:lnR>
+                    <a:lnT w="12700" cap="flat" cmpd="sng" algn="ctr">
+                      <a:solidFill>
+                        <a:srgbClr val="23324A"/>
+                      </a:solidFill>
+                      <a:prstDash val="solid"/>
+                      <a:round/>
+                      <a:headEnd type="none" w="med" len="med"/>
+                      <a:tailEnd type="none" w="med" len="med"/>
+                    </a:lnT>
+                    <a:lnB w="12700" cap="flat" cmpd="sng" algn="ctr">
+                      <a:solidFill>
+                        <a:srgbClr val="23324A"/>
+                      </a:solidFill>
+                      <a:prstDash val="solid"/>
+                      <a:round/>
+                      <a:headEnd type="none" w="med" len="med"/>
+                      <a:tailEnd type="none" w="med" len="med"/>
+                    </a:lnB>
+                    <a:solidFill>
+                      <a:srgbClr val="0F172A"/>
+                    </a:solidFill>
+                  </a:tcPr>
+                </a:tc>
+                <a:tc>
+                  <a:txBody>
+                    <a:bodyPr/>
+                    <a:lstStyle/>
+                    <a:p>
+                      <a:pPr algn="l" indent="0" marL="0">
+                        <a:buNone/>
+                      </a:pPr>
+                      <a:r>
+                        <a:rPr lang="en-US" sz="850" dirty="0">
+                          <a:solidFill>
+                            <a:srgbClr val="F8FAFC"/>
+                          </a:solidFill>
+                          <a:latin typeface="Arial" pitchFamily="34" charset="0"/>
+                          <a:ea typeface="Arial" pitchFamily="34" charset="-122"/>
+                          <a:cs typeface="Arial" pitchFamily="34" charset="-120"/>
+                        </a:rPr>
+                        <a:t>3.0 - 6.0 s</a:t>
+                      </a:r>
+                      <a:endParaRPr lang="en-US" sz="850" dirty="0">
+                        <a:latin typeface="Arial" charset="0"/>
+                        <a:ea typeface="Arial" charset="0"/>
+                        <a:cs typeface="Arial" charset="0"/>
+                      </a:endParaRPr>
+                    </a:p>
+                  </a:txBody>
+                  <a:tcPr marL="91440" marR="91440" marT="45720" marB="45720" anchor="ctr">
+                    <a:lnL w="12700" cap="flat" cmpd="sng" algn="ctr">
+                      <a:solidFill>
+                        <a:srgbClr val="23324A"/>
+                      </a:solidFill>
+                      <a:prstDash val="solid"/>
+                      <a:round/>
+                      <a:headEnd type="none" w="med" len="med"/>
+                      <a:tailEnd type="none" w="med" len="med"/>
+                    </a:lnL>
+                    <a:lnR w="12700" cap="flat" cmpd="sng" algn="ctr">
+                      <a:solidFill>
+                        <a:srgbClr val="23324A"/>
+                      </a:solidFill>
+                      <a:prstDash val="solid"/>
+                      <a:round/>
+                      <a:headEnd type="none" w="med" len="med"/>
+                      <a:tailEnd type="none" w="med" len="med"/>
+                    </a:lnR>
+                    <a:lnT w="12700" cap="flat" cmpd="sng" algn="ctr">
+                      <a:solidFill>
+                        <a:srgbClr val="23324A"/>
+                      </a:solidFill>
+                      <a:prstDash val="solid"/>
+                      <a:round/>
+                      <a:headEnd type="none" w="med" len="med"/>
+                      <a:tailEnd type="none" w="med" len="med"/>
+                    </a:lnT>
+                    <a:lnB w="12700" cap="flat" cmpd="sng" algn="ctr">
+                      <a:solidFill>
+                        <a:srgbClr val="23324A"/>
+                      </a:solidFill>
+                      <a:prstDash val="solid"/>
+                      <a:round/>
+                      <a:headEnd type="none" w="med" len="med"/>
+                      <a:tailEnd type="none" w="med" len="med"/>
+                    </a:lnB>
+                    <a:solidFill>
+                      <a:srgbClr val="0F172A"/>
+                    </a:solidFill>
+                  </a:tcPr>
+                </a:tc>
+              </a:tr>
+              <a:tr h="329184">
+                <a:tc>
+                  <a:txBody>
+                    <a:bodyPr/>
+                    <a:lstStyle/>
+                    <a:p>
+                      <a:pPr algn="l" indent="0" marL="0">
+                        <a:buNone/>
+                      </a:pPr>
+                      <a:r>
+                        <a:rPr lang="en-US" sz="850" dirty="0">
+                          <a:solidFill>
+                            <a:srgbClr val="F8FAFC"/>
+                          </a:solidFill>
+                          <a:latin typeface="Arial" pitchFamily="34" charset="0"/>
+                          <a:ea typeface="Arial" pitchFamily="34" charset="-122"/>
+                          <a:cs typeface="Arial" pitchFamily="34" charset="-120"/>
+                        </a:rPr>
+                        <a:t>Apache Kafka</a:t>
+                      </a:r>
+                      <a:endParaRPr lang="en-US" sz="850" dirty="0">
+                        <a:latin typeface="Arial" charset="0"/>
+                        <a:ea typeface="Arial" charset="0"/>
+                        <a:cs typeface="Arial" charset="0"/>
+                      </a:endParaRPr>
+                    </a:p>
+                  </a:txBody>
+                  <a:tcPr marL="91440" marR="91440" marT="45720" marB="45720" anchor="ctr">
+                    <a:lnL w="12700" cap="flat" cmpd="sng" algn="ctr">
+                      <a:solidFill>
+                        <a:srgbClr val="23324A"/>
+                      </a:solidFill>
+                      <a:prstDash val="solid"/>
+                      <a:round/>
+                      <a:headEnd type="none" w="med" len="med"/>
+                      <a:tailEnd type="none" w="med" len="med"/>
+                    </a:lnL>
+                    <a:lnR w="12700" cap="flat" cmpd="sng" algn="ctr">
+                      <a:solidFill>
+                        <a:srgbClr val="23324A"/>
+                      </a:solidFill>
+                      <a:prstDash val="solid"/>
+                      <a:round/>
+                      <a:headEnd type="none" w="med" len="med"/>
+                      <a:tailEnd type="none" w="med" len="med"/>
+                    </a:lnR>
+                    <a:lnT w="12700" cap="flat" cmpd="sng" algn="ctr">
+                      <a:solidFill>
+                        <a:srgbClr val="23324A"/>
+                      </a:solidFill>
+                      <a:prstDash val="solid"/>
+                      <a:round/>
+                      <a:headEnd type="none" w="med" len="med"/>
+                      <a:tailEnd type="none" w="med" len="med"/>
+                    </a:lnT>
+                    <a:lnB w="12700" cap="flat" cmpd="sng" algn="ctr">
+                      <a:solidFill>
+                        <a:srgbClr val="23324A"/>
+                      </a:solidFill>
+                      <a:prstDash val="solid"/>
+                      <a:round/>
+                      <a:headEnd type="none" w="med" len="med"/>
+                      <a:tailEnd type="none" w="med" len="med"/>
+                    </a:lnB>
+                    <a:solidFill>
+                      <a:srgbClr val="0F172A"/>
+                    </a:solidFill>
+                  </a:tcPr>
+                </a:tc>
+                <a:tc>
+                  <a:txBody>
+                    <a:bodyPr/>
+                    <a:lstStyle/>
+                    <a:p>
+                      <a:pPr algn="l" indent="0" marL="0">
+                        <a:buNone/>
+                      </a:pPr>
+                      <a:r>
+                        <a:rPr lang="en-US" sz="850" dirty="0">
+                          <a:solidFill>
+                            <a:srgbClr val="F8FAFC"/>
+                          </a:solidFill>
+                          <a:latin typeface="Arial" pitchFamily="34" charset="0"/>
+                          <a:ea typeface="Arial" pitchFamily="34" charset="-122"/>
+                          <a:cs typeface="Arial" pitchFamily="34" charset="-120"/>
+                        </a:rPr>
+                        <a:t>Java / JVM</a:t>
+                      </a:r>
+                      <a:endParaRPr lang="en-US" sz="850" dirty="0">
+                        <a:latin typeface="Arial" charset="0"/>
+                        <a:ea typeface="Arial" charset="0"/>
+                        <a:cs typeface="Arial" charset="0"/>
+                      </a:endParaRPr>
+                    </a:p>
+                  </a:txBody>
+                  <a:tcPr marL="91440" marR="91440" marT="45720" marB="45720" anchor="ctr">
+                    <a:lnL w="12700" cap="flat" cmpd="sng" algn="ctr">
+                      <a:solidFill>
+                        <a:srgbClr val="23324A"/>
+                      </a:solidFill>
+                      <a:prstDash val="solid"/>
+                      <a:round/>
+                      <a:headEnd type="none" w="med" len="med"/>
+                      <a:tailEnd type="none" w="med" len="med"/>
+                    </a:lnL>
+                    <a:lnR w="12700" cap="flat" cmpd="sng" algn="ctr">
+                      <a:solidFill>
+                        <a:srgbClr val="23324A"/>
+                      </a:solidFill>
+                      <a:prstDash val="solid"/>
+                      <a:round/>
+                      <a:headEnd type="none" w="med" len="med"/>
+                      <a:tailEnd type="none" w="med" len="med"/>
+                    </a:lnR>
+                    <a:lnT w="12700" cap="flat" cmpd="sng" algn="ctr">
+                      <a:solidFill>
+                        <a:srgbClr val="23324A"/>
+                      </a:solidFill>
+                      <a:prstDash val="solid"/>
+                      <a:round/>
+                      <a:headEnd type="none" w="med" len="med"/>
+                      <a:tailEnd type="none" w="med" len="med"/>
+                    </a:lnT>
+                    <a:lnB w="12700" cap="flat" cmpd="sng" algn="ctr">
+                      <a:solidFill>
+                        <a:srgbClr val="23324A"/>
+                      </a:solidFill>
+                      <a:prstDash val="solid"/>
+                      <a:round/>
+                      <a:headEnd type="none" w="med" len="med"/>
+                      <a:tailEnd type="none" w="med" len="med"/>
+                    </a:lnB>
+                    <a:solidFill>
+                      <a:srgbClr val="0F172A"/>
+                    </a:solidFill>
+                  </a:tcPr>
+                </a:tc>
+                <a:tc>
+                  <a:txBody>
+                    <a:bodyPr/>
+                    <a:lstStyle/>
+                    <a:p>
+                      <a:pPr algn="l" indent="0" marL="0">
+                        <a:buNone/>
+                      </a:pPr>
+                      <a:r>
+                        <a:rPr lang="en-US" sz="850" dirty="0">
+                          <a:solidFill>
+                            <a:srgbClr val="F8FAFC"/>
+                          </a:solidFill>
+                          <a:latin typeface="Arial" pitchFamily="34" charset="0"/>
+                          <a:ea typeface="Arial" pitchFamily="34" charset="-122"/>
+                          <a:cs typeface="Arial" pitchFamily="34" charset="-120"/>
+                        </a:rPr>
+                        <a:t>500MB - 1.5GB</a:t>
+                      </a:r>
+                      <a:endParaRPr lang="en-US" sz="850" dirty="0">
+                        <a:latin typeface="Arial" charset="0"/>
+                        <a:ea typeface="Arial" charset="0"/>
+                        <a:cs typeface="Arial" charset="0"/>
+                      </a:endParaRPr>
+                    </a:p>
+                  </a:txBody>
+                  <a:tcPr marL="91440" marR="91440" marT="45720" marB="45720" anchor="ctr">
+                    <a:lnL w="12700" cap="flat" cmpd="sng" algn="ctr">
+                      <a:solidFill>
+                        <a:srgbClr val="23324A"/>
+                      </a:solidFill>
+                      <a:prstDash val="solid"/>
+                      <a:round/>
+                      <a:headEnd type="none" w="med" len="med"/>
+                      <a:tailEnd type="none" w="med" len="med"/>
+                    </a:lnL>
+                    <a:lnR w="12700" cap="flat" cmpd="sng" algn="ctr">
+                      <a:solidFill>
+                        <a:srgbClr val="23324A"/>
+                      </a:solidFill>
+                      <a:prstDash val="solid"/>
+                      <a:round/>
+                      <a:headEnd type="none" w="med" len="med"/>
+                      <a:tailEnd type="none" w="med" len="med"/>
+                    </a:lnR>
+                    <a:lnT w="12700" cap="flat" cmpd="sng" algn="ctr">
+                      <a:solidFill>
+                        <a:srgbClr val="23324A"/>
+                      </a:solidFill>
+                      <a:prstDash val="solid"/>
+                      <a:round/>
+                      <a:headEnd type="none" w="med" len="med"/>
+                      <a:tailEnd type="none" w="med" len="med"/>
+                    </a:lnT>
+                    <a:lnB w="12700" cap="flat" cmpd="sng" algn="ctr">
+                      <a:solidFill>
+                        <a:srgbClr val="23324A"/>
+                      </a:solidFill>
+                      <a:prstDash val="solid"/>
+                      <a:round/>
+                      <a:headEnd type="none" w="med" len="med"/>
+                      <a:tailEnd type="none" w="med" len="med"/>
+                    </a:lnB>
+                    <a:solidFill>
+                      <a:srgbClr val="0F172A"/>
+                    </a:solidFill>
+                  </a:tcPr>
+                </a:tc>
+                <a:tc>
+                  <a:txBody>
+                    <a:bodyPr/>
+                    <a:lstStyle/>
+                    <a:p>
+                      <a:pPr algn="l" indent="0" marL="0">
+                        <a:buNone/>
+                      </a:pPr>
+                      <a:r>
+                        <a:rPr lang="en-US" sz="850" dirty="0">
+                          <a:solidFill>
+                            <a:srgbClr val="F8FAFC"/>
+                          </a:solidFill>
+                          <a:latin typeface="Arial" pitchFamily="34" charset="0"/>
+                          <a:ea typeface="Arial" pitchFamily="34" charset="-122"/>
+                          <a:cs typeface="Arial" pitchFamily="34" charset="-120"/>
+                        </a:rPr>
+                        <a:t>120 MB+</a:t>
+                      </a:r>
+                      <a:endParaRPr lang="en-US" sz="850" dirty="0">
+                        <a:latin typeface="Arial" charset="0"/>
+                        <a:ea typeface="Arial" charset="0"/>
+                        <a:cs typeface="Arial" charset="0"/>
+                      </a:endParaRPr>
+                    </a:p>
+                  </a:txBody>
+                  <a:tcPr marL="91440" marR="91440" marT="45720" marB="45720" anchor="ctr">
+                    <a:lnL w="12700" cap="flat" cmpd="sng" algn="ctr">
+                      <a:solidFill>
+                        <a:srgbClr val="23324A"/>
+                      </a:solidFill>
+                      <a:prstDash val="solid"/>
+                      <a:round/>
+                      <a:headEnd type="none" w="med" len="med"/>
+                      <a:tailEnd type="none" w="med" len="med"/>
+                    </a:lnL>
+                    <a:lnR w="12700" cap="flat" cmpd="sng" algn="ctr">
+                      <a:solidFill>
+                        <a:srgbClr val="23324A"/>
+                      </a:solidFill>
+                      <a:prstDash val="solid"/>
+                      <a:round/>
+                      <a:headEnd type="none" w="med" len="med"/>
+                      <a:tailEnd type="none" w="med" len="med"/>
+                    </a:lnR>
+                    <a:lnT w="12700" cap="flat" cmpd="sng" algn="ctr">
+                      <a:solidFill>
+                        <a:srgbClr val="23324A"/>
+                      </a:solidFill>
+                      <a:prstDash val="solid"/>
+                      <a:round/>
+                      <a:headEnd type="none" w="med" len="med"/>
+                      <a:tailEnd type="none" w="med" len="med"/>
+                    </a:lnT>
+                    <a:lnB w="12700" cap="flat" cmpd="sng" algn="ctr">
+                      <a:solidFill>
+                        <a:srgbClr val="23324A"/>
+                      </a:solidFill>
+                      <a:prstDash val="solid"/>
+                      <a:round/>
+                      <a:headEnd type="none" w="med" len="med"/>
+                      <a:tailEnd type="none" w="med" len="med"/>
+                    </a:lnB>
+                    <a:solidFill>
+                      <a:srgbClr val="0F172A"/>
+                    </a:solidFill>
+                  </a:tcPr>
+                </a:tc>
+                <a:tc>
+                  <a:txBody>
+                    <a:bodyPr/>
+                    <a:lstStyle/>
+                    <a:p>
+                      <a:pPr algn="l" indent="0" marL="0">
+                        <a:buNone/>
+                      </a:pPr>
+                      <a:r>
+                        <a:rPr lang="en-US" sz="850" dirty="0">
+                          <a:solidFill>
+                            <a:srgbClr val="F8FAFC"/>
+                          </a:solidFill>
+                          <a:latin typeface="Arial" pitchFamily="34" charset="0"/>
+                          <a:ea typeface="Arial" pitchFamily="34" charset="-122"/>
+                          <a:cs typeface="Arial" pitchFamily="34" charset="-120"/>
+                        </a:rPr>
+                        <a:t>15.0 - 45.0 s</a:t>
+                      </a:r>
+                      <a:endParaRPr lang="en-US" sz="850" dirty="0">
+                        <a:latin typeface="Arial" charset="0"/>
+                        <a:ea typeface="Arial" charset="0"/>
+                        <a:cs typeface="Arial" charset="0"/>
+                      </a:endParaRPr>
+                    </a:p>
+                  </a:txBody>
+                  <a:tcPr marL="91440" marR="91440" marT="45720" marB="45720" anchor="ctr">
+                    <a:lnL w="12700" cap="flat" cmpd="sng" algn="ctr">
+                      <a:solidFill>
+                        <a:srgbClr val="23324A"/>
+                      </a:solidFill>
+                      <a:prstDash val="solid"/>
+                      <a:round/>
+                      <a:headEnd type="none" w="med" len="med"/>
+                      <a:tailEnd type="none" w="med" len="med"/>
+                    </a:lnL>
+                    <a:lnR w="12700" cap="flat" cmpd="sng" algn="ctr">
+                      <a:solidFill>
+                        <a:srgbClr val="23324A"/>
+                      </a:solidFill>
+                      <a:prstDash val="solid"/>
+                      <a:round/>
+                      <a:headEnd type="none" w="med" len="med"/>
+                      <a:tailEnd type="none" w="med" len="med"/>
+                    </a:lnR>
+                    <a:lnT w="12700" cap="flat" cmpd="sng" algn="ctr">
+                      <a:solidFill>
+                        <a:srgbClr val="23324A"/>
+                      </a:solidFill>
+                      <a:prstDash val="solid"/>
+                      <a:round/>
+                      <a:headEnd type="none" w="med" len="med"/>
+                      <a:tailEnd type="none" w="med" len="med"/>
+                    </a:lnT>
+                    <a:lnB w="12700" cap="flat" cmpd="sng" algn="ctr">
+                      <a:solidFill>
+                        <a:srgbClr val="23324A"/>
+                      </a:solidFill>
+                      <a:prstDash val="solid"/>
+                      <a:round/>
+                      <a:headEnd type="none" w="med" len="med"/>
+                      <a:tailEnd type="none" w="med" len="med"/>
+                    </a:lnB>
+                    <a:solidFill>
+                      <a:srgbClr val="0F172A"/>
+                    </a:solidFill>
+                  </a:tcPr>
+                </a:tc>
+              </a:tr>
+            </a:tbl>
+          </a:graphicData>
+        </a:graphic>
+      </p:graphicFrame>
+      <p:sp>
+        <p:nvSpPr>
+          <p:cNvPr id="43" name="Shape 40"/>
+          <p:cNvSpPr/>
+          <p:nvPr/>
+        </p:nvSpPr>
+        <p:spPr>
+          <a:xfrm>
+            <a:off x="6419088" y="5669280"/>
+            <a:ext cx="4855464" cy="640080"/>
+          </a:xfrm>
+          <a:prstGeom prst="roundRect">
+            <a:avLst>
+              <a:gd name="adj" fmla="val 8571"/>
+            </a:avLst>
+          </a:prstGeom>
+          <a:solidFill>
+            <a:srgbClr val="14263B"/>
+          </a:solidFill>
+          <a:ln w="12700">
+            <a:solidFill>
+              <a:srgbClr val="38BDF8"/>
+            </a:solidFill>
+            <a:prstDash val="solid"/>
+          </a:ln>
+        </p:spPr>
+      </p:sp>
+      <p:sp>
+        <p:nvSpPr>
+          <p:cNvPr id="44" name="Text 41"/>
+          <p:cNvSpPr/>
+          <p:nvPr/>
+        </p:nvSpPr>
+        <p:spPr>
+          <a:xfrm>
+            <a:off x="6556248" y="5733288"/>
+            <a:ext cx="4581144" cy="182880"/>
+          </a:xfrm>
+          <a:prstGeom prst="rect">
+            <a:avLst/>
+          </a:prstGeom>
+          <a:noFill/>
+          <a:ln/>
+        </p:spPr>
+        <p:txBody>
+          <a:bodyPr wrap="square" rtlCol="0" anchor="ctr"/>
+          <a:lstStyle/>
+          <a:p>
+            <a:pPr indent="0" marL="0">
+              <a:buNone/>
+            </a:pPr>
+            <a:r>
+              <a:rPr lang="en-US" sz="900" b="1" dirty="0">
+                <a:solidFill>
+                  <a:srgbClr val="38BDF8"/>
+                </a:solidFill>
+                <a:latin typeface="Arial" pitchFamily="34" charset="0"/>
+                <a:ea typeface="Arial" pitchFamily="34" charset="-122"/>
+                <a:cs typeface="Arial" pitchFamily="34" charset="-120"/>
+              </a:rPr>
+              <a:t>98.5% LESS MEMORY CONSUMPTION THAN ENTERPRISE ALTERNATIVES</a:t>
+            </a:r>
+            <a:endParaRPr lang="en-US" sz="900" dirty="0"/>
+          </a:p>
+        </p:txBody>
+      </p:sp>
+      <p:sp>
+        <p:nvSpPr>
+          <p:cNvPr id="45" name="Text 42"/>
+          <p:cNvSpPr/>
+          <p:nvPr/>
+        </p:nvSpPr>
+        <p:spPr>
+          <a:xfrm>
+            <a:off x="6556248" y="5934456"/>
+            <a:ext cx="4581144" cy="320040"/>
+          </a:xfrm>
+          <a:prstGeom prst="rect">
+            <a:avLst/>
+          </a:prstGeom>
+          <a:noFill/>
+          <a:ln/>
+        </p:spPr>
+        <p:txBody>
+          <a:bodyPr wrap="square" rtlCol="0" anchor="ctr"/>
+          <a:lstStyle/>
+          <a:p>
+            <a:pPr indent="0" marL="0">
+              <a:buNone/>
+            </a:pPr>
+            <a:r>
+              <a:rPr lang="en-US" sz="800" dirty="0">
+                <a:solidFill>
+                  <a:srgbClr val="94A3B8"/>
+                </a:solidFill>
+                <a:latin typeface="Arial" pitchFamily="34" charset="0"/>
+                <a:ea typeface="Arial" pitchFamily="34" charset="-122"/>
+                <a:cs typeface="Arial" pitchFamily="34" charset="-120"/>
+              </a:rPr>
+              <a:t>PMB fits comfortably inside restrictive hypervisor host cgroups without stealing compute capacity from operational guest virtual machines.</a:t>
+            </a:r>
+            <a:endParaRPr lang="en-US" sz="800" dirty="0"/>
           </a:p>
         </p:txBody>
       </p:sp>

--- a/PMB_Architecture_Pitch.pptx
+++ b/PMB_Architecture_Pitch.pptx
@@ -2300,20 +2300,14 @@
       </p:sp>
       <p:pic>
         <p:nvPicPr>
-          <p:cNvPr id="18" name="Image 0" descr="d:\persistant_message_broker\docs\slide1_topology.svg">    </p:cNvPr>
+          <p:cNvPr id="18" name="Image 0" descr="d:\persistant_message_broker\docs\slide1_topology.png">    </p:cNvPr>
           <p:cNvPicPr>
             <a:picLocks noChangeAspect="1"/>
           </p:cNvPicPr>
           <p:nvPr/>
         </p:nvPicPr>
         <p:blipFill>
-          <a:blip r:embed="rId1">
-            <a:extLst>
-              <a:ext uri="{96DAC541-7B7A-43D3-8B79-37D633B846F1}">
-                <asvg:svgBlip xmlns:asvg="http://schemas.microsoft.com/office/drawing/2016/SVG/main" r:embed="rId2"/>
-              </a:ext>
-            </a:extLst>
-          </a:blip>
+          <a:blip r:embed="rId1"/>
           <a:stretch>
             <a:fillRect/>
           </a:stretch>
@@ -4134,20 +4128,14 @@
       </p:sp>
       <p:pic>
         <p:nvPicPr>
-          <p:cNvPr id="10" name="Image 0" descr="d:\persistant_message_broker\docs\slide2_problem.svg">    </p:cNvPr>
+          <p:cNvPr id="10" name="Image 0" descr="d:\persistant_message_broker\docs\slide2_problem.png">    </p:cNvPr>
           <p:cNvPicPr>
             <a:picLocks noChangeAspect="1"/>
           </p:cNvPicPr>
           <p:nvPr/>
         </p:nvPicPr>
         <p:blipFill>
-          <a:blip r:embed="rId1">
-            <a:extLst>
-              <a:ext uri="{96DAC541-7B7A-43D3-8B79-37D633B846F1}">
-                <asvg:svgBlip xmlns:asvg="http://schemas.microsoft.com/office/drawing/2016/SVG/main" r:embed="rId2"/>
-              </a:ext>
-            </a:extLst>
-          </a:blip>
+          <a:blip r:embed="rId1"/>
           <a:stretch>
             <a:fillRect/>
           </a:stretch>
@@ -4708,20 +4696,14 @@
       </p:sp>
       <p:pic>
         <p:nvPicPr>
-          <p:cNvPr id="8" name="Image 0" descr="d:\persistant_message_broker\docs\slide3_solution.svg">    </p:cNvPr>
+          <p:cNvPr id="8" name="Image 0" descr="d:\persistant_message_broker\docs\slide3_solution.png">    </p:cNvPr>
           <p:cNvPicPr>
             <a:picLocks noChangeAspect="1"/>
           </p:cNvPicPr>
           <p:nvPr/>
         </p:nvPicPr>
         <p:blipFill>
-          <a:blip r:embed="rId1">
-            <a:extLst>
-              <a:ext uri="{96DAC541-7B7A-43D3-8B79-37D633B846F1}">
-                <asvg:svgBlip xmlns:asvg="http://schemas.microsoft.com/office/drawing/2016/SVG/main" r:embed="rId2"/>
-              </a:ext>
-            </a:extLst>
-          </a:blip>
+          <a:blip r:embed="rId1"/>
           <a:stretch>
             <a:fillRect/>
           </a:stretch>
@@ -5727,20 +5709,14 @@
       </p:sp>
       <p:pic>
         <p:nvPicPr>
-          <p:cNvPr id="8" name="Image 0" descr="d:\persistant_message_broker\docs\slide4_atomic_stack.svg">    </p:cNvPr>
+          <p:cNvPr id="8" name="Image 0" descr="d:\persistant_message_broker\docs\slide4_atomic_stack.png">    </p:cNvPr>
           <p:cNvPicPr>
             <a:picLocks noChangeAspect="1"/>
           </p:cNvPicPr>
           <p:nvPr/>
         </p:nvPicPr>
         <p:blipFill>
-          <a:blip r:embed="rId1">
-            <a:extLst>
-              <a:ext uri="{96DAC541-7B7A-43D3-8B79-37D633B846F1}">
-                <asvg:svgBlip xmlns:asvg="http://schemas.microsoft.com/office/drawing/2016/SVG/main" r:embed="rId2"/>
-              </a:ext>
-            </a:extLst>
-          </a:blip>
+          <a:blip r:embed="rId1"/>
           <a:stretch>
             <a:fillRect/>
           </a:stretch>
@@ -6301,20 +6277,14 @@
       </p:sp>
       <p:pic>
         <p:nvPicPr>
-          <p:cNvPr id="8" name="Image 0" descr="d:\persistant_message_broker\docs\slide5_group_commit.svg">    </p:cNvPr>
+          <p:cNvPr id="8" name="Image 0" descr="d:\persistant_message_broker\docs\slide5_group_commit.png">    </p:cNvPr>
           <p:cNvPicPr>
             <a:picLocks noChangeAspect="1"/>
           </p:cNvPicPr>
           <p:nvPr/>
         </p:nvPicPr>
         <p:blipFill>
-          <a:blip r:embed="rId1">
-            <a:extLst>
-              <a:ext uri="{96DAC541-7B7A-43D3-8B79-37D633B846F1}">
-                <asvg:svgBlip xmlns:asvg="http://schemas.microsoft.com/office/drawing/2016/SVG/main" r:embed="rId2"/>
-              </a:ext>
-            </a:extLst>
-          </a:blip>
+          <a:blip r:embed="rId1"/>
           <a:stretch>
             <a:fillRect/>
           </a:stretch>
@@ -6875,20 +6845,14 @@
       </p:sp>
       <p:pic>
         <p:nvPicPr>
-          <p:cNvPr id="8" name="Image 0" descr="d:\persistant_message_broker\docs\slide6_router_delivery.svg">    </p:cNvPr>
+          <p:cNvPr id="8" name="Image 0" descr="d:\persistant_message_broker\docs\slide6_router_delivery.png">    </p:cNvPr>
           <p:cNvPicPr>
             <a:picLocks noChangeAspect="1"/>
           </p:cNvPicPr>
           <p:nvPr/>
         </p:nvPicPr>
         <p:blipFill>
-          <a:blip r:embed="rId1">
-            <a:extLst>
-              <a:ext uri="{96DAC541-7B7A-43D3-8B79-37D633B846F1}">
-                <asvg:svgBlip xmlns:asvg="http://schemas.microsoft.com/office/drawing/2016/SVG/main" r:embed="rId2"/>
-              </a:ext>
-            </a:extLst>
-          </a:blip>
+          <a:blip r:embed="rId1"/>
           <a:stretch>
             <a:fillRect/>
           </a:stretch>
@@ -7449,20 +7413,14 @@
       </p:sp>
       <p:pic>
         <p:nvPicPr>
-          <p:cNvPr id="8" name="Image 0" descr="d:\persistant_message_broker\docs\slide7_compaction.svg">    </p:cNvPr>
+          <p:cNvPr id="8" name="Image 0" descr="d:\persistant_message_broker\docs\slide7_compaction.png">    </p:cNvPr>
           <p:cNvPicPr>
             <a:picLocks noChangeAspect="1"/>
           </p:cNvPicPr>
           <p:nvPr/>
         </p:nvPicPr>
         <p:blipFill>
-          <a:blip r:embed="rId1">
-            <a:extLst>
-              <a:ext uri="{96DAC541-7B7A-43D3-8B79-37D633B846F1}">
-                <asvg:svgBlip xmlns:asvg="http://schemas.microsoft.com/office/drawing/2016/SVG/main" r:embed="rId2"/>
-              </a:ext>
-            </a:extLst>
-          </a:blip>
+          <a:blip r:embed="rId1"/>
           <a:stretch>
             <a:fillRect/>
           </a:stretch>
@@ -8023,20 +7981,14 @@
       </p:sp>
       <p:pic>
         <p:nvPicPr>
-          <p:cNvPr id="8" name="Image 0" descr="d:\persistant_message_broker\docs\slide8_wire_protocol.svg">    </p:cNvPr>
+          <p:cNvPr id="8" name="Image 0" descr="d:\persistant_message_broker\docs\slide8_wire_protocol.png">    </p:cNvPr>
           <p:cNvPicPr>
             <a:picLocks noChangeAspect="1"/>
           </p:cNvPicPr>
           <p:nvPr/>
         </p:nvPicPr>
         <p:blipFill>
-          <a:blip r:embed="rId1">
-            <a:extLst>
-              <a:ext uri="{96DAC541-7B7A-43D3-8B79-37D633B846F1}">
-                <asvg:svgBlip xmlns:asvg="http://schemas.microsoft.com/office/drawing/2016/SVG/main" r:embed="rId2"/>
-              </a:ext>
-            </a:extLst>
-          </a:blip>
+          <a:blip r:embed="rId1"/>
           <a:stretch>
             <a:fillRect/>
           </a:stretch>
